--- a/01_Python_Essentials/L01-Intro-installation/01-1_what_is_programming_and_Why_Python.pptx
+++ b/01_Python_Essentials/L01-Intro-installation/01-1_what_is_programming_and_Why_Python.pptx
@@ -5,34 +5,33 @@
     <p:sldMasterId id="2147483648" r:id="rId1"/>
   </p:sldMasterIdLst>
   <p:notesMasterIdLst>
-    <p:notesMasterId r:id="rId24"/>
+    <p:notesMasterId r:id="rId23"/>
   </p:notesMasterIdLst>
   <p:handoutMasterIdLst>
-    <p:handoutMasterId r:id="rId25"/>
+    <p:handoutMasterId r:id="rId24"/>
   </p:handoutMasterIdLst>
   <p:sldIdLst>
     <p:sldId id="268" r:id="rId2"/>
     <p:sldId id="273" r:id="rId3"/>
     <p:sldId id="275" r:id="rId4"/>
     <p:sldId id="277" r:id="rId5"/>
-    <p:sldId id="274" r:id="rId6"/>
-    <p:sldId id="278" r:id="rId7"/>
-    <p:sldId id="279" r:id="rId8"/>
-    <p:sldId id="280" r:id="rId9"/>
-    <p:sldId id="281" r:id="rId10"/>
-    <p:sldId id="282" r:id="rId11"/>
-    <p:sldId id="276" r:id="rId12"/>
-    <p:sldId id="271" r:id="rId13"/>
-    <p:sldId id="267" r:id="rId14"/>
-    <p:sldId id="269" r:id="rId15"/>
-    <p:sldId id="260" r:id="rId16"/>
-    <p:sldId id="263" r:id="rId17"/>
-    <p:sldId id="266" r:id="rId18"/>
-    <p:sldId id="261" r:id="rId19"/>
-    <p:sldId id="270" r:id="rId20"/>
+    <p:sldId id="287" r:id="rId6"/>
+    <p:sldId id="286" r:id="rId7"/>
+    <p:sldId id="283" r:id="rId8"/>
+    <p:sldId id="278" r:id="rId9"/>
+    <p:sldId id="279" r:id="rId10"/>
+    <p:sldId id="280" r:id="rId11"/>
+    <p:sldId id="281" r:id="rId12"/>
+    <p:sldId id="282" r:id="rId13"/>
+    <p:sldId id="270" r:id="rId14"/>
+    <p:sldId id="276" r:id="rId15"/>
+    <p:sldId id="267" r:id="rId16"/>
+    <p:sldId id="269" r:id="rId17"/>
+    <p:sldId id="260" r:id="rId18"/>
+    <p:sldId id="263" r:id="rId19"/>
+    <p:sldId id="266" r:id="rId20"/>
     <p:sldId id="264" r:id="rId21"/>
     <p:sldId id="265" r:id="rId22"/>
-    <p:sldId id="259" r:id="rId23"/>
   </p:sldIdLst>
   <p:sldSz cx="12192000" cy="6858000"/>
   <p:notesSz cx="6858000" cy="9144000"/>
@@ -236,7 +235,7 @@
           <a:p>
             <a:fld id="{7BAEECA8-D063-486F-AE31-5020270C1449}" type="datetimeFigureOut">
               <a:rPr lang="en-US" smtClean="0"/>
-              <a:t>12/17/2025</a:t>
+              <a:t>3/15/2026</a:t>
             </a:fld>
             <a:endParaRPr lang="en-US"/>
           </a:p>
@@ -413,7 +412,7 @@
           <a:p>
             <a:fld id="{E0F4871E-3672-42BE-BBA1-0BAFEE555536}" type="datetimeFigureOut">
               <a:rPr lang="en-US" smtClean="0"/>
-              <a:t>12/17/2025</a:t>
+              <a:t>3/15/2026</a:t>
             </a:fld>
             <a:endParaRPr lang="en-US"/>
           </a:p>
@@ -856,6 +855,302 @@
 </p:notes>
 </file>
 
+<file path=ppt/notesSlides/notesSlide10.xml><?xml version="1.0" encoding="utf-8"?>
+<p:notes xmlns:a="http://schemas.openxmlformats.org/drawingml/2006/main" xmlns:r="http://schemas.openxmlformats.org/officeDocument/2006/relationships" xmlns:p="http://schemas.openxmlformats.org/presentationml/2006/main">
+  <p:cSld>
+    <p:spTree>
+      <p:nvGrpSpPr>
+        <p:cNvPr id="1" name="">
+          <a:extLst>
+            <a:ext uri="{FF2B5EF4-FFF2-40B4-BE49-F238E27FC236}">
+              <a16:creationId xmlns:a16="http://schemas.microsoft.com/office/drawing/2014/main" id="{72832844-8E95-891E-3EF8-C0F1A34B5F78}"/>
+            </a:ext>
+          </a:extLst>
+        </p:cNvPr>
+        <p:cNvGrpSpPr/>
+        <p:nvPr/>
+      </p:nvGrpSpPr>
+      <p:grpSpPr>
+        <a:xfrm>
+          <a:off x="0" y="0"/>
+          <a:ext cx="0" cy="0"/>
+          <a:chOff x="0" y="0"/>
+          <a:chExt cx="0" cy="0"/>
+        </a:xfrm>
+      </p:grpSpPr>
+      <p:sp>
+        <p:nvSpPr>
+          <p:cNvPr id="2" name="Slide Image Placeholder 1">
+            <a:extLst>
+              <a:ext uri="{FF2B5EF4-FFF2-40B4-BE49-F238E27FC236}">
+                <a16:creationId xmlns:a16="http://schemas.microsoft.com/office/drawing/2014/main" id="{AF71C2D2-C2D9-7D8D-1F88-438F1138FFE7}"/>
+              </a:ext>
+            </a:extLst>
+          </p:cNvPr>
+          <p:cNvSpPr>
+            <a:spLocks noGrp="1" noRot="1" noChangeAspect="1"/>
+          </p:cNvSpPr>
+          <p:nvPr>
+            <p:ph type="sldImg"/>
+          </p:nvPr>
+        </p:nvSpPr>
+        <p:spPr/>
+      </p:sp>
+      <p:sp>
+        <p:nvSpPr>
+          <p:cNvPr id="3" name="Notes Placeholder 2">
+            <a:extLst>
+              <a:ext uri="{FF2B5EF4-FFF2-40B4-BE49-F238E27FC236}">
+                <a16:creationId xmlns:a16="http://schemas.microsoft.com/office/drawing/2014/main" id="{687E05EF-A6AD-FE87-7F70-E9959A1F995B}"/>
+              </a:ext>
+            </a:extLst>
+          </p:cNvPr>
+          <p:cNvSpPr>
+            <a:spLocks noGrp="1"/>
+          </p:cNvSpPr>
+          <p:nvPr>
+            <p:ph type="body" idx="1"/>
+          </p:nvPr>
+        </p:nvSpPr>
+        <p:spPr/>
+        <p:txBody>
+          <a:bodyPr/>
+          <a:lstStyle/>
+          <a:p>
+            <a:pPr marL="0" marR="0" lvl="0" indent="0" algn="l" defTabSz="914400" rtl="0" eaLnBrk="1" fontAlgn="auto" latinLnBrk="0" hangingPunct="1">
+              <a:lnSpc>
+                <a:spcPct val="100000"/>
+              </a:lnSpc>
+              <a:spcBef>
+                <a:spcPts val="0"/>
+              </a:spcBef>
+              <a:spcAft>
+                <a:spcPts val="0"/>
+              </a:spcAft>
+              <a:buClrTx/>
+              <a:buSzTx/>
+              <a:buFontTx/>
+              <a:buNone/>
+              <a:tabLst/>
+              <a:defRPr/>
+            </a:pPr>
+            <a:r>
+              <a:rPr lang="en-US" sz="1200" dirty="0">
+                <a:solidFill>
+                  <a:schemeClr val="accent6">
+                    <a:lumMod val="60000"/>
+                    <a:lumOff val="40000"/>
+                  </a:schemeClr>
+                </a:solidFill>
+              </a:rPr>
+              <a:t>It’s a </a:t>
+            </a:r>
+            <a:r>
+              <a:rPr lang="en-US" sz="1200" b="1" dirty="0">
+                <a:solidFill>
+                  <a:schemeClr val="accent6">
+                    <a:lumMod val="60000"/>
+                    <a:lumOff val="40000"/>
+                  </a:schemeClr>
+                </a:solidFill>
+              </a:rPr>
+              <a:t>tool to turn Ideas into reality</a:t>
+            </a:r>
+            <a:endParaRPr lang="en-US" sz="1200" dirty="0">
+              <a:solidFill>
+                <a:schemeClr val="accent6">
+                  <a:lumMod val="60000"/>
+                  <a:lumOff val="40000"/>
+                </a:schemeClr>
+              </a:solidFill>
+            </a:endParaRPr>
+          </a:p>
+          <a:p>
+            <a:pPr marL="0" marR="0" lvl="0" indent="0" algn="l" defTabSz="914400" rtl="0" eaLnBrk="1" fontAlgn="auto" latinLnBrk="0" hangingPunct="1">
+              <a:lnSpc>
+                <a:spcPct val="100000"/>
+              </a:lnSpc>
+              <a:spcBef>
+                <a:spcPts val="0"/>
+              </a:spcBef>
+              <a:spcAft>
+                <a:spcPts val="0"/>
+              </a:spcAft>
+              <a:buClrTx/>
+              <a:buSzTx/>
+              <a:buFontTx/>
+              <a:buNone/>
+              <a:tabLst/>
+              <a:defRPr/>
+            </a:pPr>
+            <a:endParaRPr lang="en-US" sz="1200" dirty="0">
+              <a:solidFill>
+                <a:schemeClr val="accent6">
+                  <a:lumMod val="60000"/>
+                  <a:lumOff val="40000"/>
+                </a:schemeClr>
+              </a:solidFill>
+            </a:endParaRPr>
+          </a:p>
+        </p:txBody>
+      </p:sp>
+      <p:sp>
+        <p:nvSpPr>
+          <p:cNvPr id="4" name="Slide Number Placeholder 3">
+            <a:extLst>
+              <a:ext uri="{FF2B5EF4-FFF2-40B4-BE49-F238E27FC236}">
+                <a16:creationId xmlns:a16="http://schemas.microsoft.com/office/drawing/2014/main" id="{80C283ED-DD64-C9FB-832A-942C4DC0BE81}"/>
+              </a:ext>
+            </a:extLst>
+          </p:cNvPr>
+          <p:cNvSpPr>
+            <a:spLocks noGrp="1"/>
+          </p:cNvSpPr>
+          <p:nvPr>
+            <p:ph type="sldNum" sz="quarter" idx="5"/>
+          </p:nvPr>
+        </p:nvSpPr>
+        <p:spPr/>
+        <p:txBody>
+          <a:bodyPr/>
+          <a:lstStyle/>
+          <a:p>
+            <a:fld id="{E27EC57A-C70D-4C56-92FA-51F20B72EE35}" type="slidenum">
+              <a:rPr lang="en-US" smtClean="0"/>
+              <a:t>12</a:t>
+            </a:fld>
+            <a:endParaRPr lang="en-US"/>
+          </a:p>
+        </p:txBody>
+      </p:sp>
+    </p:spTree>
+    <p:extLst>
+      <p:ext uri="{BB962C8B-B14F-4D97-AF65-F5344CB8AC3E}">
+        <p14:creationId xmlns:p14="http://schemas.microsoft.com/office/powerpoint/2010/main" val="3004818721"/>
+      </p:ext>
+    </p:extLst>
+  </p:cSld>
+  <p:clrMapOvr>
+    <a:masterClrMapping/>
+  </p:clrMapOvr>
+</p:notes>
+</file>
+
+<file path=ppt/notesSlides/notesSlide11.xml><?xml version="1.0" encoding="utf-8"?>
+<p:notes xmlns:a="http://schemas.openxmlformats.org/drawingml/2006/main" xmlns:r="http://schemas.openxmlformats.org/officeDocument/2006/relationships" xmlns:p="http://schemas.openxmlformats.org/presentationml/2006/main">
+  <p:cSld>
+    <p:spTree>
+      <p:nvGrpSpPr>
+        <p:cNvPr id="1" name="">
+          <a:extLst>
+            <a:ext uri="{FF2B5EF4-FFF2-40B4-BE49-F238E27FC236}">
+              <a16:creationId xmlns:a16="http://schemas.microsoft.com/office/drawing/2014/main" id="{423D6142-B5E5-C17E-5D11-01BFF7F065DA}"/>
+            </a:ext>
+          </a:extLst>
+        </p:cNvPr>
+        <p:cNvGrpSpPr/>
+        <p:nvPr/>
+      </p:nvGrpSpPr>
+      <p:grpSpPr>
+        <a:xfrm>
+          <a:off x="0" y="0"/>
+          <a:ext cx="0" cy="0"/>
+          <a:chOff x="0" y="0"/>
+          <a:chExt cx="0" cy="0"/>
+        </a:xfrm>
+      </p:grpSpPr>
+      <p:sp>
+        <p:nvSpPr>
+          <p:cNvPr id="2" name="Slide Image Placeholder 1">
+            <a:extLst>
+              <a:ext uri="{FF2B5EF4-FFF2-40B4-BE49-F238E27FC236}">
+                <a16:creationId xmlns:a16="http://schemas.microsoft.com/office/drawing/2014/main" id="{C605A765-9565-6BFE-51B5-DD5D48C9D959}"/>
+              </a:ext>
+            </a:extLst>
+          </p:cNvPr>
+          <p:cNvSpPr>
+            <a:spLocks noGrp="1" noRot="1" noChangeAspect="1"/>
+          </p:cNvSpPr>
+          <p:nvPr>
+            <p:ph type="sldImg"/>
+          </p:nvPr>
+        </p:nvSpPr>
+        <p:spPr/>
+      </p:sp>
+      <p:sp>
+        <p:nvSpPr>
+          <p:cNvPr id="3" name="Notes Placeholder 2">
+            <a:extLst>
+              <a:ext uri="{FF2B5EF4-FFF2-40B4-BE49-F238E27FC236}">
+                <a16:creationId xmlns:a16="http://schemas.microsoft.com/office/drawing/2014/main" id="{15BEB98A-B973-0838-58E0-6BF3213929E7}"/>
+              </a:ext>
+            </a:extLst>
+          </p:cNvPr>
+          <p:cNvSpPr>
+            <a:spLocks noGrp="1"/>
+          </p:cNvSpPr>
+          <p:nvPr>
+            <p:ph type="body" idx="1"/>
+          </p:nvPr>
+        </p:nvSpPr>
+        <p:spPr/>
+        <p:txBody>
+          <a:bodyPr/>
+          <a:lstStyle/>
+          <a:p>
+            <a:endParaRPr lang="en-US" dirty="0">
+              <a:solidFill>
+                <a:schemeClr val="accent6">
+                  <a:lumMod val="60000"/>
+                  <a:lumOff val="40000"/>
+                </a:schemeClr>
+              </a:solidFill>
+            </a:endParaRPr>
+          </a:p>
+        </p:txBody>
+      </p:sp>
+      <p:sp>
+        <p:nvSpPr>
+          <p:cNvPr id="4" name="Slide Number Placeholder 3">
+            <a:extLst>
+              <a:ext uri="{FF2B5EF4-FFF2-40B4-BE49-F238E27FC236}">
+                <a16:creationId xmlns:a16="http://schemas.microsoft.com/office/drawing/2014/main" id="{8835812F-63B5-D702-7B65-162BA8894D44}"/>
+              </a:ext>
+            </a:extLst>
+          </p:cNvPr>
+          <p:cNvSpPr>
+            <a:spLocks noGrp="1"/>
+          </p:cNvSpPr>
+          <p:nvPr>
+            <p:ph type="sldNum" sz="quarter" idx="5"/>
+          </p:nvPr>
+        </p:nvSpPr>
+        <p:spPr/>
+        <p:txBody>
+          <a:bodyPr/>
+          <a:lstStyle/>
+          <a:p>
+            <a:fld id="{E27EC57A-C70D-4C56-92FA-51F20B72EE35}" type="slidenum">
+              <a:rPr lang="en-US" smtClean="0"/>
+              <a:t>14</a:t>
+            </a:fld>
+            <a:endParaRPr lang="en-US"/>
+          </a:p>
+        </p:txBody>
+      </p:sp>
+    </p:spTree>
+    <p:extLst>
+      <p:ext uri="{BB962C8B-B14F-4D97-AF65-F5344CB8AC3E}">
+        <p14:creationId xmlns:p14="http://schemas.microsoft.com/office/powerpoint/2010/main" val="885883684"/>
+      </p:ext>
+    </p:extLst>
+  </p:cSld>
+  <p:clrMapOvr>
+    <a:masterClrMapping/>
+  </p:clrMapOvr>
+</p:notes>
+</file>
+
 <file path=ppt/notesSlides/notesSlide2.xml><?xml version="1.0" encoding="utf-8"?>
 <p:notes xmlns:a="http://schemas.openxmlformats.org/drawingml/2006/main" xmlns:r="http://schemas.openxmlformats.org/officeDocument/2006/relationships" xmlns:p="http://schemas.openxmlformats.org/presentationml/2006/main">
   <p:cSld>
@@ -1334,7 +1629,7 @@
         <p:cNvPr id="1" name="">
           <a:extLst>
             <a:ext uri="{FF2B5EF4-FFF2-40B4-BE49-F238E27FC236}">
-              <a16:creationId xmlns:a16="http://schemas.microsoft.com/office/drawing/2014/main" id="{183B4ACC-EF1B-AF7F-4045-7E8506AFF38F}"/>
+              <a16:creationId xmlns:a16="http://schemas.microsoft.com/office/drawing/2014/main" id="{46AA57EC-CE69-4E7C-CA2B-2FE584A0F334}"/>
             </a:ext>
           </a:extLst>
         </p:cNvPr>
@@ -1354,7 +1649,7 @@
           <p:cNvPr id="2" name="Slide Image Placeholder 1">
             <a:extLst>
               <a:ext uri="{FF2B5EF4-FFF2-40B4-BE49-F238E27FC236}">
-                <a16:creationId xmlns:a16="http://schemas.microsoft.com/office/drawing/2014/main" id="{D872E331-16C8-42AB-C629-D7E8A87F49C3}"/>
+                <a16:creationId xmlns:a16="http://schemas.microsoft.com/office/drawing/2014/main" id="{5BA5BC09-C45F-7975-6BF0-88E7079B6363}"/>
               </a:ext>
             </a:extLst>
           </p:cNvPr>
@@ -1372,7 +1667,7 @@
           <p:cNvPr id="3" name="Notes Placeholder 2">
             <a:extLst>
               <a:ext uri="{FF2B5EF4-FFF2-40B4-BE49-F238E27FC236}">
-                <a16:creationId xmlns:a16="http://schemas.microsoft.com/office/drawing/2014/main" id="{33EC3C7B-A414-72AF-6DC8-A97137CEAA99}"/>
+                <a16:creationId xmlns:a16="http://schemas.microsoft.com/office/drawing/2014/main" id="{977DDD90-4AAA-FB99-600B-76F25B78D20E}"/>
               </a:ext>
             </a:extLst>
           </p:cNvPr>
@@ -1404,7 +1699,7 @@
           <p:cNvPr id="4" name="Slide Number Placeholder 3">
             <a:extLst>
               <a:ext uri="{FF2B5EF4-FFF2-40B4-BE49-F238E27FC236}">
-                <a16:creationId xmlns:a16="http://schemas.microsoft.com/office/drawing/2014/main" id="{FE2A3237-5040-B856-52CA-2DD24E9DFBC1}"/>
+                <a16:creationId xmlns:a16="http://schemas.microsoft.com/office/drawing/2014/main" id="{96DD2B8B-AF67-A5D9-2522-84C39E33E740}"/>
               </a:ext>
             </a:extLst>
           </p:cNvPr>
@@ -1431,7 +1726,7 @@
     </p:spTree>
     <p:extLst>
       <p:ext uri="{BB962C8B-B14F-4D97-AF65-F5344CB8AC3E}">
-        <p14:creationId xmlns:p14="http://schemas.microsoft.com/office/powerpoint/2010/main" val="176641179"/>
+        <p14:creationId xmlns:p14="http://schemas.microsoft.com/office/powerpoint/2010/main" val="196520801"/>
       </p:ext>
     </p:extLst>
   </p:cSld>
@@ -1442,6 +1737,236 @@
 </file>
 
 <file path=ppt/notesSlides/notesSlide6.xml><?xml version="1.0" encoding="utf-8"?>
+<p:notes xmlns:a="http://schemas.openxmlformats.org/drawingml/2006/main" xmlns:r="http://schemas.openxmlformats.org/officeDocument/2006/relationships" xmlns:p="http://schemas.openxmlformats.org/presentationml/2006/main">
+  <p:cSld>
+    <p:spTree>
+      <p:nvGrpSpPr>
+        <p:cNvPr id="1" name="">
+          <a:extLst>
+            <a:ext uri="{FF2B5EF4-FFF2-40B4-BE49-F238E27FC236}">
+              <a16:creationId xmlns:a16="http://schemas.microsoft.com/office/drawing/2014/main" id="{BFD2A46C-EE0A-92E6-5663-55A011E81258}"/>
+            </a:ext>
+          </a:extLst>
+        </p:cNvPr>
+        <p:cNvGrpSpPr/>
+        <p:nvPr/>
+      </p:nvGrpSpPr>
+      <p:grpSpPr>
+        <a:xfrm>
+          <a:off x="0" y="0"/>
+          <a:ext cx="0" cy="0"/>
+          <a:chOff x="0" y="0"/>
+          <a:chExt cx="0" cy="0"/>
+        </a:xfrm>
+      </p:grpSpPr>
+      <p:sp>
+        <p:nvSpPr>
+          <p:cNvPr id="2" name="Slide Image Placeholder 1">
+            <a:extLst>
+              <a:ext uri="{FF2B5EF4-FFF2-40B4-BE49-F238E27FC236}">
+                <a16:creationId xmlns:a16="http://schemas.microsoft.com/office/drawing/2014/main" id="{32F94DFC-87AC-2E4D-99DB-D7A64EEC88CC}"/>
+              </a:ext>
+            </a:extLst>
+          </p:cNvPr>
+          <p:cNvSpPr>
+            <a:spLocks noGrp="1" noRot="1" noChangeAspect="1"/>
+          </p:cNvSpPr>
+          <p:nvPr>
+            <p:ph type="sldImg"/>
+          </p:nvPr>
+        </p:nvSpPr>
+        <p:spPr/>
+      </p:sp>
+      <p:sp>
+        <p:nvSpPr>
+          <p:cNvPr id="3" name="Notes Placeholder 2">
+            <a:extLst>
+              <a:ext uri="{FF2B5EF4-FFF2-40B4-BE49-F238E27FC236}">
+                <a16:creationId xmlns:a16="http://schemas.microsoft.com/office/drawing/2014/main" id="{5BEBA560-285E-8AF0-CE2F-695FA3DC252B}"/>
+              </a:ext>
+            </a:extLst>
+          </p:cNvPr>
+          <p:cNvSpPr>
+            <a:spLocks noGrp="1"/>
+          </p:cNvSpPr>
+          <p:nvPr>
+            <p:ph type="body" idx="1"/>
+          </p:nvPr>
+        </p:nvSpPr>
+        <p:spPr/>
+        <p:txBody>
+          <a:bodyPr/>
+          <a:lstStyle/>
+          <a:p>
+            <a:endParaRPr lang="en-US" dirty="0">
+              <a:solidFill>
+                <a:schemeClr val="accent6">
+                  <a:lumMod val="60000"/>
+                  <a:lumOff val="40000"/>
+                </a:schemeClr>
+              </a:solidFill>
+            </a:endParaRPr>
+          </a:p>
+        </p:txBody>
+      </p:sp>
+      <p:sp>
+        <p:nvSpPr>
+          <p:cNvPr id="4" name="Slide Number Placeholder 3">
+            <a:extLst>
+              <a:ext uri="{FF2B5EF4-FFF2-40B4-BE49-F238E27FC236}">
+                <a16:creationId xmlns:a16="http://schemas.microsoft.com/office/drawing/2014/main" id="{0B17BB66-8AFD-BEFD-4856-92DCECB9E8CD}"/>
+              </a:ext>
+            </a:extLst>
+          </p:cNvPr>
+          <p:cNvSpPr>
+            <a:spLocks noGrp="1"/>
+          </p:cNvSpPr>
+          <p:nvPr>
+            <p:ph type="sldNum" sz="quarter" idx="5"/>
+          </p:nvPr>
+        </p:nvSpPr>
+        <p:spPr/>
+        <p:txBody>
+          <a:bodyPr/>
+          <a:lstStyle/>
+          <a:p>
+            <a:fld id="{E27EC57A-C70D-4C56-92FA-51F20B72EE35}" type="slidenum">
+              <a:rPr lang="en-US" smtClean="0"/>
+              <a:t>6</a:t>
+            </a:fld>
+            <a:endParaRPr lang="en-US"/>
+          </a:p>
+        </p:txBody>
+      </p:sp>
+    </p:spTree>
+    <p:extLst>
+      <p:ext uri="{BB962C8B-B14F-4D97-AF65-F5344CB8AC3E}">
+        <p14:creationId xmlns:p14="http://schemas.microsoft.com/office/powerpoint/2010/main" val="1392922697"/>
+      </p:ext>
+    </p:extLst>
+  </p:cSld>
+  <p:clrMapOvr>
+    <a:masterClrMapping/>
+  </p:clrMapOvr>
+</p:notes>
+</file>
+
+<file path=ppt/notesSlides/notesSlide7.xml><?xml version="1.0" encoding="utf-8"?>
+<p:notes xmlns:a="http://schemas.openxmlformats.org/drawingml/2006/main" xmlns:r="http://schemas.openxmlformats.org/officeDocument/2006/relationships" xmlns:p="http://schemas.openxmlformats.org/presentationml/2006/main">
+  <p:cSld>
+    <p:spTree>
+      <p:nvGrpSpPr>
+        <p:cNvPr id="1" name="">
+          <a:extLst>
+            <a:ext uri="{FF2B5EF4-FFF2-40B4-BE49-F238E27FC236}">
+              <a16:creationId xmlns:a16="http://schemas.microsoft.com/office/drawing/2014/main" id="{5C3C5174-4A58-1F47-E80D-21E322AB30C6}"/>
+            </a:ext>
+          </a:extLst>
+        </p:cNvPr>
+        <p:cNvGrpSpPr/>
+        <p:nvPr/>
+      </p:nvGrpSpPr>
+      <p:grpSpPr>
+        <a:xfrm>
+          <a:off x="0" y="0"/>
+          <a:ext cx="0" cy="0"/>
+          <a:chOff x="0" y="0"/>
+          <a:chExt cx="0" cy="0"/>
+        </a:xfrm>
+      </p:grpSpPr>
+      <p:sp>
+        <p:nvSpPr>
+          <p:cNvPr id="2" name="Slide Image Placeholder 1">
+            <a:extLst>
+              <a:ext uri="{FF2B5EF4-FFF2-40B4-BE49-F238E27FC236}">
+                <a16:creationId xmlns:a16="http://schemas.microsoft.com/office/drawing/2014/main" id="{2743C1D0-6D4D-D8D9-79CC-0759788BBA3A}"/>
+              </a:ext>
+            </a:extLst>
+          </p:cNvPr>
+          <p:cNvSpPr>
+            <a:spLocks noGrp="1" noRot="1" noChangeAspect="1"/>
+          </p:cNvSpPr>
+          <p:nvPr>
+            <p:ph type="sldImg"/>
+          </p:nvPr>
+        </p:nvSpPr>
+        <p:spPr/>
+      </p:sp>
+      <p:sp>
+        <p:nvSpPr>
+          <p:cNvPr id="3" name="Notes Placeholder 2">
+            <a:extLst>
+              <a:ext uri="{FF2B5EF4-FFF2-40B4-BE49-F238E27FC236}">
+                <a16:creationId xmlns:a16="http://schemas.microsoft.com/office/drawing/2014/main" id="{23A2E3C9-352F-88FC-3011-B2197F975073}"/>
+              </a:ext>
+            </a:extLst>
+          </p:cNvPr>
+          <p:cNvSpPr>
+            <a:spLocks noGrp="1"/>
+          </p:cNvSpPr>
+          <p:nvPr>
+            <p:ph type="body" idx="1"/>
+          </p:nvPr>
+        </p:nvSpPr>
+        <p:spPr/>
+        <p:txBody>
+          <a:bodyPr/>
+          <a:lstStyle/>
+          <a:p>
+            <a:endParaRPr lang="en-US" dirty="0">
+              <a:solidFill>
+                <a:schemeClr val="accent6">
+                  <a:lumMod val="60000"/>
+                  <a:lumOff val="40000"/>
+                </a:schemeClr>
+              </a:solidFill>
+            </a:endParaRPr>
+          </a:p>
+        </p:txBody>
+      </p:sp>
+      <p:sp>
+        <p:nvSpPr>
+          <p:cNvPr id="4" name="Slide Number Placeholder 3">
+            <a:extLst>
+              <a:ext uri="{FF2B5EF4-FFF2-40B4-BE49-F238E27FC236}">
+                <a16:creationId xmlns:a16="http://schemas.microsoft.com/office/drawing/2014/main" id="{A27C1091-613F-5B4D-7FF6-DB1FFD6585E5}"/>
+              </a:ext>
+            </a:extLst>
+          </p:cNvPr>
+          <p:cNvSpPr>
+            <a:spLocks noGrp="1"/>
+          </p:cNvSpPr>
+          <p:nvPr>
+            <p:ph type="sldNum" sz="quarter" idx="5"/>
+          </p:nvPr>
+        </p:nvSpPr>
+        <p:spPr/>
+        <p:txBody>
+          <a:bodyPr/>
+          <a:lstStyle/>
+          <a:p>
+            <a:fld id="{E27EC57A-C70D-4C56-92FA-51F20B72EE35}" type="slidenum">
+              <a:rPr lang="en-US" smtClean="0"/>
+              <a:t>7</a:t>
+            </a:fld>
+            <a:endParaRPr lang="en-US"/>
+          </a:p>
+        </p:txBody>
+      </p:sp>
+    </p:spTree>
+    <p:extLst>
+      <p:ext uri="{BB962C8B-B14F-4D97-AF65-F5344CB8AC3E}">
+        <p14:creationId xmlns:p14="http://schemas.microsoft.com/office/powerpoint/2010/main" val="4243658944"/>
+      </p:ext>
+    </p:extLst>
+  </p:cSld>
+  <p:clrMapOvr>
+    <a:masterClrMapping/>
+  </p:clrMapOvr>
+</p:notes>
+</file>
+
+<file path=ppt/notesSlides/notesSlide8.xml><?xml version="1.0" encoding="utf-8"?>
 <p:notes xmlns:a="http://schemas.openxmlformats.org/drawingml/2006/main" xmlns:r="http://schemas.openxmlformats.org/officeDocument/2006/relationships" xmlns:p="http://schemas.openxmlformats.org/presentationml/2006/main">
   <p:cSld>
     <p:spTree>
@@ -1530,7 +2055,7 @@
           <a:p>
             <a:fld id="{E27EC57A-C70D-4C56-92FA-51F20B72EE35}" type="slidenum">
               <a:rPr lang="en-US" smtClean="0"/>
-              <a:t>8</a:t>
+              <a:t>10</a:t>
             </a:fld>
             <a:endParaRPr lang="en-US"/>
           </a:p>
@@ -1549,7 +2074,7 @@
 </p:notes>
 </file>
 
-<file path=ppt/notesSlides/notesSlide7.xml><?xml version="1.0" encoding="utf-8"?>
+<file path=ppt/notesSlides/notesSlide9.xml><?xml version="1.0" encoding="utf-8"?>
 <p:notes xmlns:a="http://schemas.openxmlformats.org/drawingml/2006/main" xmlns:r="http://schemas.openxmlformats.org/officeDocument/2006/relationships" xmlns:p="http://schemas.openxmlformats.org/presentationml/2006/main">
   <p:cSld>
     <p:spTree>
@@ -1711,7 +2236,7 @@
           <a:p>
             <a:fld id="{E27EC57A-C70D-4C56-92FA-51F20B72EE35}" type="slidenum">
               <a:rPr lang="en-US" smtClean="0"/>
-              <a:t>9</a:t>
+              <a:t>11</a:t>
             </a:fld>
             <a:endParaRPr lang="en-US"/>
           </a:p>
@@ -1721,302 +2246,6 @@
     <p:extLst>
       <p:ext uri="{BB962C8B-B14F-4D97-AF65-F5344CB8AC3E}">
         <p14:creationId xmlns:p14="http://schemas.microsoft.com/office/powerpoint/2010/main" val="1735534860"/>
-      </p:ext>
-    </p:extLst>
-  </p:cSld>
-  <p:clrMapOvr>
-    <a:masterClrMapping/>
-  </p:clrMapOvr>
-</p:notes>
-</file>
-
-<file path=ppt/notesSlides/notesSlide8.xml><?xml version="1.0" encoding="utf-8"?>
-<p:notes xmlns:a="http://schemas.openxmlformats.org/drawingml/2006/main" xmlns:r="http://schemas.openxmlformats.org/officeDocument/2006/relationships" xmlns:p="http://schemas.openxmlformats.org/presentationml/2006/main">
-  <p:cSld>
-    <p:spTree>
-      <p:nvGrpSpPr>
-        <p:cNvPr id="1" name="">
-          <a:extLst>
-            <a:ext uri="{FF2B5EF4-FFF2-40B4-BE49-F238E27FC236}">
-              <a16:creationId xmlns:a16="http://schemas.microsoft.com/office/drawing/2014/main" id="{72832844-8E95-891E-3EF8-C0F1A34B5F78}"/>
-            </a:ext>
-          </a:extLst>
-        </p:cNvPr>
-        <p:cNvGrpSpPr/>
-        <p:nvPr/>
-      </p:nvGrpSpPr>
-      <p:grpSpPr>
-        <a:xfrm>
-          <a:off x="0" y="0"/>
-          <a:ext cx="0" cy="0"/>
-          <a:chOff x="0" y="0"/>
-          <a:chExt cx="0" cy="0"/>
-        </a:xfrm>
-      </p:grpSpPr>
-      <p:sp>
-        <p:nvSpPr>
-          <p:cNvPr id="2" name="Slide Image Placeholder 1">
-            <a:extLst>
-              <a:ext uri="{FF2B5EF4-FFF2-40B4-BE49-F238E27FC236}">
-                <a16:creationId xmlns:a16="http://schemas.microsoft.com/office/drawing/2014/main" id="{AF71C2D2-C2D9-7D8D-1F88-438F1138FFE7}"/>
-              </a:ext>
-            </a:extLst>
-          </p:cNvPr>
-          <p:cNvSpPr>
-            <a:spLocks noGrp="1" noRot="1" noChangeAspect="1"/>
-          </p:cNvSpPr>
-          <p:nvPr>
-            <p:ph type="sldImg"/>
-          </p:nvPr>
-        </p:nvSpPr>
-        <p:spPr/>
-      </p:sp>
-      <p:sp>
-        <p:nvSpPr>
-          <p:cNvPr id="3" name="Notes Placeholder 2">
-            <a:extLst>
-              <a:ext uri="{FF2B5EF4-FFF2-40B4-BE49-F238E27FC236}">
-                <a16:creationId xmlns:a16="http://schemas.microsoft.com/office/drawing/2014/main" id="{687E05EF-A6AD-FE87-7F70-E9959A1F995B}"/>
-              </a:ext>
-            </a:extLst>
-          </p:cNvPr>
-          <p:cNvSpPr>
-            <a:spLocks noGrp="1"/>
-          </p:cNvSpPr>
-          <p:nvPr>
-            <p:ph type="body" idx="1"/>
-          </p:nvPr>
-        </p:nvSpPr>
-        <p:spPr/>
-        <p:txBody>
-          <a:bodyPr/>
-          <a:lstStyle/>
-          <a:p>
-            <a:pPr marL="0" marR="0" lvl="0" indent="0" algn="l" defTabSz="914400" rtl="0" eaLnBrk="1" fontAlgn="auto" latinLnBrk="0" hangingPunct="1">
-              <a:lnSpc>
-                <a:spcPct val="100000"/>
-              </a:lnSpc>
-              <a:spcBef>
-                <a:spcPts val="0"/>
-              </a:spcBef>
-              <a:spcAft>
-                <a:spcPts val="0"/>
-              </a:spcAft>
-              <a:buClrTx/>
-              <a:buSzTx/>
-              <a:buFontTx/>
-              <a:buNone/>
-              <a:tabLst/>
-              <a:defRPr/>
-            </a:pPr>
-            <a:r>
-              <a:rPr lang="en-US" sz="1200" dirty="0">
-                <a:solidFill>
-                  <a:schemeClr val="accent6">
-                    <a:lumMod val="60000"/>
-                    <a:lumOff val="40000"/>
-                  </a:schemeClr>
-                </a:solidFill>
-              </a:rPr>
-              <a:t>It’s a </a:t>
-            </a:r>
-            <a:r>
-              <a:rPr lang="en-US" sz="1200" b="1" dirty="0">
-                <a:solidFill>
-                  <a:schemeClr val="accent6">
-                    <a:lumMod val="60000"/>
-                    <a:lumOff val="40000"/>
-                  </a:schemeClr>
-                </a:solidFill>
-              </a:rPr>
-              <a:t>tool to turn Ideas into reality</a:t>
-            </a:r>
-            <a:endParaRPr lang="en-US" sz="1200" dirty="0">
-              <a:solidFill>
-                <a:schemeClr val="accent6">
-                  <a:lumMod val="60000"/>
-                  <a:lumOff val="40000"/>
-                </a:schemeClr>
-              </a:solidFill>
-            </a:endParaRPr>
-          </a:p>
-          <a:p>
-            <a:pPr marL="0" marR="0" lvl="0" indent="0" algn="l" defTabSz="914400" rtl="0" eaLnBrk="1" fontAlgn="auto" latinLnBrk="0" hangingPunct="1">
-              <a:lnSpc>
-                <a:spcPct val="100000"/>
-              </a:lnSpc>
-              <a:spcBef>
-                <a:spcPts val="0"/>
-              </a:spcBef>
-              <a:spcAft>
-                <a:spcPts val="0"/>
-              </a:spcAft>
-              <a:buClrTx/>
-              <a:buSzTx/>
-              <a:buFontTx/>
-              <a:buNone/>
-              <a:tabLst/>
-              <a:defRPr/>
-            </a:pPr>
-            <a:endParaRPr lang="en-US" sz="1200" dirty="0">
-              <a:solidFill>
-                <a:schemeClr val="accent6">
-                  <a:lumMod val="60000"/>
-                  <a:lumOff val="40000"/>
-                </a:schemeClr>
-              </a:solidFill>
-            </a:endParaRPr>
-          </a:p>
-        </p:txBody>
-      </p:sp>
-      <p:sp>
-        <p:nvSpPr>
-          <p:cNvPr id="4" name="Slide Number Placeholder 3">
-            <a:extLst>
-              <a:ext uri="{FF2B5EF4-FFF2-40B4-BE49-F238E27FC236}">
-                <a16:creationId xmlns:a16="http://schemas.microsoft.com/office/drawing/2014/main" id="{80C283ED-DD64-C9FB-832A-942C4DC0BE81}"/>
-              </a:ext>
-            </a:extLst>
-          </p:cNvPr>
-          <p:cNvSpPr>
-            <a:spLocks noGrp="1"/>
-          </p:cNvSpPr>
-          <p:nvPr>
-            <p:ph type="sldNum" sz="quarter" idx="5"/>
-          </p:nvPr>
-        </p:nvSpPr>
-        <p:spPr/>
-        <p:txBody>
-          <a:bodyPr/>
-          <a:lstStyle/>
-          <a:p>
-            <a:fld id="{E27EC57A-C70D-4C56-92FA-51F20B72EE35}" type="slidenum">
-              <a:rPr lang="en-US" smtClean="0"/>
-              <a:t>10</a:t>
-            </a:fld>
-            <a:endParaRPr lang="en-US"/>
-          </a:p>
-        </p:txBody>
-      </p:sp>
-    </p:spTree>
-    <p:extLst>
-      <p:ext uri="{BB962C8B-B14F-4D97-AF65-F5344CB8AC3E}">
-        <p14:creationId xmlns:p14="http://schemas.microsoft.com/office/powerpoint/2010/main" val="3004818721"/>
-      </p:ext>
-    </p:extLst>
-  </p:cSld>
-  <p:clrMapOvr>
-    <a:masterClrMapping/>
-  </p:clrMapOvr>
-</p:notes>
-</file>
-
-<file path=ppt/notesSlides/notesSlide9.xml><?xml version="1.0" encoding="utf-8"?>
-<p:notes xmlns:a="http://schemas.openxmlformats.org/drawingml/2006/main" xmlns:r="http://schemas.openxmlformats.org/officeDocument/2006/relationships" xmlns:p="http://schemas.openxmlformats.org/presentationml/2006/main">
-  <p:cSld>
-    <p:spTree>
-      <p:nvGrpSpPr>
-        <p:cNvPr id="1" name="">
-          <a:extLst>
-            <a:ext uri="{FF2B5EF4-FFF2-40B4-BE49-F238E27FC236}">
-              <a16:creationId xmlns:a16="http://schemas.microsoft.com/office/drawing/2014/main" id="{423D6142-B5E5-C17E-5D11-01BFF7F065DA}"/>
-            </a:ext>
-          </a:extLst>
-        </p:cNvPr>
-        <p:cNvGrpSpPr/>
-        <p:nvPr/>
-      </p:nvGrpSpPr>
-      <p:grpSpPr>
-        <a:xfrm>
-          <a:off x="0" y="0"/>
-          <a:ext cx="0" cy="0"/>
-          <a:chOff x="0" y="0"/>
-          <a:chExt cx="0" cy="0"/>
-        </a:xfrm>
-      </p:grpSpPr>
-      <p:sp>
-        <p:nvSpPr>
-          <p:cNvPr id="2" name="Slide Image Placeholder 1">
-            <a:extLst>
-              <a:ext uri="{FF2B5EF4-FFF2-40B4-BE49-F238E27FC236}">
-                <a16:creationId xmlns:a16="http://schemas.microsoft.com/office/drawing/2014/main" id="{C605A765-9565-6BFE-51B5-DD5D48C9D959}"/>
-              </a:ext>
-            </a:extLst>
-          </p:cNvPr>
-          <p:cNvSpPr>
-            <a:spLocks noGrp="1" noRot="1" noChangeAspect="1"/>
-          </p:cNvSpPr>
-          <p:nvPr>
-            <p:ph type="sldImg"/>
-          </p:nvPr>
-        </p:nvSpPr>
-        <p:spPr/>
-      </p:sp>
-      <p:sp>
-        <p:nvSpPr>
-          <p:cNvPr id="3" name="Notes Placeholder 2">
-            <a:extLst>
-              <a:ext uri="{FF2B5EF4-FFF2-40B4-BE49-F238E27FC236}">
-                <a16:creationId xmlns:a16="http://schemas.microsoft.com/office/drawing/2014/main" id="{15BEB98A-B973-0838-58E0-6BF3213929E7}"/>
-              </a:ext>
-            </a:extLst>
-          </p:cNvPr>
-          <p:cNvSpPr>
-            <a:spLocks noGrp="1"/>
-          </p:cNvSpPr>
-          <p:nvPr>
-            <p:ph type="body" idx="1"/>
-          </p:nvPr>
-        </p:nvSpPr>
-        <p:spPr/>
-        <p:txBody>
-          <a:bodyPr/>
-          <a:lstStyle/>
-          <a:p>
-            <a:endParaRPr lang="en-US" dirty="0">
-              <a:solidFill>
-                <a:schemeClr val="accent6">
-                  <a:lumMod val="60000"/>
-                  <a:lumOff val="40000"/>
-                </a:schemeClr>
-              </a:solidFill>
-            </a:endParaRPr>
-          </a:p>
-        </p:txBody>
-      </p:sp>
-      <p:sp>
-        <p:nvSpPr>
-          <p:cNvPr id="4" name="Slide Number Placeholder 3">
-            <a:extLst>
-              <a:ext uri="{FF2B5EF4-FFF2-40B4-BE49-F238E27FC236}">
-                <a16:creationId xmlns:a16="http://schemas.microsoft.com/office/drawing/2014/main" id="{8835812F-63B5-D702-7B65-162BA8894D44}"/>
-              </a:ext>
-            </a:extLst>
-          </p:cNvPr>
-          <p:cNvSpPr>
-            <a:spLocks noGrp="1"/>
-          </p:cNvSpPr>
-          <p:nvPr>
-            <p:ph type="sldNum" sz="quarter" idx="5"/>
-          </p:nvPr>
-        </p:nvSpPr>
-        <p:spPr/>
-        <p:txBody>
-          <a:bodyPr/>
-          <a:lstStyle/>
-          <a:p>
-            <a:fld id="{E27EC57A-C70D-4C56-92FA-51F20B72EE35}" type="slidenum">
-              <a:rPr lang="en-US" smtClean="0"/>
-              <a:t>11</a:t>
-            </a:fld>
-            <a:endParaRPr lang="en-US"/>
-          </a:p>
-        </p:txBody>
-      </p:sp>
-    </p:spTree>
-    <p:extLst>
-      <p:ext uri="{BB962C8B-B14F-4D97-AF65-F5344CB8AC3E}">
-        <p14:creationId xmlns:p14="http://schemas.microsoft.com/office/powerpoint/2010/main" val="885883684"/>
       </p:ext>
     </p:extLst>
   </p:cSld>
@@ -2173,7 +2402,7 @@
           <a:p>
             <a:fld id="{6383FAE1-13DE-4511-8C1B-C8AFB720664C}" type="datetimeFigureOut">
               <a:rPr lang="en-US" smtClean="0"/>
-              <a:t>12/17/2025</a:t>
+              <a:t>3/15/2026</a:t>
             </a:fld>
             <a:endParaRPr lang="en-US"/>
           </a:p>
@@ -2371,7 +2600,7 @@
           <a:p>
             <a:fld id="{6383FAE1-13DE-4511-8C1B-C8AFB720664C}" type="datetimeFigureOut">
               <a:rPr lang="en-US" smtClean="0"/>
-              <a:t>12/17/2025</a:t>
+              <a:t>3/15/2026</a:t>
             </a:fld>
             <a:endParaRPr lang="en-US"/>
           </a:p>
@@ -2579,7 +2808,7 @@
           <a:p>
             <a:fld id="{6383FAE1-13DE-4511-8C1B-C8AFB720664C}" type="datetimeFigureOut">
               <a:rPr lang="en-US" smtClean="0"/>
-              <a:t>12/17/2025</a:t>
+              <a:t>3/15/2026</a:t>
             </a:fld>
             <a:endParaRPr lang="en-US"/>
           </a:p>
@@ -2777,7 +3006,7 @@
           <a:p>
             <a:fld id="{6383FAE1-13DE-4511-8C1B-C8AFB720664C}" type="datetimeFigureOut">
               <a:rPr lang="en-US" smtClean="0"/>
-              <a:t>12/17/2025</a:t>
+              <a:t>3/15/2026</a:t>
             </a:fld>
             <a:endParaRPr lang="en-US"/>
           </a:p>
@@ -3052,7 +3281,7 @@
           <a:p>
             <a:fld id="{6383FAE1-13DE-4511-8C1B-C8AFB720664C}" type="datetimeFigureOut">
               <a:rPr lang="en-US" smtClean="0"/>
-              <a:t>12/17/2025</a:t>
+              <a:t>3/15/2026</a:t>
             </a:fld>
             <a:endParaRPr lang="en-US"/>
           </a:p>
@@ -3317,7 +3546,7 @@
           <a:p>
             <a:fld id="{6383FAE1-13DE-4511-8C1B-C8AFB720664C}" type="datetimeFigureOut">
               <a:rPr lang="en-US" smtClean="0"/>
-              <a:t>12/17/2025</a:t>
+              <a:t>3/15/2026</a:t>
             </a:fld>
             <a:endParaRPr lang="en-US"/>
           </a:p>
@@ -3729,7 +3958,7 @@
           <a:p>
             <a:fld id="{6383FAE1-13DE-4511-8C1B-C8AFB720664C}" type="datetimeFigureOut">
               <a:rPr lang="en-US" smtClean="0"/>
-              <a:t>12/17/2025</a:t>
+              <a:t>3/15/2026</a:t>
             </a:fld>
             <a:endParaRPr lang="en-US"/>
           </a:p>
@@ -3870,7 +4099,7 @@
           <a:p>
             <a:fld id="{6383FAE1-13DE-4511-8C1B-C8AFB720664C}" type="datetimeFigureOut">
               <a:rPr lang="en-US" smtClean="0"/>
-              <a:t>12/17/2025</a:t>
+              <a:t>3/15/2026</a:t>
             </a:fld>
             <a:endParaRPr lang="en-US"/>
           </a:p>
@@ -3983,7 +4212,7 @@
           <a:p>
             <a:fld id="{6383FAE1-13DE-4511-8C1B-C8AFB720664C}" type="datetimeFigureOut">
               <a:rPr lang="en-US" smtClean="0"/>
-              <a:t>12/17/2025</a:t>
+              <a:t>3/15/2026</a:t>
             </a:fld>
             <a:endParaRPr lang="en-US"/>
           </a:p>
@@ -4294,7 +4523,7 @@
           <a:p>
             <a:fld id="{6383FAE1-13DE-4511-8C1B-C8AFB720664C}" type="datetimeFigureOut">
               <a:rPr lang="en-US" smtClean="0"/>
-              <a:t>12/17/2025</a:t>
+              <a:t>3/15/2026</a:t>
             </a:fld>
             <a:endParaRPr lang="en-US"/>
           </a:p>
@@ -4585,7 +4814,7 @@
           <a:p>
             <a:fld id="{6383FAE1-13DE-4511-8C1B-C8AFB720664C}" type="datetimeFigureOut">
               <a:rPr lang="en-US" smtClean="0"/>
-              <a:t>12/17/2025</a:t>
+              <a:t>3/15/2026</a:t>
             </a:fld>
             <a:endParaRPr lang="en-US"/>
           </a:p>
@@ -4829,7 +5058,7 @@
           <a:p>
             <a:fld id="{6383FAE1-13DE-4511-8C1B-C8AFB720664C}" type="datetimeFigureOut">
               <a:rPr lang="en-US" smtClean="0"/>
-              <a:t>12/17/2025</a:t>
+              <a:t>3/15/2026</a:t>
             </a:fld>
             <a:endParaRPr lang="en-US"/>
           </a:p>
@@ -5507,6 +5736,726 @@
         <p:cNvPr id="1" name="">
           <a:extLst>
             <a:ext uri="{FF2B5EF4-FFF2-40B4-BE49-F238E27FC236}">
+              <a16:creationId xmlns:a16="http://schemas.microsoft.com/office/drawing/2014/main" id="{D566F5DA-6498-4B35-9A91-9F9298524CDB}"/>
+            </a:ext>
+          </a:extLst>
+        </p:cNvPr>
+        <p:cNvGrpSpPr/>
+        <p:nvPr/>
+      </p:nvGrpSpPr>
+      <p:grpSpPr>
+        <a:xfrm>
+          <a:off x="0" y="0"/>
+          <a:ext cx="0" cy="0"/>
+          <a:chOff x="0" y="0"/>
+          <a:chExt cx="0" cy="0"/>
+        </a:xfrm>
+      </p:grpSpPr>
+      <p:sp>
+        <p:nvSpPr>
+          <p:cNvPr id="8" name="TextBox 7">
+            <a:extLst>
+              <a:ext uri="{FF2B5EF4-FFF2-40B4-BE49-F238E27FC236}">
+                <a16:creationId xmlns:a16="http://schemas.microsoft.com/office/drawing/2014/main" id="{C93622CB-F83C-0410-8221-935BA5B974CF}"/>
+              </a:ext>
+            </a:extLst>
+          </p:cNvPr>
+          <p:cNvSpPr txBox="1"/>
+          <p:nvPr/>
+        </p:nvSpPr>
+        <p:spPr>
+          <a:xfrm>
+            <a:off x="228600" y="800785"/>
+            <a:ext cx="10115550" cy="6124754"/>
+          </a:xfrm>
+          <a:prstGeom prst="rect">
+            <a:avLst/>
+          </a:prstGeom>
+          <a:noFill/>
+        </p:spPr>
+        <p:txBody>
+          <a:bodyPr wrap="square">
+            <a:spAutoFit/>
+          </a:bodyPr>
+          <a:lstStyle/>
+          <a:p>
+            <a:r>
+              <a:rPr lang="en-US" sz="2800" b="1" dirty="0">
+                <a:solidFill>
+                  <a:schemeClr val="accent6">
+                    <a:lumMod val="60000"/>
+                    <a:lumOff val="40000"/>
+                  </a:schemeClr>
+                </a:solidFill>
+              </a:rPr>
+              <a:t>Python Has Huge Community &amp; Libraries</a:t>
+            </a:r>
+          </a:p>
+          <a:p>
+            <a:endParaRPr lang="en-US" sz="2800" b="1" dirty="0">
+              <a:solidFill>
+                <a:schemeClr val="accent6">
+                  <a:lumMod val="60000"/>
+                  <a:lumOff val="40000"/>
+                </a:schemeClr>
+              </a:solidFill>
+            </a:endParaRPr>
+          </a:p>
+          <a:p>
+            <a:r>
+              <a:rPr lang="en-US" sz="2800" dirty="0">
+                <a:solidFill>
+                  <a:schemeClr val="accent6">
+                    <a:lumMod val="60000"/>
+                    <a:lumOff val="40000"/>
+                  </a:schemeClr>
+                </a:solidFill>
+              </a:rPr>
+              <a:t>Python has </a:t>
+            </a:r>
+            <a:r>
+              <a:rPr lang="en-US" sz="2800" b="1" dirty="0">
+                <a:solidFill>
+                  <a:schemeClr val="accent6">
+                    <a:lumMod val="60000"/>
+                    <a:lumOff val="40000"/>
+                  </a:schemeClr>
+                </a:solidFill>
+              </a:rPr>
+              <a:t>ready-made tools</a:t>
+            </a:r>
+            <a:r>
+              <a:rPr lang="en-US" sz="2800" dirty="0">
+                <a:solidFill>
+                  <a:schemeClr val="accent6">
+                    <a:lumMod val="60000"/>
+                    <a:lumOff val="40000"/>
+                  </a:schemeClr>
+                </a:solidFill>
+              </a:rPr>
+              <a:t> (called libraries):</a:t>
+            </a:r>
+          </a:p>
+          <a:p>
+            <a:pPr marL="457200" indent="-457200">
+              <a:buFont typeface="Arial" panose="020B0604020202020204" pitchFamily="34" charset="0"/>
+              <a:buChar char="•"/>
+            </a:pPr>
+            <a:r>
+              <a:rPr lang="en-US" sz="2800" b="1" dirty="0" err="1">
+                <a:solidFill>
+                  <a:schemeClr val="accent6">
+                    <a:lumMod val="60000"/>
+                    <a:lumOff val="40000"/>
+                  </a:schemeClr>
+                </a:solidFill>
+              </a:rPr>
+              <a:t>numpy</a:t>
+            </a:r>
+            <a:r>
+              <a:rPr lang="en-US" sz="2800" dirty="0">
+                <a:solidFill>
+                  <a:schemeClr val="accent6">
+                    <a:lumMod val="60000"/>
+                    <a:lumOff val="40000"/>
+                  </a:schemeClr>
+                </a:solidFill>
+              </a:rPr>
+              <a:t> → math &amp; arrays</a:t>
+            </a:r>
+          </a:p>
+          <a:p>
+            <a:pPr marL="457200" indent="-457200">
+              <a:buFont typeface="Arial" panose="020B0604020202020204" pitchFamily="34" charset="0"/>
+              <a:buChar char="•"/>
+            </a:pPr>
+            <a:endParaRPr lang="en-US" sz="2800" dirty="0">
+              <a:solidFill>
+                <a:schemeClr val="accent6">
+                  <a:lumMod val="60000"/>
+                  <a:lumOff val="40000"/>
+                </a:schemeClr>
+              </a:solidFill>
+            </a:endParaRPr>
+          </a:p>
+          <a:p>
+            <a:pPr marL="457200" indent="-457200">
+              <a:buFont typeface="Arial" panose="020B0604020202020204" pitchFamily="34" charset="0"/>
+              <a:buChar char="•"/>
+            </a:pPr>
+            <a:r>
+              <a:rPr lang="en-US" sz="2800" b="1" dirty="0">
+                <a:solidFill>
+                  <a:schemeClr val="accent6">
+                    <a:lumMod val="60000"/>
+                    <a:lumOff val="40000"/>
+                  </a:schemeClr>
+                </a:solidFill>
+              </a:rPr>
+              <a:t>pandas</a:t>
+            </a:r>
+            <a:r>
+              <a:rPr lang="en-US" sz="2800" dirty="0">
+                <a:solidFill>
+                  <a:schemeClr val="accent6">
+                    <a:lumMod val="60000"/>
+                    <a:lumOff val="40000"/>
+                  </a:schemeClr>
+                </a:solidFill>
+              </a:rPr>
+              <a:t> → data analysis</a:t>
+            </a:r>
+          </a:p>
+          <a:p>
+            <a:pPr marL="457200" indent="-457200">
+              <a:buFont typeface="Arial" panose="020B0604020202020204" pitchFamily="34" charset="0"/>
+              <a:buChar char="•"/>
+            </a:pPr>
+            <a:endParaRPr lang="en-US" sz="2800" dirty="0">
+              <a:solidFill>
+                <a:schemeClr val="accent6">
+                  <a:lumMod val="60000"/>
+                  <a:lumOff val="40000"/>
+                </a:schemeClr>
+              </a:solidFill>
+            </a:endParaRPr>
+          </a:p>
+          <a:p>
+            <a:pPr marL="457200" indent="-457200">
+              <a:buFont typeface="Arial" panose="020B0604020202020204" pitchFamily="34" charset="0"/>
+              <a:buChar char="•"/>
+            </a:pPr>
+            <a:r>
+              <a:rPr lang="en-US" sz="2800" b="1" dirty="0">
+                <a:solidFill>
+                  <a:schemeClr val="accent6">
+                    <a:lumMod val="60000"/>
+                    <a:lumOff val="40000"/>
+                  </a:schemeClr>
+                </a:solidFill>
+              </a:rPr>
+              <a:t>matplotlib</a:t>
+            </a:r>
+            <a:r>
+              <a:rPr lang="en-US" sz="2800" dirty="0">
+                <a:solidFill>
+                  <a:schemeClr val="accent6">
+                    <a:lumMod val="60000"/>
+                    <a:lumOff val="40000"/>
+                  </a:schemeClr>
+                </a:solidFill>
+              </a:rPr>
+              <a:t> → plotting graphs</a:t>
+            </a:r>
+          </a:p>
+          <a:p>
+            <a:pPr marL="457200" indent="-457200">
+              <a:buFont typeface="Arial" panose="020B0604020202020204" pitchFamily="34" charset="0"/>
+              <a:buChar char="•"/>
+            </a:pPr>
+            <a:endParaRPr lang="en-US" sz="2800" dirty="0">
+              <a:solidFill>
+                <a:schemeClr val="accent6">
+                  <a:lumMod val="60000"/>
+                  <a:lumOff val="40000"/>
+                </a:schemeClr>
+              </a:solidFill>
+            </a:endParaRPr>
+          </a:p>
+          <a:p>
+            <a:pPr marL="457200" indent="-457200">
+              <a:buFont typeface="Arial" panose="020B0604020202020204" pitchFamily="34" charset="0"/>
+              <a:buChar char="•"/>
+            </a:pPr>
+            <a:r>
+              <a:rPr lang="en-US" sz="2800" b="1" dirty="0">
+                <a:solidFill>
+                  <a:schemeClr val="accent6">
+                    <a:lumMod val="60000"/>
+                    <a:lumOff val="40000"/>
+                  </a:schemeClr>
+                </a:solidFill>
+              </a:rPr>
+              <a:t>scikit-learn</a:t>
+            </a:r>
+            <a:r>
+              <a:rPr lang="en-US" sz="2800" dirty="0">
+                <a:solidFill>
+                  <a:schemeClr val="accent6">
+                    <a:lumMod val="60000"/>
+                    <a:lumOff val="40000"/>
+                  </a:schemeClr>
+                </a:solidFill>
+              </a:rPr>
+              <a:t> → machine learning</a:t>
+            </a:r>
+          </a:p>
+          <a:p>
+            <a:pPr marL="457200" indent="-457200">
+              <a:buFont typeface="Arial" panose="020B0604020202020204" pitchFamily="34" charset="0"/>
+              <a:buChar char="•"/>
+            </a:pPr>
+            <a:endParaRPr lang="en-US" sz="2800" dirty="0">
+              <a:solidFill>
+                <a:schemeClr val="accent6">
+                  <a:lumMod val="60000"/>
+                  <a:lumOff val="40000"/>
+                </a:schemeClr>
+              </a:solidFill>
+            </a:endParaRPr>
+          </a:p>
+          <a:p>
+            <a:pPr marL="457200" indent="-457200">
+              <a:buFont typeface="Arial" panose="020B0604020202020204" pitchFamily="34" charset="0"/>
+              <a:buChar char="•"/>
+            </a:pPr>
+            <a:r>
+              <a:rPr lang="en-US" sz="2800" b="1" dirty="0" err="1">
+                <a:solidFill>
+                  <a:schemeClr val="accent6">
+                    <a:lumMod val="60000"/>
+                    <a:lumOff val="40000"/>
+                  </a:schemeClr>
+                </a:solidFill>
+              </a:rPr>
+              <a:t>tensorflow</a:t>
+            </a:r>
+            <a:r>
+              <a:rPr lang="en-US" sz="2800" dirty="0">
+                <a:solidFill>
+                  <a:schemeClr val="accent6">
+                    <a:lumMod val="60000"/>
+                    <a:lumOff val="40000"/>
+                  </a:schemeClr>
+                </a:solidFill>
+              </a:rPr>
+              <a:t>, </a:t>
+            </a:r>
+            <a:r>
+              <a:rPr lang="en-US" sz="2800" b="1" dirty="0" err="1">
+                <a:solidFill>
+                  <a:schemeClr val="accent6">
+                    <a:lumMod val="60000"/>
+                    <a:lumOff val="40000"/>
+                  </a:schemeClr>
+                </a:solidFill>
+              </a:rPr>
+              <a:t>pytorch</a:t>
+            </a:r>
+            <a:r>
+              <a:rPr lang="en-US" sz="2800" dirty="0">
+                <a:solidFill>
+                  <a:schemeClr val="accent6">
+                    <a:lumMod val="60000"/>
+                    <a:lumOff val="40000"/>
+                  </a:schemeClr>
+                </a:solidFill>
+              </a:rPr>
+              <a:t> → deep learning</a:t>
+            </a:r>
+          </a:p>
+          <a:p>
+            <a:endParaRPr lang="en-US" sz="2800" dirty="0">
+              <a:solidFill>
+                <a:schemeClr val="accent6">
+                  <a:lumMod val="60000"/>
+                  <a:lumOff val="40000"/>
+                </a:schemeClr>
+              </a:solidFill>
+            </a:endParaRPr>
+          </a:p>
+          <a:p>
+            <a:r>
+              <a:rPr lang="en-US" sz="2800" dirty="0">
+                <a:solidFill>
+                  <a:schemeClr val="accent6">
+                    <a:lumMod val="60000"/>
+                    <a:lumOff val="40000"/>
+                  </a:schemeClr>
+                </a:solidFill>
+              </a:rPr>
+              <a:t>You write </a:t>
+            </a:r>
+            <a:r>
+              <a:rPr lang="en-US" sz="2800" b="1" dirty="0">
+                <a:solidFill>
+                  <a:schemeClr val="accent6">
+                    <a:lumMod val="60000"/>
+                    <a:lumOff val="40000"/>
+                  </a:schemeClr>
+                </a:solidFill>
+              </a:rPr>
+              <a:t>less code and </a:t>
+            </a:r>
+            <a:r>
+              <a:rPr lang="en-US" sz="2800" dirty="0">
+                <a:solidFill>
+                  <a:schemeClr val="accent6">
+                    <a:lumMod val="60000"/>
+                    <a:lumOff val="40000"/>
+                  </a:schemeClr>
+                </a:solidFill>
+              </a:rPr>
+              <a:t>You build </a:t>
+            </a:r>
+            <a:r>
+              <a:rPr lang="en-US" sz="2800" b="1" dirty="0">
+                <a:solidFill>
+                  <a:schemeClr val="accent6">
+                    <a:lumMod val="60000"/>
+                    <a:lumOff val="40000"/>
+                  </a:schemeClr>
+                </a:solidFill>
+              </a:rPr>
+              <a:t>more powerful applications</a:t>
+            </a:r>
+            <a:endParaRPr lang="en-US" sz="2800" dirty="0">
+              <a:solidFill>
+                <a:schemeClr val="accent6">
+                  <a:lumMod val="60000"/>
+                  <a:lumOff val="40000"/>
+                </a:schemeClr>
+              </a:solidFill>
+            </a:endParaRPr>
+          </a:p>
+        </p:txBody>
+      </p:sp>
+      <p:sp>
+        <p:nvSpPr>
+          <p:cNvPr id="10" name="TextBox 9">
+            <a:extLst>
+              <a:ext uri="{FF2B5EF4-FFF2-40B4-BE49-F238E27FC236}">
+                <a16:creationId xmlns:a16="http://schemas.microsoft.com/office/drawing/2014/main" id="{7ED86175-E387-EAB6-C969-79A3C2004EC7}"/>
+              </a:ext>
+            </a:extLst>
+          </p:cNvPr>
+          <p:cNvSpPr txBox="1"/>
+          <p:nvPr/>
+        </p:nvSpPr>
+        <p:spPr>
+          <a:xfrm>
+            <a:off x="1466851" y="148709"/>
+            <a:ext cx="10734674" cy="584775"/>
+          </a:xfrm>
+          <a:prstGeom prst="rect">
+            <a:avLst/>
+          </a:prstGeom>
+          <a:noFill/>
+        </p:spPr>
+        <p:txBody>
+          <a:bodyPr wrap="square">
+            <a:spAutoFit/>
+          </a:bodyPr>
+          <a:lstStyle/>
+          <a:p>
+            <a:pPr eaLnBrk="0" fontAlgn="base" hangingPunct="0">
+              <a:lnSpc>
+                <a:spcPct val="100000"/>
+              </a:lnSpc>
+              <a:spcBef>
+                <a:spcPct val="0"/>
+              </a:spcBef>
+              <a:spcAft>
+                <a:spcPct val="0"/>
+              </a:spcAft>
+            </a:pPr>
+            <a:r>
+              <a:rPr lang="en-US" sz="3200" b="1" dirty="0">
+                <a:solidFill>
+                  <a:schemeClr val="accent6">
+                    <a:lumMod val="60000"/>
+                    <a:lumOff val="40000"/>
+                  </a:schemeClr>
+                </a:solidFill>
+              </a:rPr>
+              <a:t>Why should I learn Python instead of other languages?</a:t>
+            </a:r>
+          </a:p>
+        </p:txBody>
+      </p:sp>
+      <p:pic>
+        <p:nvPicPr>
+          <p:cNvPr id="3" name="Picture 2" descr="A black letter with a white background&#10;&#10;AI-generated content may be incorrect.">
+            <a:extLst>
+              <a:ext uri="{FF2B5EF4-FFF2-40B4-BE49-F238E27FC236}">
+                <a16:creationId xmlns:a16="http://schemas.microsoft.com/office/drawing/2014/main" id="{25EA1151-CCA6-42D7-F521-4CC5E8EC9DFB}"/>
+              </a:ext>
+            </a:extLst>
+          </p:cNvPr>
+          <p:cNvPicPr>
+            <a:picLocks noChangeAspect="1"/>
+          </p:cNvPicPr>
+          <p:nvPr/>
+        </p:nvPicPr>
+        <p:blipFill>
+          <a:blip r:embed="rId3"/>
+          <a:stretch>
+            <a:fillRect/>
+          </a:stretch>
+        </p:blipFill>
+        <p:spPr>
+          <a:xfrm>
+            <a:off x="8040537" y="1916823"/>
+            <a:ext cx="2933897" cy="832311"/>
+          </a:xfrm>
+          <a:prstGeom prst="rect">
+            <a:avLst/>
+          </a:prstGeom>
+        </p:spPr>
+      </p:pic>
+      <p:pic>
+        <p:nvPicPr>
+          <p:cNvPr id="5" name="Picture 4" descr="A blue and white sign with white letters&#10;&#10;AI-generated content may be incorrect.">
+            <a:extLst>
+              <a:ext uri="{FF2B5EF4-FFF2-40B4-BE49-F238E27FC236}">
+                <a16:creationId xmlns:a16="http://schemas.microsoft.com/office/drawing/2014/main" id="{98BE1F94-0941-458F-7FE7-AB41D0EF4715}"/>
+              </a:ext>
+            </a:extLst>
+          </p:cNvPr>
+          <p:cNvPicPr>
+            <a:picLocks noChangeAspect="1"/>
+          </p:cNvPicPr>
+          <p:nvPr/>
+        </p:nvPicPr>
+        <p:blipFill>
+          <a:blip r:embed="rId4"/>
+          <a:stretch>
+            <a:fillRect/>
+          </a:stretch>
+        </p:blipFill>
+        <p:spPr>
+          <a:xfrm>
+            <a:off x="4989038" y="2749134"/>
+            <a:ext cx="2399016" cy="832311"/>
+          </a:xfrm>
+          <a:prstGeom prst="rect">
+            <a:avLst/>
+          </a:prstGeom>
+        </p:spPr>
+      </p:pic>
+      <p:pic>
+        <p:nvPicPr>
+          <p:cNvPr id="7" name="Picture 6" descr="A blue text with a white background&#10;&#10;AI-generated content may be incorrect.">
+            <a:extLst>
+              <a:ext uri="{FF2B5EF4-FFF2-40B4-BE49-F238E27FC236}">
+                <a16:creationId xmlns:a16="http://schemas.microsoft.com/office/drawing/2014/main" id="{D2040B8D-EA15-4DF3-0B46-F816040B8305}"/>
+              </a:ext>
+            </a:extLst>
+          </p:cNvPr>
+          <p:cNvPicPr>
+            <a:picLocks noChangeAspect="1"/>
+          </p:cNvPicPr>
+          <p:nvPr/>
+        </p:nvPicPr>
+        <p:blipFill>
+          <a:blip r:embed="rId5"/>
+          <a:stretch>
+            <a:fillRect/>
+          </a:stretch>
+        </p:blipFill>
+        <p:spPr>
+          <a:xfrm>
+            <a:off x="8653855" y="3753521"/>
+            <a:ext cx="2029108" cy="495369"/>
+          </a:xfrm>
+          <a:prstGeom prst="rect">
+            <a:avLst/>
+          </a:prstGeom>
+        </p:spPr>
+      </p:pic>
+      <p:pic>
+        <p:nvPicPr>
+          <p:cNvPr id="11" name="Picture 10" descr="A logo of a group of people&#10;&#10;AI-generated content may be incorrect.">
+            <a:extLst>
+              <a:ext uri="{FF2B5EF4-FFF2-40B4-BE49-F238E27FC236}">
+                <a16:creationId xmlns:a16="http://schemas.microsoft.com/office/drawing/2014/main" id="{C16EAD4B-E3FE-B7F4-1116-2EF89AADDDE0}"/>
+              </a:ext>
+            </a:extLst>
+          </p:cNvPr>
+          <p:cNvPicPr>
+            <a:picLocks noChangeAspect="1"/>
+          </p:cNvPicPr>
+          <p:nvPr/>
+        </p:nvPicPr>
+        <p:blipFill>
+          <a:blip r:embed="rId6"/>
+          <a:stretch>
+            <a:fillRect/>
+          </a:stretch>
+        </p:blipFill>
+        <p:spPr>
+          <a:xfrm>
+            <a:off x="5857732" y="4248890"/>
+            <a:ext cx="2038635" cy="1124107"/>
+          </a:xfrm>
+          <a:prstGeom prst="rect">
+            <a:avLst/>
+          </a:prstGeom>
+        </p:spPr>
+      </p:pic>
+    </p:spTree>
+    <p:extLst>
+      <p:ext uri="{BB962C8B-B14F-4D97-AF65-F5344CB8AC3E}">
+        <p14:creationId xmlns:p14="http://schemas.microsoft.com/office/powerpoint/2010/main" val="4249045249"/>
+      </p:ext>
+    </p:extLst>
+  </p:cSld>
+  <p:clrMapOvr>
+    <a:masterClrMapping/>
+  </p:clrMapOvr>
+</p:sld>
+</file>
+
+<file path=ppt/slides/slide11.xml><?xml version="1.0" encoding="utf-8"?>
+<p:sld xmlns:a="http://schemas.openxmlformats.org/drawingml/2006/main" xmlns:r="http://schemas.openxmlformats.org/officeDocument/2006/relationships" xmlns:p="http://schemas.openxmlformats.org/presentationml/2006/main">
+  <p:cSld>
+    <p:spTree>
+      <p:nvGrpSpPr>
+        <p:cNvPr id="1" name="">
+          <a:extLst>
+            <a:ext uri="{FF2B5EF4-FFF2-40B4-BE49-F238E27FC236}">
+              <a16:creationId xmlns:a16="http://schemas.microsoft.com/office/drawing/2014/main" id="{8FEAD46C-096F-4CA9-56A8-82618AB3D81A}"/>
+            </a:ext>
+          </a:extLst>
+        </p:cNvPr>
+        <p:cNvGrpSpPr/>
+        <p:nvPr/>
+      </p:nvGrpSpPr>
+      <p:grpSpPr>
+        <a:xfrm>
+          <a:off x="0" y="0"/>
+          <a:ext cx="0" cy="0"/>
+          <a:chOff x="0" y="0"/>
+          <a:chExt cx="0" cy="0"/>
+        </a:xfrm>
+      </p:grpSpPr>
+      <p:sp>
+        <p:nvSpPr>
+          <p:cNvPr id="8" name="TextBox 7">
+            <a:extLst>
+              <a:ext uri="{FF2B5EF4-FFF2-40B4-BE49-F238E27FC236}">
+                <a16:creationId xmlns:a16="http://schemas.microsoft.com/office/drawing/2014/main" id="{07521E19-FD7C-F5B4-9FED-9B5B4A9663B9}"/>
+              </a:ext>
+            </a:extLst>
+          </p:cNvPr>
+          <p:cNvSpPr txBox="1"/>
+          <p:nvPr/>
+        </p:nvSpPr>
+        <p:spPr>
+          <a:xfrm>
+            <a:off x="1495425" y="2734360"/>
+            <a:ext cx="8477250" cy="707886"/>
+          </a:xfrm>
+          <a:prstGeom prst="rect">
+            <a:avLst/>
+          </a:prstGeom>
+          <a:noFill/>
+        </p:spPr>
+        <p:txBody>
+          <a:bodyPr wrap="square">
+            <a:spAutoFit/>
+          </a:bodyPr>
+          <a:lstStyle/>
+          <a:p>
+            <a:pPr lvl="0" algn="ctr">
+              <a:defRPr/>
+            </a:pPr>
+            <a:r>
+              <a:rPr lang="en-US" sz="4000" b="1" dirty="0">
+                <a:solidFill>
+                  <a:schemeClr val="accent6">
+                    <a:lumMod val="60000"/>
+                    <a:lumOff val="40000"/>
+                  </a:schemeClr>
+                </a:solidFill>
+              </a:rPr>
+              <a:t>Ideas into Reality</a:t>
+            </a:r>
+            <a:endParaRPr lang="en-US" sz="4000" dirty="0">
+              <a:solidFill>
+                <a:schemeClr val="accent6">
+                  <a:lumMod val="60000"/>
+                  <a:lumOff val="40000"/>
+                </a:schemeClr>
+              </a:solidFill>
+            </a:endParaRPr>
+          </a:p>
+        </p:txBody>
+      </p:sp>
+      <p:sp>
+        <p:nvSpPr>
+          <p:cNvPr id="10" name="TextBox 9">
+            <a:extLst>
+              <a:ext uri="{FF2B5EF4-FFF2-40B4-BE49-F238E27FC236}">
+                <a16:creationId xmlns:a16="http://schemas.microsoft.com/office/drawing/2014/main" id="{3958B7F3-6C91-1242-DFDE-C2078D410523}"/>
+              </a:ext>
+            </a:extLst>
+          </p:cNvPr>
+          <p:cNvSpPr txBox="1"/>
+          <p:nvPr/>
+        </p:nvSpPr>
+        <p:spPr>
+          <a:xfrm>
+            <a:off x="1466851" y="148709"/>
+            <a:ext cx="10734674" cy="584775"/>
+          </a:xfrm>
+          <a:prstGeom prst="rect">
+            <a:avLst/>
+          </a:prstGeom>
+          <a:noFill/>
+        </p:spPr>
+        <p:txBody>
+          <a:bodyPr wrap="square">
+            <a:spAutoFit/>
+          </a:bodyPr>
+          <a:lstStyle/>
+          <a:p>
+            <a:pPr eaLnBrk="0" fontAlgn="base" hangingPunct="0">
+              <a:lnSpc>
+                <a:spcPct val="100000"/>
+              </a:lnSpc>
+              <a:spcBef>
+                <a:spcPct val="0"/>
+              </a:spcBef>
+              <a:spcAft>
+                <a:spcPct val="0"/>
+              </a:spcAft>
+            </a:pPr>
+            <a:r>
+              <a:rPr lang="en-US" sz="3200" b="1" dirty="0">
+                <a:solidFill>
+                  <a:schemeClr val="accent6">
+                    <a:lumMod val="60000"/>
+                    <a:lumOff val="40000"/>
+                  </a:schemeClr>
+                </a:solidFill>
+              </a:rPr>
+              <a:t>Why should I learn Python instead of other languages?</a:t>
+            </a:r>
+          </a:p>
+        </p:txBody>
+      </p:sp>
+    </p:spTree>
+    <p:extLst>
+      <p:ext uri="{BB962C8B-B14F-4D97-AF65-F5344CB8AC3E}">
+        <p14:creationId xmlns:p14="http://schemas.microsoft.com/office/powerpoint/2010/main" val="1772711796"/>
+      </p:ext>
+    </p:extLst>
+  </p:cSld>
+  <p:clrMapOvr>
+    <a:masterClrMapping/>
+  </p:clrMapOvr>
+</p:sld>
+</file>
+
+<file path=ppt/slides/slide12.xml><?xml version="1.0" encoding="utf-8"?>
+<p:sld xmlns:a="http://schemas.openxmlformats.org/drawingml/2006/main" xmlns:r="http://schemas.openxmlformats.org/officeDocument/2006/relationships" xmlns:p="http://schemas.openxmlformats.org/presentationml/2006/main">
+  <p:cSld>
+    <p:spTree>
+      <p:nvGrpSpPr>
+        <p:cNvPr id="1" name="">
+          <a:extLst>
+            <a:ext uri="{FF2B5EF4-FFF2-40B4-BE49-F238E27FC236}">
               <a16:creationId xmlns:a16="http://schemas.microsoft.com/office/drawing/2014/main" id="{334A79DE-DA01-F265-024D-CF8C524FCD08}"/>
             </a:ext>
           </a:extLst>
@@ -5588,7 +6537,89 @@
 </p:sld>
 </file>
 
-<file path=ppt/slides/slide11.xml><?xml version="1.0" encoding="utf-8"?>
+<file path=ppt/slides/slide13.xml><?xml version="1.0" encoding="utf-8"?>
+<p:sld xmlns:a="http://schemas.openxmlformats.org/drawingml/2006/main" xmlns:r="http://schemas.openxmlformats.org/officeDocument/2006/relationships" xmlns:p="http://schemas.openxmlformats.org/presentationml/2006/main">
+  <p:cSld>
+    <p:spTree>
+      <p:nvGrpSpPr>
+        <p:cNvPr id="1" name=""/>
+        <p:cNvGrpSpPr/>
+        <p:nvPr/>
+      </p:nvGrpSpPr>
+      <p:grpSpPr>
+        <a:xfrm>
+          <a:off x="0" y="0"/>
+          <a:ext cx="0" cy="0"/>
+          <a:chOff x="0" y="0"/>
+          <a:chExt cx="0" cy="0"/>
+        </a:xfrm>
+      </p:grpSpPr>
+      <p:sp>
+        <p:nvSpPr>
+          <p:cNvPr id="2" name="Title 1"/>
+          <p:cNvSpPr>
+            <a:spLocks noGrp="1"/>
+          </p:cNvSpPr>
+          <p:nvPr>
+            <p:ph type="title"/>
+          </p:nvPr>
+        </p:nvSpPr>
+        <p:spPr/>
+        <p:txBody>
+          <a:bodyPr/>
+          <a:lstStyle/>
+          <a:p>
+            <a:r>
+              <a:rPr lang="en-US" dirty="0"/>
+              <a:t>(EXTRA) Compared with other languages</a:t>
+            </a:r>
+          </a:p>
+        </p:txBody>
+      </p:sp>
+      <p:pic>
+        <p:nvPicPr>
+          <p:cNvPr id="4" name="Picture 3"/>
+          <p:cNvPicPr>
+            <a:picLocks noChangeAspect="1"/>
+          </p:cNvPicPr>
+          <p:nvPr/>
+        </p:nvPicPr>
+        <p:blipFill>
+          <a:blip r:embed="rId2">
+            <a:extLst>
+              <a:ext uri="{28A0092B-C50C-407E-A947-70E740481C1C}">
+                <a14:useLocalDpi xmlns:a14="http://schemas.microsoft.com/office/drawing/2010/main" val="0"/>
+              </a:ext>
+            </a:extLst>
+          </a:blip>
+          <a:stretch>
+            <a:fillRect/>
+          </a:stretch>
+        </p:blipFill>
+        <p:spPr>
+          <a:xfrm>
+            <a:off x="1371633" y="1857375"/>
+            <a:ext cx="8476431" cy="3452812"/>
+          </a:xfrm>
+          <a:prstGeom prst="rect">
+            <a:avLst/>
+          </a:prstGeom>
+        </p:spPr>
+      </p:pic>
+    </p:spTree>
+    <p:extLst>
+      <p:ext uri="{BB962C8B-B14F-4D97-AF65-F5344CB8AC3E}">
+        <p14:creationId xmlns:p14="http://schemas.microsoft.com/office/powerpoint/2010/main" val="3846826091"/>
+      </p:ext>
+    </p:extLst>
+  </p:cSld>
+  <p:clrMapOvr>
+    <a:masterClrMapping/>
+  </p:clrMapOvr>
+</p:sld>
+</file>
+
+<file path=ppt/slides/slide14.xml><?xml version="1.0" encoding="utf-8"?>
 <p:sld xmlns:a="http://schemas.openxmlformats.org/drawingml/2006/main" xmlns:r="http://schemas.openxmlformats.org/officeDocument/2006/relationships" xmlns:p="http://schemas.openxmlformats.org/presentationml/2006/main">
   <p:cSld>
     <p:spTree>
@@ -5624,386 +6655,7 @@
 </p:sld>
 </file>
 
-<file path=ppt/slides/slide12.xml><?xml version="1.0" encoding="utf-8"?>
-<p:sld xmlns:a="http://schemas.openxmlformats.org/drawingml/2006/main" xmlns:r="http://schemas.openxmlformats.org/officeDocument/2006/relationships" xmlns:p="http://schemas.openxmlformats.org/presentationml/2006/main">
-  <p:cSld>
-    <p:spTree>
-      <p:nvGrpSpPr>
-        <p:cNvPr id="1" name="">
-          <a:extLst>
-            <a:ext uri="{FF2B5EF4-FFF2-40B4-BE49-F238E27FC236}">
-              <a16:creationId xmlns:a16="http://schemas.microsoft.com/office/drawing/2014/main" id="{3EF3B727-B94C-EBE4-01CE-484E7ACE9344}"/>
-            </a:ext>
-          </a:extLst>
-        </p:cNvPr>
-        <p:cNvGrpSpPr/>
-        <p:nvPr/>
-      </p:nvGrpSpPr>
-      <p:grpSpPr>
-        <a:xfrm>
-          <a:off x="0" y="0"/>
-          <a:ext cx="0" cy="0"/>
-          <a:chOff x="0" y="0"/>
-          <a:chExt cx="0" cy="0"/>
-        </a:xfrm>
-      </p:grpSpPr>
-      <p:sp>
-        <p:nvSpPr>
-          <p:cNvPr id="2" name="Title 1">
-            <a:extLst>
-              <a:ext uri="{FF2B5EF4-FFF2-40B4-BE49-F238E27FC236}">
-                <a16:creationId xmlns:a16="http://schemas.microsoft.com/office/drawing/2014/main" id="{0AB2B831-F1E6-98DF-7B21-817DBAB298D0}"/>
-              </a:ext>
-            </a:extLst>
-          </p:cNvPr>
-          <p:cNvSpPr>
-            <a:spLocks noGrp="1"/>
-          </p:cNvSpPr>
-          <p:nvPr>
-            <p:ph type="title"/>
-          </p:nvPr>
-        </p:nvSpPr>
-        <p:spPr/>
-        <p:txBody>
-          <a:bodyPr/>
-          <a:lstStyle/>
-          <a:p>
-            <a:pPr algn="ctr"/>
-            <a:r>
-              <a:rPr lang="en-US" dirty="0"/>
-              <a:t>2. Introduction to Programming </a:t>
-            </a:r>
-          </a:p>
-        </p:txBody>
-      </p:sp>
-      <p:sp>
-        <p:nvSpPr>
-          <p:cNvPr id="3" name="Content Placeholder 2">
-            <a:extLst>
-              <a:ext uri="{FF2B5EF4-FFF2-40B4-BE49-F238E27FC236}">
-                <a16:creationId xmlns:a16="http://schemas.microsoft.com/office/drawing/2014/main" id="{F03949B6-B011-510E-C52E-54108AC3D275}"/>
-              </a:ext>
-            </a:extLst>
-          </p:cNvPr>
-          <p:cNvSpPr>
-            <a:spLocks noGrp="1"/>
-          </p:cNvSpPr>
-          <p:nvPr>
-            <p:ph idx="1"/>
-          </p:nvPr>
-        </p:nvSpPr>
-        <p:spPr>
-          <a:xfrm>
-            <a:off x="838200" y="1544974"/>
-            <a:ext cx="10515600" cy="1135689"/>
-          </a:xfrm>
-        </p:spPr>
-        <p:txBody>
-          <a:bodyPr>
-            <a:normAutofit/>
-          </a:bodyPr>
-          <a:lstStyle/>
-          <a:p>
-            <a:r>
-              <a:rPr lang="en-US" sz="1600" dirty="0"/>
-              <a:t>Process that involves writing instructions for a computer to follow in order to solve problems. The instructions are written in a language that the computer can understand, and this process is a collaboration between humans and computers.</a:t>
-            </a:r>
-          </a:p>
-          <a:p>
-            <a:r>
-              <a:rPr lang="en-US" sz="1600" dirty="0"/>
-              <a:t>Common languages are Python, C, C++, java, </a:t>
-            </a:r>
-            <a:r>
-              <a:rPr lang="en-US" sz="1600" dirty="0" err="1"/>
-              <a:t>GoLang</a:t>
-            </a:r>
-            <a:r>
-              <a:rPr lang="en-US" sz="1600" dirty="0"/>
-              <a:t>, C#, R, </a:t>
-            </a:r>
-            <a:r>
-              <a:rPr lang="en-US" sz="1600" dirty="0" err="1"/>
-              <a:t>VB.Net</a:t>
-            </a:r>
-            <a:r>
-              <a:rPr lang="en-US" sz="1600" dirty="0"/>
-              <a:t>, PHP, R, Fortran, Pascal, Bash, PERL, prolog </a:t>
-            </a:r>
-            <a:r>
-              <a:rPr lang="en-US" sz="1600" dirty="0" err="1"/>
-              <a:t>etc</a:t>
-            </a:r>
-            <a:endParaRPr lang="en-US" sz="1600" dirty="0"/>
-          </a:p>
-        </p:txBody>
-      </p:sp>
-      <p:pic>
-        <p:nvPicPr>
-          <p:cNvPr id="4" name="Picture 3">
-            <a:extLst>
-              <a:ext uri="{FF2B5EF4-FFF2-40B4-BE49-F238E27FC236}">
-                <a16:creationId xmlns:a16="http://schemas.microsoft.com/office/drawing/2014/main" id="{57612306-7EEE-6391-DA3C-6B8D3236AB49}"/>
-              </a:ext>
-            </a:extLst>
-          </p:cNvPr>
-          <p:cNvPicPr>
-            <a:picLocks noChangeAspect="1"/>
-          </p:cNvPicPr>
-          <p:nvPr/>
-        </p:nvPicPr>
-        <p:blipFill>
-          <a:blip r:embed="rId2" cstate="print">
-            <a:extLst>
-              <a:ext uri="{28A0092B-C50C-407E-A947-70E740481C1C}">
-                <a14:useLocalDpi xmlns:a14="http://schemas.microsoft.com/office/drawing/2010/main" val="0"/>
-              </a:ext>
-            </a:extLst>
-          </a:blip>
-          <a:stretch>
-            <a:fillRect/>
-          </a:stretch>
-        </p:blipFill>
-        <p:spPr>
-          <a:xfrm>
-            <a:off x="838200" y="3058807"/>
-            <a:ext cx="3160983" cy="1303468"/>
-          </a:xfrm>
-          <a:prstGeom prst="rect">
-            <a:avLst/>
-          </a:prstGeom>
-        </p:spPr>
-      </p:pic>
-      <p:pic>
-        <p:nvPicPr>
-          <p:cNvPr id="5" name="Picture 4">
-            <a:extLst>
-              <a:ext uri="{FF2B5EF4-FFF2-40B4-BE49-F238E27FC236}">
-                <a16:creationId xmlns:a16="http://schemas.microsoft.com/office/drawing/2014/main" id="{50B533FE-FA88-00A6-29A4-157D679A2092}"/>
-              </a:ext>
-            </a:extLst>
-          </p:cNvPr>
-          <p:cNvPicPr>
-            <a:picLocks noChangeAspect="1"/>
-          </p:cNvPicPr>
-          <p:nvPr/>
-        </p:nvPicPr>
-        <p:blipFill>
-          <a:blip r:embed="rId3">
-            <a:extLst>
-              <a:ext uri="{28A0092B-C50C-407E-A947-70E740481C1C}">
-                <a14:useLocalDpi xmlns:a14="http://schemas.microsoft.com/office/drawing/2010/main" val="0"/>
-              </a:ext>
-            </a:extLst>
-          </a:blip>
-          <a:stretch>
-            <a:fillRect/>
-          </a:stretch>
-        </p:blipFill>
-        <p:spPr>
-          <a:xfrm>
-            <a:off x="4759047" y="3377006"/>
-            <a:ext cx="1247775" cy="590550"/>
-          </a:xfrm>
-          <a:prstGeom prst="rect">
-            <a:avLst/>
-          </a:prstGeom>
-        </p:spPr>
-      </p:pic>
-      <p:pic>
-        <p:nvPicPr>
-          <p:cNvPr id="6" name="Picture 5">
-            <a:extLst>
-              <a:ext uri="{FF2B5EF4-FFF2-40B4-BE49-F238E27FC236}">
-                <a16:creationId xmlns:a16="http://schemas.microsoft.com/office/drawing/2014/main" id="{0D32CDB8-12F3-A561-F863-2829F2689EEA}"/>
-              </a:ext>
-            </a:extLst>
-          </p:cNvPr>
-          <p:cNvPicPr>
-            <a:picLocks noChangeAspect="1"/>
-          </p:cNvPicPr>
-          <p:nvPr/>
-        </p:nvPicPr>
-        <p:blipFill>
-          <a:blip r:embed="rId4" cstate="print">
-            <a:extLst>
-              <a:ext uri="{28A0092B-C50C-407E-A947-70E740481C1C}">
-                <a14:useLocalDpi xmlns:a14="http://schemas.microsoft.com/office/drawing/2010/main" val="0"/>
-              </a:ext>
-            </a:extLst>
-          </a:blip>
-          <a:stretch>
-            <a:fillRect/>
-          </a:stretch>
-        </p:blipFill>
-        <p:spPr>
-          <a:xfrm>
-            <a:off x="6904140" y="3060599"/>
-            <a:ext cx="4295163" cy="1398425"/>
-          </a:xfrm>
-          <a:prstGeom prst="rect">
-            <a:avLst/>
-          </a:prstGeom>
-        </p:spPr>
-      </p:pic>
-      <p:pic>
-        <p:nvPicPr>
-          <p:cNvPr id="7" name="Picture 6">
-            <a:extLst>
-              <a:ext uri="{FF2B5EF4-FFF2-40B4-BE49-F238E27FC236}">
-                <a16:creationId xmlns:a16="http://schemas.microsoft.com/office/drawing/2014/main" id="{740A6E53-A286-A9C5-8DDD-0BC5316B059B}"/>
-              </a:ext>
-            </a:extLst>
-          </p:cNvPr>
-          <p:cNvPicPr>
-            <a:picLocks noChangeAspect="1"/>
-          </p:cNvPicPr>
-          <p:nvPr/>
-        </p:nvPicPr>
-        <p:blipFill>
-          <a:blip r:embed="rId5" cstate="print">
-            <a:extLst>
-              <a:ext uri="{28A0092B-C50C-407E-A947-70E740481C1C}">
-                <a14:useLocalDpi xmlns:a14="http://schemas.microsoft.com/office/drawing/2010/main" val="0"/>
-              </a:ext>
-            </a:extLst>
-          </a:blip>
-          <a:stretch>
-            <a:fillRect/>
-          </a:stretch>
-        </p:blipFill>
-        <p:spPr>
-          <a:xfrm>
-            <a:off x="805339" y="4841387"/>
-            <a:ext cx="3404398" cy="1781416"/>
-          </a:xfrm>
-          <a:prstGeom prst="rect">
-            <a:avLst/>
-          </a:prstGeom>
-        </p:spPr>
-      </p:pic>
-      <p:pic>
-        <p:nvPicPr>
-          <p:cNvPr id="8" name="Picture 7">
-            <a:extLst>
-              <a:ext uri="{FF2B5EF4-FFF2-40B4-BE49-F238E27FC236}">
-                <a16:creationId xmlns:a16="http://schemas.microsoft.com/office/drawing/2014/main" id="{F537CA29-152B-2EB3-13AD-2F63375CB4E3}"/>
-              </a:ext>
-            </a:extLst>
-          </p:cNvPr>
-          <p:cNvPicPr>
-            <a:picLocks noChangeAspect="1"/>
-          </p:cNvPicPr>
-          <p:nvPr/>
-        </p:nvPicPr>
-        <p:blipFill>
-          <a:blip r:embed="rId6" cstate="print">
-            <a:extLst>
-              <a:ext uri="{28A0092B-C50C-407E-A947-70E740481C1C}">
-                <a14:useLocalDpi xmlns:a14="http://schemas.microsoft.com/office/drawing/2010/main" val="0"/>
-              </a:ext>
-            </a:extLst>
-          </a:blip>
-          <a:stretch>
-            <a:fillRect/>
-          </a:stretch>
-        </p:blipFill>
-        <p:spPr>
-          <a:xfrm>
-            <a:off x="4462941" y="5476629"/>
-            <a:ext cx="4011554" cy="1003687"/>
-          </a:xfrm>
-          <a:prstGeom prst="rect">
-            <a:avLst/>
-          </a:prstGeom>
-        </p:spPr>
-      </p:pic>
-      <p:pic>
-        <p:nvPicPr>
-          <p:cNvPr id="9" name="Picture 8">
-            <a:extLst>
-              <a:ext uri="{FF2B5EF4-FFF2-40B4-BE49-F238E27FC236}">
-                <a16:creationId xmlns:a16="http://schemas.microsoft.com/office/drawing/2014/main" id="{1FB254A4-9B74-6239-3FA7-2DCC70BFF7FC}"/>
-              </a:ext>
-            </a:extLst>
-          </p:cNvPr>
-          <p:cNvPicPr>
-            <a:picLocks noChangeAspect="1"/>
-          </p:cNvPicPr>
-          <p:nvPr/>
-        </p:nvPicPr>
-        <p:blipFill>
-          <a:blip r:embed="rId7" cstate="print">
-            <a:extLst>
-              <a:ext uri="{28A0092B-C50C-407E-A947-70E740481C1C}">
-                <a14:useLocalDpi xmlns:a14="http://schemas.microsoft.com/office/drawing/2010/main" val="0"/>
-              </a:ext>
-            </a:extLst>
-          </a:blip>
-          <a:stretch>
-            <a:fillRect/>
-          </a:stretch>
-        </p:blipFill>
-        <p:spPr>
-          <a:xfrm>
-            <a:off x="8841997" y="4927470"/>
-            <a:ext cx="2730442" cy="1599943"/>
-          </a:xfrm>
-          <a:prstGeom prst="rect">
-            <a:avLst/>
-          </a:prstGeom>
-        </p:spPr>
-      </p:pic>
-      <p:pic>
-        <p:nvPicPr>
-          <p:cNvPr id="10" name="Picture 9">
-            <a:extLst>
-              <a:ext uri="{FF2B5EF4-FFF2-40B4-BE49-F238E27FC236}">
-                <a16:creationId xmlns:a16="http://schemas.microsoft.com/office/drawing/2014/main" id="{426870DA-70CE-1708-6480-E48170D7F2A7}"/>
-              </a:ext>
-            </a:extLst>
-          </p:cNvPr>
-          <p:cNvPicPr>
-            <a:picLocks noChangeAspect="1"/>
-          </p:cNvPicPr>
-          <p:nvPr/>
-        </p:nvPicPr>
-        <p:blipFill>
-          <a:blip r:embed="rId8">
-            <a:extLst>
-              <a:ext uri="{28A0092B-C50C-407E-A947-70E740481C1C}">
-                <a14:useLocalDpi xmlns:a14="http://schemas.microsoft.com/office/drawing/2010/main" val="0"/>
-              </a:ext>
-            </a:extLst>
-          </a:blip>
-          <a:stretch>
-            <a:fillRect/>
-          </a:stretch>
-        </p:blipFill>
-        <p:spPr>
-          <a:xfrm>
-            <a:off x="4731223" y="4307109"/>
-            <a:ext cx="924615" cy="653101"/>
-          </a:xfrm>
-          <a:prstGeom prst="rect">
-            <a:avLst/>
-          </a:prstGeom>
-        </p:spPr>
-      </p:pic>
-    </p:spTree>
-    <p:extLst>
-      <p:ext uri="{BB962C8B-B14F-4D97-AF65-F5344CB8AC3E}">
-        <p14:creationId xmlns:p14="http://schemas.microsoft.com/office/powerpoint/2010/main" val="3999045349"/>
-      </p:ext>
-    </p:extLst>
-  </p:cSld>
-  <p:clrMapOvr>
-    <a:masterClrMapping/>
-  </p:clrMapOvr>
-</p:sld>
-</file>
-
-<file path=ppt/slides/slide13.xml><?xml version="1.0" encoding="utf-8"?>
+<file path=ppt/slides/slide15.xml><?xml version="1.0" encoding="utf-8"?>
 <p:sld xmlns:a="http://schemas.openxmlformats.org/drawingml/2006/main" xmlns:r="http://schemas.openxmlformats.org/officeDocument/2006/relationships" xmlns:p="http://schemas.openxmlformats.org/presentationml/2006/main">
   <p:cSld>
     <p:spTree>
@@ -6055,8 +6707,8 @@
         </p:nvSpPr>
         <p:spPr>
           <a:xfrm>
-            <a:off x="544286" y="1414237"/>
-            <a:ext cx="10747296" cy="3970318"/>
+            <a:off x="249010" y="1118962"/>
+            <a:ext cx="11581039" cy="5262979"/>
           </a:xfrm>
           <a:prstGeom prst="rect">
             <a:avLst/>
@@ -6068,18 +6720,18 @@
           </a:bodyPr>
           <a:lstStyle/>
           <a:p>
-            <a:pPr lvl="0" defTabSz="914400" eaLnBrk="0" fontAlgn="base" hangingPunct="0">
+            <a:pPr marL="342900" lvl="0" indent="-342900" defTabSz="914400" eaLnBrk="0" fontAlgn="base" hangingPunct="0">
               <a:spcBef>
                 <a:spcPct val="0"/>
               </a:spcBef>
               <a:spcAft>
                 <a:spcPct val="0"/>
               </a:spcAft>
-              <a:buFontTx/>
+              <a:buFont typeface="Arial" panose="020B0604020202020204" pitchFamily="34" charset="0"/>
               <a:buChar char="•"/>
             </a:pPr>
             <a:r>
-              <a:rPr lang="en-US" altLang="en-US" b="1" dirty="0">
+              <a:rPr lang="en-US" altLang="en-US" sz="2400" b="1" dirty="0">
                 <a:solidFill>
                   <a:schemeClr val="accent6">
                     <a:lumMod val="60000"/>
@@ -6091,7 +6743,7 @@
               <a:t>Procedural programming languages</a:t>
             </a:r>
             <a:r>
-              <a:rPr lang="en-US" altLang="en-US" dirty="0">
+              <a:rPr lang="en-US" altLang="en-US" sz="2400" dirty="0">
                 <a:solidFill>
                   <a:schemeClr val="accent6">
                     <a:lumMod val="60000"/>
@@ -6103,7 +6755,7 @@
               <a:t>: These languages follow a sequence of commands or statements to achieve a desired output. Example: Python, C, Fortran, Pascal, </a:t>
             </a:r>
             <a:r>
-              <a:rPr lang="en-US" altLang="en-US" dirty="0" err="1">
+              <a:rPr lang="en-US" altLang="en-US" sz="2400" dirty="0" err="1">
                 <a:solidFill>
                   <a:schemeClr val="accent6">
                     <a:lumMod val="60000"/>
@@ -6114,7 +6766,7 @@
               </a:rPr>
               <a:t>etc</a:t>
             </a:r>
-            <a:endParaRPr lang="en-US" altLang="en-US" dirty="0">
+            <a:endParaRPr lang="en-US" altLang="en-US" sz="2400" dirty="0">
               <a:solidFill>
                 <a:schemeClr val="accent6">
                   <a:lumMod val="60000"/>
@@ -6133,7 +6785,7 @@
                 <a:spcPct val="0"/>
               </a:spcAft>
             </a:pPr>
-            <a:endParaRPr lang="en-US" altLang="en-US" dirty="0">
+            <a:endParaRPr lang="en-US" altLang="en-US" sz="2400" dirty="0">
               <a:solidFill>
                 <a:schemeClr val="accent6">
                   <a:lumMod val="60000"/>
@@ -6144,100 +6796,100 @@
             </a:endParaRPr>
           </a:p>
           <a:p>
+            <a:pPr marL="342900" lvl="0" indent="-342900">
+              <a:buFont typeface="Arial" panose="020B0604020202020204" pitchFamily="34" charset="0"/>
+              <a:buChar char="•"/>
+            </a:pPr>
+            <a:r>
+              <a:rPr lang="en-US" altLang="en-US" sz="2400" b="1" dirty="0">
+                <a:solidFill>
+                  <a:schemeClr val="accent6">
+                    <a:lumMod val="60000"/>
+                    <a:lumOff val="40000"/>
+                  </a:schemeClr>
+                </a:solidFill>
+                <a:latin typeface="Google Sans"/>
+              </a:rPr>
+              <a:t>Object-oriented programming languages (OOP)</a:t>
+            </a:r>
+            <a:r>
+              <a:rPr lang="en-US" altLang="en-US" sz="2400" dirty="0">
+                <a:solidFill>
+                  <a:schemeClr val="accent6">
+                    <a:lumMod val="60000"/>
+                    <a:lumOff val="40000"/>
+                  </a:schemeClr>
+                </a:solidFill>
+                <a:latin typeface="Google Sans"/>
+              </a:rPr>
+              <a:t>: These languages help manage complexity in large programs by using class(say, Planets) and objects(say mars, </a:t>
+            </a:r>
+            <a:r>
+              <a:rPr lang="en-US" altLang="en-US" sz="2400" dirty="0" err="1">
+                <a:solidFill>
+                  <a:schemeClr val="accent6">
+                    <a:lumMod val="60000"/>
+                    <a:lumOff val="40000"/>
+                  </a:schemeClr>
+                </a:solidFill>
+                <a:latin typeface="Google Sans"/>
+              </a:rPr>
+              <a:t>saturn</a:t>
+            </a:r>
+            <a:r>
+              <a:rPr lang="en-US" altLang="en-US" sz="2400" dirty="0">
+                <a:solidFill>
+                  <a:schemeClr val="accent6">
+                    <a:lumMod val="60000"/>
+                    <a:lumOff val="40000"/>
+                  </a:schemeClr>
+                </a:solidFill>
+                <a:latin typeface="Google Sans"/>
+              </a:rPr>
+              <a:t>, earth, </a:t>
+            </a:r>
+            <a:r>
+              <a:rPr lang="en-US" altLang="en-US" sz="2400" dirty="0" err="1">
+                <a:solidFill>
+                  <a:schemeClr val="accent6">
+                    <a:lumMod val="60000"/>
+                    <a:lumOff val="40000"/>
+                  </a:schemeClr>
+                </a:solidFill>
+                <a:latin typeface="Google Sans"/>
+              </a:rPr>
+              <a:t>etc</a:t>
+            </a:r>
+            <a:r>
+              <a:rPr lang="en-US" altLang="en-US" sz="2400" dirty="0">
+                <a:solidFill>
+                  <a:schemeClr val="accent6">
+                    <a:lumMod val="60000"/>
+                    <a:lumOff val="40000"/>
+                  </a:schemeClr>
+                </a:solidFill>
+                <a:latin typeface="Google Sans"/>
+              </a:rPr>
+              <a:t>). Example: </a:t>
+            </a:r>
+            <a:r>
+              <a:rPr lang="en-US" sz="2400" dirty="0">
+                <a:solidFill>
+                  <a:schemeClr val="accent6">
+                    <a:lumMod val="60000"/>
+                    <a:lumOff val="40000"/>
+                  </a:schemeClr>
+                </a:solidFill>
+              </a:rPr>
+              <a:t>Java, Python, C++, C#, Delphi/Object Pascal, VB.NET</a:t>
+            </a:r>
+          </a:p>
+          <a:p>
             <a:pPr lvl="0">
               <a:buFontTx/>
               <a:buChar char="•"/>
             </a:pPr>
-            <a:r>
-              <a:rPr lang="en-US" altLang="en-US" b="1" dirty="0">
-                <a:solidFill>
-                  <a:schemeClr val="accent6">
-                    <a:lumMod val="60000"/>
-                    <a:lumOff val="40000"/>
-                  </a:schemeClr>
-                </a:solidFill>
-                <a:latin typeface="Google Sans"/>
-              </a:rPr>
-              <a:t>Object-oriented programming languages (OOP)</a:t>
-            </a:r>
-            <a:r>
-              <a:rPr lang="en-US" altLang="en-US" dirty="0">
-                <a:solidFill>
-                  <a:schemeClr val="accent6">
-                    <a:lumMod val="60000"/>
-                    <a:lumOff val="40000"/>
-                  </a:schemeClr>
-                </a:solidFill>
-                <a:latin typeface="Google Sans"/>
-              </a:rPr>
-              <a:t>: These languages help manage complexity in large programs by using class(say, Planets) and objects(say mars, </a:t>
-            </a:r>
-            <a:r>
-              <a:rPr lang="en-US" altLang="en-US" dirty="0" err="1">
-                <a:solidFill>
-                  <a:schemeClr val="accent6">
-                    <a:lumMod val="60000"/>
-                    <a:lumOff val="40000"/>
-                  </a:schemeClr>
-                </a:solidFill>
-                <a:latin typeface="Google Sans"/>
-              </a:rPr>
-              <a:t>saturn</a:t>
-            </a:r>
-            <a:r>
-              <a:rPr lang="en-US" altLang="en-US" dirty="0">
-                <a:solidFill>
-                  <a:schemeClr val="accent6">
-                    <a:lumMod val="60000"/>
-                    <a:lumOff val="40000"/>
-                  </a:schemeClr>
-                </a:solidFill>
-                <a:latin typeface="Google Sans"/>
-              </a:rPr>
-              <a:t>, </a:t>
-            </a:r>
-            <a:r>
-              <a:rPr lang="en-US" altLang="en-US" dirty="0" err="1">
-                <a:solidFill>
-                  <a:schemeClr val="accent6">
-                    <a:lumMod val="60000"/>
-                    <a:lumOff val="40000"/>
-                  </a:schemeClr>
-                </a:solidFill>
-                <a:latin typeface="Google Sans"/>
-              </a:rPr>
-              <a:t>earth,etc</a:t>
-            </a:r>
-            <a:r>
-              <a:rPr lang="en-US" altLang="en-US" dirty="0">
-                <a:solidFill>
-                  <a:schemeClr val="accent6">
-                    <a:lumMod val="60000"/>
-                    <a:lumOff val="40000"/>
-                  </a:schemeClr>
-                </a:solidFill>
-                <a:latin typeface="Google Sans"/>
-              </a:rPr>
-              <a:t>). Example: </a:t>
-            </a:r>
-            <a:r>
-              <a:rPr lang="en-US" dirty="0">
-                <a:solidFill>
-                  <a:schemeClr val="accent6">
-                    <a:lumMod val="60000"/>
-                    <a:lumOff val="40000"/>
-                  </a:schemeClr>
-                </a:solidFill>
-              </a:rPr>
-              <a:t>Java, Python, C++, C#, Delphi/Object Pascal, VB.NET</a:t>
-            </a:r>
-          </a:p>
-          <a:p>
-            <a:pPr lvl="0">
-              <a:buFontTx/>
-              <a:buChar char="•"/>
-            </a:pPr>
-            <a:endParaRPr lang="en-US" altLang="en-US" dirty="0">
+            <a:endParaRPr lang="en-US" altLang="en-US" sz="2400" dirty="0">
               <a:solidFill>
                 <a:schemeClr val="accent6">
                   <a:lumMod val="60000"/>
@@ -6248,18 +6900,18 @@
             </a:endParaRPr>
           </a:p>
           <a:p>
-            <a:pPr lvl="0" defTabSz="914400" eaLnBrk="0" fontAlgn="base" hangingPunct="0">
+            <a:pPr marL="342900" lvl="0" indent="-342900" defTabSz="914400" eaLnBrk="0" fontAlgn="base" hangingPunct="0">
               <a:spcBef>
                 <a:spcPct val="0"/>
               </a:spcBef>
               <a:spcAft>
                 <a:spcPct val="0"/>
               </a:spcAft>
-              <a:buFontTx/>
+              <a:buFont typeface="Arial" panose="020B0604020202020204" pitchFamily="34" charset="0"/>
               <a:buChar char="•"/>
             </a:pPr>
             <a:r>
-              <a:rPr lang="en-US" altLang="en-US" b="1" dirty="0">
+              <a:rPr lang="en-US" altLang="en-US" sz="2400" b="1" dirty="0">
                 <a:solidFill>
                   <a:schemeClr val="accent6">
                     <a:lumMod val="60000"/>
@@ -6271,7 +6923,7 @@
               <a:t>Scripting languages</a:t>
             </a:r>
             <a:r>
-              <a:rPr lang="en-US" altLang="en-US" dirty="0">
+              <a:rPr lang="en-US" altLang="en-US" sz="2400" dirty="0">
                 <a:solidFill>
                   <a:schemeClr val="accent6">
                     <a:lumMod val="60000"/>
@@ -6292,7 +6944,7 @@
                 <a:spcPct val="0"/>
               </a:spcAft>
             </a:pPr>
-            <a:endParaRPr lang="en-US" altLang="en-US" dirty="0">
+            <a:endParaRPr lang="en-US" altLang="en-US" sz="2400" dirty="0">
               <a:solidFill>
                 <a:schemeClr val="accent6">
                   <a:lumMod val="60000"/>
@@ -6303,12 +6955,12 @@
             </a:endParaRPr>
           </a:p>
           <a:p>
-            <a:pPr lvl="0">
-              <a:buFontTx/>
+            <a:pPr marL="342900" lvl="0" indent="-342900">
+              <a:buFont typeface="Arial" panose="020B0604020202020204" pitchFamily="34" charset="0"/>
               <a:buChar char="•"/>
             </a:pPr>
             <a:r>
-              <a:rPr lang="en-US" altLang="en-US" b="1" dirty="0">
+              <a:rPr lang="en-US" altLang="en-US" sz="2400" b="1" dirty="0">
                 <a:solidFill>
                   <a:schemeClr val="accent6">
                     <a:lumMod val="60000"/>
@@ -6320,7 +6972,7 @@
               <a:t>Logic programming languages</a:t>
             </a:r>
             <a:r>
-              <a:rPr lang="en-US" altLang="en-US" dirty="0">
+              <a:rPr lang="en-US" altLang="en-US" sz="2400" dirty="0">
                 <a:solidFill>
                   <a:schemeClr val="accent6">
                     <a:lumMod val="60000"/>
@@ -6332,51 +6984,18 @@
               <a:t>: These are another type of programming language. </a:t>
             </a:r>
             <a:r>
-              <a:rPr lang="en-US" dirty="0">
-                <a:solidFill>
-                  <a:schemeClr val="accent6">
-                    <a:lumMod val="60000"/>
-                    <a:lumOff val="40000"/>
-                  </a:schemeClr>
-                </a:solidFill>
-              </a:rPr>
-              <a:t>logic programming focuses on what the program </a:t>
-            </a:r>
-            <a:r>
-              <a:rPr lang="en-US">
-                <a:solidFill>
-                  <a:schemeClr val="accent6">
-                    <a:lumMod val="60000"/>
-                    <a:lumOff val="40000"/>
-                  </a:schemeClr>
-                </a:solidFill>
-              </a:rPr>
-              <a:t>should achieve:</a:t>
-            </a:r>
-            <a:r>
-              <a:rPr lang="en-US" dirty="0">
-                <a:solidFill>
-                  <a:schemeClr val="accent6">
-                    <a:lumMod val="60000"/>
-                    <a:lumOff val="40000"/>
-                  </a:schemeClr>
-                </a:solidFill>
-              </a:rPr>
-              <a:t> You define rules </a:t>
-            </a:r>
-            <a:r>
-              <a:rPr lang="en-US">
-                <a:solidFill>
-                  <a:schemeClr val="accent6">
-                    <a:lumMod val="60000"/>
-                    <a:lumOff val="40000"/>
-                  </a:schemeClr>
-                </a:solidFill>
-              </a:rPr>
-              <a:t>and facts</a:t>
-            </a:r>
-            <a:r>
-              <a:rPr lang="en-US" b="1">
+              <a:rPr lang="en-US" sz="2400" dirty="0">
+                <a:solidFill>
+                  <a:schemeClr val="accent6">
+                    <a:lumMod val="60000"/>
+                    <a:lumOff val="40000"/>
+                  </a:schemeClr>
+                </a:solidFill>
+              </a:rPr>
+              <a:t>logic programming focuses on what the program should achieve: You define rules and facts</a:t>
+            </a:r>
+            <a:r>
+              <a:rPr lang="en-US" sz="2400" b="1" dirty="0">
                 <a:solidFill>
                   <a:schemeClr val="accent6">
                     <a:lumMod val="60000"/>
@@ -6387,29 +7006,18 @@
               <a:t>(Knowledge Representation),</a:t>
             </a:r>
             <a:r>
-              <a:rPr lang="en-US">
-                <a:solidFill>
-                  <a:schemeClr val="accent6">
-                    <a:lumMod val="60000"/>
-                    <a:lumOff val="40000"/>
-                  </a:schemeClr>
-                </a:solidFill>
-              </a:rPr>
-              <a:t> </a:t>
-            </a:r>
-            <a:r>
-              <a:rPr lang="en-US" dirty="0">
-                <a:solidFill>
-                  <a:schemeClr val="accent6">
-                    <a:lumMod val="60000"/>
-                    <a:lumOff val="40000"/>
-                  </a:schemeClr>
-                </a:solidFill>
-              </a:rPr>
-              <a:t>and the system determines how to use them to reach a solution. </a:t>
-            </a:r>
-            <a:r>
-              <a:rPr lang="en-US" altLang="en-US" dirty="0">
+              <a:rPr lang="en-US" sz="2400" dirty="0">
+                <a:solidFill>
+                  <a:schemeClr val="accent6">
+                    <a:lumMod val="60000"/>
+                    <a:lumOff val="40000"/>
+                  </a:schemeClr>
+                </a:solidFill>
+              </a:rPr>
+              <a:t> and the system determines how to use them to reach a solution. </a:t>
+            </a:r>
+            <a:r>
+              <a:rPr lang="en-US" altLang="en-US" sz="2400" dirty="0">
                 <a:solidFill>
                   <a:schemeClr val="accent6">
                     <a:lumMod val="60000"/>
@@ -6421,7 +7029,7 @@
               <a:t>Example Prolog, </a:t>
             </a:r>
             <a:r>
-              <a:rPr lang="en-US" dirty="0">
+              <a:rPr lang="en-US" sz="2400" dirty="0">
                 <a:solidFill>
                   <a:schemeClr val="accent6">
                     <a:lumMod val="60000"/>
@@ -6431,7 +7039,7 @@
               </a:rPr>
               <a:t>Answer Set Programming (ASP)</a:t>
             </a:r>
-            <a:endParaRPr lang="en-US" altLang="en-US" dirty="0">
+            <a:endParaRPr lang="en-US" altLang="en-US" sz="2400" dirty="0">
               <a:solidFill>
                 <a:schemeClr val="accent6">
                   <a:lumMod val="60000"/>
@@ -6439,24 +7047,6 @@
                 </a:schemeClr>
               </a:solidFill>
               <a:latin typeface="Google Sans"/>
-            </a:endParaRPr>
-          </a:p>
-          <a:p>
-            <a:pPr lvl="0" defTabSz="914400" eaLnBrk="0" fontAlgn="base" hangingPunct="0">
-              <a:spcBef>
-                <a:spcPct val="0"/>
-              </a:spcBef>
-              <a:spcAft>
-                <a:spcPct val="0"/>
-              </a:spcAft>
-            </a:pPr>
-            <a:endParaRPr lang="en-US" altLang="en-US" dirty="0">
-              <a:solidFill>
-                <a:schemeClr val="accent6">
-                  <a:lumMod val="60000"/>
-                  <a:lumOff val="40000"/>
-                </a:schemeClr>
-              </a:solidFill>
             </a:endParaRPr>
           </a:p>
         </p:txBody>
@@ -6474,7 +7064,7 @@
 </p:sld>
 </file>
 
-<file path=ppt/slides/slide14.xml><?xml version="1.0" encoding="utf-8"?>
+<file path=ppt/slides/slide16.xml><?xml version="1.0" encoding="utf-8"?>
 <p:sld xmlns:a="http://schemas.openxmlformats.org/drawingml/2006/main" xmlns:r="http://schemas.openxmlformats.org/officeDocument/2006/relationships" xmlns:p="http://schemas.openxmlformats.org/presentationml/2006/main">
   <p:cSld>
     <p:spTree>
@@ -6650,7 +7240,7 @@
 </p:sld>
 </file>
 
-<file path=ppt/slides/slide15.xml><?xml version="1.0" encoding="utf-8"?>
+<file path=ppt/slides/slide17.xml><?xml version="1.0" encoding="utf-8"?>
 <p:sld xmlns:a="http://schemas.openxmlformats.org/drawingml/2006/main" xmlns:r="http://schemas.openxmlformats.org/officeDocument/2006/relationships" xmlns:p="http://schemas.openxmlformats.org/presentationml/2006/main">
   <p:cSld>
     <p:spTree>
@@ -6855,7 +7445,7 @@
 </p:sld>
 </file>
 
-<file path=ppt/slides/slide16.xml><?xml version="1.0" encoding="utf-8"?>
+<file path=ppt/slides/slide18.xml><?xml version="1.0" encoding="utf-8"?>
 <p:sld xmlns:a="http://schemas.openxmlformats.org/drawingml/2006/main" xmlns:r="http://schemas.openxmlformats.org/officeDocument/2006/relationships" xmlns:p="http://schemas.openxmlformats.org/presentationml/2006/main">
   <p:cSld>
     <p:spTree>
@@ -6981,378 +7571,6 @@
 </p:sld>
 </file>
 
-<file path=ppt/slides/slide17.xml><?xml version="1.0" encoding="utf-8"?>
-<p:sld xmlns:a="http://schemas.openxmlformats.org/drawingml/2006/main" xmlns:r="http://schemas.openxmlformats.org/officeDocument/2006/relationships" xmlns:p="http://schemas.openxmlformats.org/presentationml/2006/main">
-  <p:cSld>
-    <p:spTree>
-      <p:nvGrpSpPr>
-        <p:cNvPr id="1" name=""/>
-        <p:cNvGrpSpPr/>
-        <p:nvPr/>
-      </p:nvGrpSpPr>
-      <p:grpSpPr>
-        <a:xfrm>
-          <a:off x="0" y="0"/>
-          <a:ext cx="0" cy="0"/>
-          <a:chOff x="0" y="0"/>
-          <a:chExt cx="0" cy="0"/>
-        </a:xfrm>
-      </p:grpSpPr>
-      <p:sp>
-        <p:nvSpPr>
-          <p:cNvPr id="2" name="Title 1"/>
-          <p:cNvSpPr>
-            <a:spLocks noGrp="1"/>
-          </p:cNvSpPr>
-          <p:nvPr>
-            <p:ph type="title"/>
-          </p:nvPr>
-        </p:nvSpPr>
-        <p:spPr>
-          <a:xfrm>
-            <a:off x="302162" y="368828"/>
-            <a:ext cx="8279775" cy="839187"/>
-          </a:xfrm>
-        </p:spPr>
-        <p:txBody>
-          <a:bodyPr/>
-          <a:lstStyle/>
-          <a:p>
-            <a:pPr algn="ctr"/>
-            <a:r>
-              <a:rPr lang="en-US" dirty="0"/>
-              <a:t>Companies that use Python:</a:t>
-            </a:r>
-          </a:p>
-        </p:txBody>
-      </p:sp>
-      <p:sp>
-        <p:nvSpPr>
-          <p:cNvPr id="3" name="Content Placeholder 2"/>
-          <p:cNvSpPr>
-            <a:spLocks noGrp="1"/>
-          </p:cNvSpPr>
-          <p:nvPr>
-            <p:ph idx="1"/>
-          </p:nvPr>
-        </p:nvSpPr>
-        <p:spPr>
-          <a:xfrm>
-            <a:off x="696286" y="1526796"/>
-            <a:ext cx="10385571" cy="4721604"/>
-          </a:xfrm>
-        </p:spPr>
-        <p:txBody>
-          <a:bodyPr>
-            <a:normAutofit fontScale="85000" lnSpcReduction="20000"/>
-          </a:bodyPr>
-          <a:lstStyle/>
-          <a:p>
-            <a:r>
-              <a:rPr lang="en-US" sz="1600" dirty="0"/>
-              <a:t>Google makes extensive use of Python in its web search systems. </a:t>
-            </a:r>
-          </a:p>
-          <a:p>
-            <a:r>
-              <a:rPr lang="en-US" sz="1600" dirty="0"/>
-              <a:t>The popular YouTube video sharing service is largely written in Python. </a:t>
-            </a:r>
-          </a:p>
-          <a:p>
-            <a:r>
-              <a:rPr lang="en-US" sz="1600" dirty="0"/>
-              <a:t>The Dropbox storage service codes both its server and desktop client software primarily in Python. </a:t>
-            </a:r>
-          </a:p>
-          <a:p>
-            <a:r>
-              <a:rPr lang="en-US" sz="1600" dirty="0"/>
-              <a:t>The Raspberry Pi single-board computer promotes Python as its educational language. </a:t>
-            </a:r>
-          </a:p>
-          <a:p>
-            <a:r>
-              <a:rPr lang="en-US" sz="1600" dirty="0"/>
-              <a:t>EVE Online, a massively multiplayer online game (MMOG) by CCP Games, uses Python broadly. </a:t>
-            </a:r>
-          </a:p>
-          <a:p>
-            <a:r>
-              <a:rPr lang="en-US" sz="1600" dirty="0"/>
-              <a:t>The widespread </a:t>
-            </a:r>
-            <a:r>
-              <a:rPr lang="en-US" sz="1600" dirty="0" err="1"/>
-              <a:t>BitTorrent</a:t>
-            </a:r>
-            <a:r>
-              <a:rPr lang="en-US" sz="1600" dirty="0"/>
-              <a:t> peer-to-peer file sharing system began its life as a Python program. </a:t>
-            </a:r>
-          </a:p>
-          <a:p>
-            <a:r>
-              <a:rPr lang="en-US" sz="1600" dirty="0"/>
-              <a:t>Industrial Light &amp; Magic, Pixar, and others use Python in the production of animated movies. </a:t>
-            </a:r>
-          </a:p>
-          <a:p>
-            <a:r>
-              <a:rPr lang="en-US" sz="1600" dirty="0"/>
-              <a:t>ESRI uses Python as an end-user customization tool for its popular GIS mapping products. </a:t>
-            </a:r>
-          </a:p>
-          <a:p>
-            <a:r>
-              <a:rPr lang="en-US" sz="1600" dirty="0"/>
-              <a:t>Google’s App Engine web development framework uses Python as an application language. </a:t>
-            </a:r>
-          </a:p>
-          <a:p>
-            <a:r>
-              <a:rPr lang="en-US" sz="1600" dirty="0"/>
-              <a:t>The IronPort email server product uses more than 1 million lines of Python code to do its job. </a:t>
-            </a:r>
-          </a:p>
-          <a:p>
-            <a:r>
-              <a:rPr lang="en-US" sz="1600" dirty="0"/>
-              <a:t>Maya, a powerful integrated 3D modeling and animation system, provides a Python scripting API. </a:t>
-            </a:r>
-          </a:p>
-          <a:p>
-            <a:r>
-              <a:rPr lang="en-US" sz="1600" dirty="0"/>
-              <a:t>The NSA uses Python for cryptography and intelligence analysis. </a:t>
-            </a:r>
-          </a:p>
-          <a:p>
-            <a:r>
-              <a:rPr lang="en-US" sz="1600" dirty="0"/>
-              <a:t>iRobot uses Python to develop commercial and military robotic devices.</a:t>
-            </a:r>
-          </a:p>
-          <a:p>
-            <a:r>
-              <a:rPr lang="en-US" sz="1600" dirty="0"/>
-              <a:t>Netflix and Yelp have both documented the role of Python in their software infrastructures.</a:t>
-            </a:r>
-          </a:p>
-          <a:p>
-            <a:r>
-              <a:rPr lang="en-US" sz="1600" dirty="0"/>
-              <a:t>Intel, Cisco, Hewlett-Packard, Seagate, Qualcomm, and IBM use Python for hardware testing. </a:t>
-            </a:r>
-          </a:p>
-          <a:p>
-            <a:r>
-              <a:rPr lang="en-US" sz="1600" dirty="0"/>
-              <a:t>JPMorgan Chase, UBS, </a:t>
-            </a:r>
-            <a:r>
-              <a:rPr lang="en-US" sz="1600" dirty="0" err="1"/>
-              <a:t>Getco</a:t>
-            </a:r>
-            <a:r>
-              <a:rPr lang="en-US" sz="1600" dirty="0"/>
-              <a:t>, and Citadel apply Python to financial market forecasting. </a:t>
-            </a:r>
-          </a:p>
-          <a:p>
-            <a:r>
-              <a:rPr lang="en-US" sz="1600" dirty="0"/>
-              <a:t>NASA, Los Alamos, </a:t>
-            </a:r>
-            <a:r>
-              <a:rPr lang="en-US" sz="1600" dirty="0" err="1"/>
-              <a:t>Fermilab</a:t>
-            </a:r>
-            <a:r>
-              <a:rPr lang="en-US" sz="1600" dirty="0"/>
-              <a:t>, JPL, and others use Python for scientific programming tasks</a:t>
-            </a:r>
-          </a:p>
-        </p:txBody>
-      </p:sp>
-    </p:spTree>
-    <p:extLst>
-      <p:ext uri="{BB962C8B-B14F-4D97-AF65-F5344CB8AC3E}">
-        <p14:creationId xmlns:p14="http://schemas.microsoft.com/office/powerpoint/2010/main" val="3941712403"/>
-      </p:ext>
-    </p:extLst>
-  </p:cSld>
-  <p:clrMapOvr>
-    <a:masterClrMapping/>
-  </p:clrMapOvr>
-</p:sld>
-</file>
-
-<file path=ppt/slides/slide18.xml><?xml version="1.0" encoding="utf-8"?>
-<p:sld xmlns:a="http://schemas.openxmlformats.org/drawingml/2006/main" xmlns:r="http://schemas.openxmlformats.org/officeDocument/2006/relationships" xmlns:p="http://schemas.openxmlformats.org/presentationml/2006/main">
-  <p:cSld>
-    <p:spTree>
-      <p:nvGrpSpPr>
-        <p:cNvPr id="1" name=""/>
-        <p:cNvGrpSpPr/>
-        <p:nvPr/>
-      </p:nvGrpSpPr>
-      <p:grpSpPr>
-        <a:xfrm>
-          <a:off x="0" y="0"/>
-          <a:ext cx="0" cy="0"/>
-          <a:chOff x="0" y="0"/>
-          <a:chExt cx="0" cy="0"/>
-        </a:xfrm>
-      </p:grpSpPr>
-      <p:sp>
-        <p:nvSpPr>
-          <p:cNvPr id="2" name="Title 1"/>
-          <p:cNvSpPr>
-            <a:spLocks noGrp="1"/>
-          </p:cNvSpPr>
-          <p:nvPr>
-            <p:ph type="title"/>
-          </p:nvPr>
-        </p:nvSpPr>
-        <p:spPr>
-          <a:xfrm>
-            <a:off x="1886857" y="365126"/>
-            <a:ext cx="8476344" cy="679903"/>
-          </a:xfrm>
-        </p:spPr>
-        <p:txBody>
-          <a:bodyPr>
-            <a:normAutofit fontScale="90000"/>
-          </a:bodyPr>
-          <a:lstStyle/>
-          <a:p>
-            <a:pPr algn="ctr"/>
-            <a:r>
-              <a:rPr lang="en-US" dirty="0"/>
-              <a:t>Python in AI &amp; Data Science</a:t>
-            </a:r>
-          </a:p>
-        </p:txBody>
-      </p:sp>
-      <p:sp>
-        <p:nvSpPr>
-          <p:cNvPr id="3" name="Content Placeholder 2"/>
-          <p:cNvSpPr>
-            <a:spLocks noGrp="1"/>
-          </p:cNvSpPr>
-          <p:nvPr>
-            <p:ph idx="1"/>
-          </p:nvPr>
-        </p:nvSpPr>
-        <p:spPr/>
-        <p:txBody>
-          <a:bodyPr/>
-          <a:lstStyle/>
-          <a:p>
-            <a:r>
-              <a:rPr lang="en-US" b="1" dirty="0"/>
-              <a:t>Machine Learning</a:t>
-            </a:r>
-            <a:r>
-              <a:rPr lang="en-US" dirty="0"/>
-              <a:t> (</a:t>
-            </a:r>
-            <a:r>
-              <a:rPr lang="en-US" dirty="0" err="1"/>
-              <a:t>scikit</a:t>
-            </a:r>
-            <a:r>
-              <a:rPr lang="en-US" dirty="0"/>
-              <a:t>-learn, </a:t>
-            </a:r>
-            <a:r>
-              <a:rPr lang="en-US" dirty="0" err="1"/>
-              <a:t>TensorFlow</a:t>
-            </a:r>
-            <a:r>
-              <a:rPr lang="en-US" dirty="0"/>
-              <a:t>, </a:t>
-            </a:r>
-            <a:r>
-              <a:rPr lang="en-US" dirty="0" err="1"/>
-              <a:t>PyTorch</a:t>
-            </a:r>
-            <a:r>
-              <a:rPr lang="en-US" dirty="0"/>
-              <a:t>)</a:t>
-            </a:r>
-          </a:p>
-          <a:p>
-            <a:r>
-              <a:rPr lang="en-US" b="1" dirty="0"/>
-              <a:t>Data Visualization</a:t>
-            </a:r>
-            <a:r>
-              <a:rPr lang="en-US" dirty="0"/>
-              <a:t> (</a:t>
-            </a:r>
-            <a:r>
-              <a:rPr lang="en-US" dirty="0" err="1"/>
-              <a:t>Matplotlib</a:t>
-            </a:r>
-            <a:r>
-              <a:rPr lang="en-US" dirty="0"/>
-              <a:t>, </a:t>
-            </a:r>
-            <a:r>
-              <a:rPr lang="en-US" dirty="0" err="1"/>
-              <a:t>Seaborn</a:t>
-            </a:r>
-            <a:r>
-              <a:rPr lang="en-US" dirty="0"/>
-              <a:t>)</a:t>
-            </a:r>
-          </a:p>
-          <a:p>
-            <a:r>
-              <a:rPr lang="en-US" b="1" dirty="0"/>
-              <a:t>Big Data Processing</a:t>
-            </a:r>
-            <a:r>
-              <a:rPr lang="en-US" dirty="0"/>
-              <a:t> (</a:t>
-            </a:r>
-            <a:r>
-              <a:rPr lang="en-US" dirty="0" err="1"/>
-              <a:t>Dask</a:t>
-            </a:r>
-            <a:r>
-              <a:rPr lang="en-US" dirty="0"/>
-              <a:t>, </a:t>
-            </a:r>
-            <a:r>
-              <a:rPr lang="en-US" dirty="0" err="1"/>
-              <a:t>PySpark</a:t>
-            </a:r>
-            <a:r>
-              <a:rPr lang="en-US" dirty="0"/>
-              <a:t>)</a:t>
-            </a:r>
-          </a:p>
-          <a:p>
-            <a:endParaRPr lang="en-US" dirty="0"/>
-          </a:p>
-        </p:txBody>
-      </p:sp>
-    </p:spTree>
-    <p:extLst>
-      <p:ext uri="{BB962C8B-B14F-4D97-AF65-F5344CB8AC3E}">
-        <p14:creationId xmlns:p14="http://schemas.microsoft.com/office/powerpoint/2010/main" val="1209846047"/>
-      </p:ext>
-    </p:extLst>
-  </p:cSld>
-  <p:clrMapOvr>
-    <a:masterClrMapping/>
-  </p:clrMapOvr>
-</p:sld>
-</file>
-
 <file path=ppt/slides/slide19.xml><?xml version="1.0" encoding="utf-8"?>
 <p:sld xmlns:a="http://schemas.openxmlformats.org/drawingml/2006/main" xmlns:r="http://schemas.openxmlformats.org/officeDocument/2006/relationships" xmlns:p="http://schemas.openxmlformats.org/presentationml/2006/main">
   <p:cSld>
@@ -7380,52 +7598,177 @@
             <p:ph type="title"/>
           </p:nvPr>
         </p:nvSpPr>
-        <p:spPr/>
+        <p:spPr>
+          <a:xfrm>
+            <a:off x="302162" y="368828"/>
+            <a:ext cx="8279775" cy="839187"/>
+          </a:xfrm>
+        </p:spPr>
         <p:txBody>
           <a:bodyPr/>
           <a:lstStyle/>
           <a:p>
+            <a:pPr algn="ctr"/>
             <a:r>
               <a:rPr lang="en-US" dirty="0"/>
-              <a:t>Compared with other languages</a:t>
-            </a:r>
-          </a:p>
-        </p:txBody>
-      </p:sp>
-      <p:pic>
-        <p:nvPicPr>
-          <p:cNvPr id="4" name="Picture 3"/>
-          <p:cNvPicPr>
-            <a:picLocks noChangeAspect="1"/>
-          </p:cNvPicPr>
-          <p:nvPr/>
-        </p:nvPicPr>
-        <p:blipFill>
-          <a:blip r:embed="rId2">
-            <a:extLst>
-              <a:ext uri="{28A0092B-C50C-407E-A947-70E740481C1C}">
-                <a14:useLocalDpi xmlns:a14="http://schemas.microsoft.com/office/drawing/2010/main" val="0"/>
-              </a:ext>
-            </a:extLst>
-          </a:blip>
-          <a:stretch>
-            <a:fillRect/>
-          </a:stretch>
-        </p:blipFill>
+              <a:t>Companies that use Python:</a:t>
+            </a:r>
+          </a:p>
+        </p:txBody>
+      </p:sp>
+      <p:sp>
+        <p:nvSpPr>
+          <p:cNvPr id="3" name="Content Placeholder 2"/>
+          <p:cNvSpPr>
+            <a:spLocks noGrp="1"/>
+          </p:cNvSpPr>
+          <p:nvPr>
+            <p:ph idx="1"/>
+          </p:nvPr>
+        </p:nvSpPr>
         <p:spPr>
           <a:xfrm>
-            <a:off x="875533" y="2285774"/>
-            <a:ext cx="10020281" cy="4081688"/>
+            <a:off x="696286" y="1526796"/>
+            <a:ext cx="10385571" cy="4721604"/>
           </a:xfrm>
-          <a:prstGeom prst="rect">
-            <a:avLst/>
-          </a:prstGeom>
         </p:spPr>
-      </p:pic>
+        <p:txBody>
+          <a:bodyPr>
+            <a:normAutofit fontScale="85000" lnSpcReduction="20000"/>
+          </a:bodyPr>
+          <a:lstStyle/>
+          <a:p>
+            <a:r>
+              <a:rPr lang="en-US" sz="1600" dirty="0"/>
+              <a:t>Google makes extensive use of Python in its web search systems. </a:t>
+            </a:r>
+          </a:p>
+          <a:p>
+            <a:r>
+              <a:rPr lang="en-US" sz="1600" dirty="0"/>
+              <a:t>The popular YouTube video sharing service is largely written in Python. </a:t>
+            </a:r>
+          </a:p>
+          <a:p>
+            <a:r>
+              <a:rPr lang="en-US" sz="1600" dirty="0"/>
+              <a:t>The Dropbox storage service codes both its server and desktop client software primarily in Python. </a:t>
+            </a:r>
+          </a:p>
+          <a:p>
+            <a:r>
+              <a:rPr lang="en-US" sz="1600" dirty="0"/>
+              <a:t>The Raspberry Pi single-board computer promotes Python as its educational language. </a:t>
+            </a:r>
+          </a:p>
+          <a:p>
+            <a:r>
+              <a:rPr lang="en-US" sz="1600" dirty="0"/>
+              <a:t>EVE Online, a massively multiplayer online game (MMOG) by CCP Games, uses Python broadly. </a:t>
+            </a:r>
+          </a:p>
+          <a:p>
+            <a:r>
+              <a:rPr lang="en-US" sz="1600" dirty="0"/>
+              <a:t>The widespread </a:t>
+            </a:r>
+            <a:r>
+              <a:rPr lang="en-US" sz="1600" dirty="0" err="1"/>
+              <a:t>BitTorrent</a:t>
+            </a:r>
+            <a:r>
+              <a:rPr lang="en-US" sz="1600" dirty="0"/>
+              <a:t> peer-to-peer file sharing system began its life as a Python program. </a:t>
+            </a:r>
+          </a:p>
+          <a:p>
+            <a:r>
+              <a:rPr lang="en-US" sz="1600" dirty="0"/>
+              <a:t>Industrial Light &amp; Magic, Pixar, and others use Python in the production of animated movies. </a:t>
+            </a:r>
+          </a:p>
+          <a:p>
+            <a:r>
+              <a:rPr lang="en-US" sz="1600" dirty="0"/>
+              <a:t>ESRI uses Python as an end-user customization tool for its popular GIS mapping products. </a:t>
+            </a:r>
+          </a:p>
+          <a:p>
+            <a:r>
+              <a:rPr lang="en-US" sz="1600" dirty="0"/>
+              <a:t>Google’s App Engine web development framework uses Python as an application language. </a:t>
+            </a:r>
+          </a:p>
+          <a:p>
+            <a:r>
+              <a:rPr lang="en-US" sz="1600" dirty="0"/>
+              <a:t>The IronPort email server product uses more than 1 million lines of Python code to do its job. </a:t>
+            </a:r>
+          </a:p>
+          <a:p>
+            <a:r>
+              <a:rPr lang="en-US" sz="1600" dirty="0"/>
+              <a:t>Maya, a powerful integrated 3D modeling and animation system, provides a Python scripting API. </a:t>
+            </a:r>
+          </a:p>
+          <a:p>
+            <a:r>
+              <a:rPr lang="en-US" sz="1600" dirty="0"/>
+              <a:t>The NSA uses Python for cryptography and intelligence analysis. </a:t>
+            </a:r>
+          </a:p>
+          <a:p>
+            <a:r>
+              <a:rPr lang="en-US" sz="1600" dirty="0"/>
+              <a:t>iRobot uses Python to develop commercial and military robotic devices.</a:t>
+            </a:r>
+          </a:p>
+          <a:p>
+            <a:r>
+              <a:rPr lang="en-US" sz="1600" dirty="0"/>
+              <a:t>Netflix and Yelp have both documented the role of Python in their software infrastructures.</a:t>
+            </a:r>
+          </a:p>
+          <a:p>
+            <a:r>
+              <a:rPr lang="en-US" sz="1600" dirty="0"/>
+              <a:t>Intel, Cisco, Hewlett-Packard, Seagate, Qualcomm, and IBM use Python for hardware testing. </a:t>
+            </a:r>
+          </a:p>
+          <a:p>
+            <a:r>
+              <a:rPr lang="en-US" sz="1600" dirty="0"/>
+              <a:t>JPMorgan Chase, UBS, </a:t>
+            </a:r>
+            <a:r>
+              <a:rPr lang="en-US" sz="1600" dirty="0" err="1"/>
+              <a:t>Getco</a:t>
+            </a:r>
+            <a:r>
+              <a:rPr lang="en-US" sz="1600" dirty="0"/>
+              <a:t>, and Citadel apply Python to financial market forecasting. </a:t>
+            </a:r>
+          </a:p>
+          <a:p>
+            <a:r>
+              <a:rPr lang="en-US" sz="1600" dirty="0"/>
+              <a:t>NASA, Los Alamos, </a:t>
+            </a:r>
+            <a:r>
+              <a:rPr lang="en-US" sz="1600" dirty="0" err="1"/>
+              <a:t>Fermilab</a:t>
+            </a:r>
+            <a:r>
+              <a:rPr lang="en-US" sz="1600" dirty="0"/>
+              <a:t>, JPL, and others use Python for scientific programming tasks</a:t>
+            </a:r>
+          </a:p>
+        </p:txBody>
+      </p:sp>
     </p:spTree>
     <p:extLst>
       <p:ext uri="{BB962C8B-B14F-4D97-AF65-F5344CB8AC3E}">
-        <p14:creationId xmlns:p14="http://schemas.microsoft.com/office/powerpoint/2010/main" val="3846826091"/>
+        <p14:creationId xmlns:p14="http://schemas.microsoft.com/office/powerpoint/2010/main" val="3941712403"/>
       </p:ext>
     </p:extLst>
   </p:cSld>
@@ -7529,6 +7872,84 @@
                 </a:solidFill>
               </a:rPr>
               <a:t>What is Programming?</a:t>
+            </a:r>
+          </a:p>
+        </p:txBody>
+      </p:sp>
+      <p:sp>
+        <p:nvSpPr>
+          <p:cNvPr id="2" name="TextBox 1">
+            <a:extLst>
+              <a:ext uri="{FF2B5EF4-FFF2-40B4-BE49-F238E27FC236}">
+                <a16:creationId xmlns:a16="http://schemas.microsoft.com/office/drawing/2014/main" id="{75112C8B-A546-A3DE-4868-FC45C95CCD14}"/>
+              </a:ext>
+            </a:extLst>
+          </p:cNvPr>
+          <p:cNvSpPr txBox="1"/>
+          <p:nvPr/>
+        </p:nvSpPr>
+        <p:spPr>
+          <a:xfrm>
+            <a:off x="6505575" y="2057400"/>
+            <a:ext cx="5476875" cy="1938992"/>
+          </a:xfrm>
+          <a:prstGeom prst="rect">
+            <a:avLst/>
+          </a:prstGeom>
+          <a:noFill/>
+        </p:spPr>
+        <p:txBody>
+          <a:bodyPr wrap="square" rtlCol="0">
+            <a:spAutoFit/>
+          </a:bodyPr>
+          <a:lstStyle/>
+          <a:p>
+            <a:r>
+              <a:rPr lang="en-US" sz="2000" dirty="0">
+                <a:solidFill>
+                  <a:schemeClr val="accent6">
+                    <a:lumMod val="60000"/>
+                    <a:lumOff val="40000"/>
+                  </a:schemeClr>
+                </a:solidFill>
+              </a:rPr>
+              <a:t>A robot performs operations( go forward, backward, right, left) based on instructions</a:t>
+            </a:r>
+          </a:p>
+          <a:p>
+            <a:endParaRPr lang="en-US" sz="2000" dirty="0">
+              <a:solidFill>
+                <a:schemeClr val="accent6">
+                  <a:lumMod val="60000"/>
+                  <a:lumOff val="40000"/>
+                </a:schemeClr>
+              </a:solidFill>
+            </a:endParaRPr>
+          </a:p>
+          <a:p>
+            <a:r>
+              <a:rPr lang="en-US" sz="2000" dirty="0">
+                <a:solidFill>
+                  <a:schemeClr val="accent6">
+                    <a:lumMod val="60000"/>
+                    <a:lumOff val="40000"/>
+                  </a:schemeClr>
+                </a:solidFill>
+              </a:rPr>
+              <a:t>Similarly, </a:t>
+            </a:r>
+          </a:p>
+          <a:p>
+            <a:r>
+              <a:rPr lang="en-US" sz="2000" dirty="0">
+                <a:solidFill>
+                  <a:schemeClr val="accent6">
+                    <a:lumMod val="60000"/>
+                    <a:lumOff val="40000"/>
+                  </a:schemeClr>
+                </a:solidFill>
+              </a:rPr>
+              <a:t>A program can perform operation based on instructions </a:t>
             </a:r>
           </a:p>
         </p:txBody>
@@ -8232,187 +8653,6 @@
     <p:extLst>
       <p:ext uri="{BB962C8B-B14F-4D97-AF65-F5344CB8AC3E}">
         <p14:creationId xmlns:p14="http://schemas.microsoft.com/office/powerpoint/2010/main" val="3771712912"/>
-      </p:ext>
-    </p:extLst>
-  </p:cSld>
-  <p:clrMapOvr>
-    <a:masterClrMapping/>
-  </p:clrMapOvr>
-</p:sld>
-</file>
-
-<file path=ppt/slides/slide22.xml><?xml version="1.0" encoding="utf-8"?>
-<p:sld xmlns:a="http://schemas.openxmlformats.org/drawingml/2006/main" xmlns:r="http://schemas.openxmlformats.org/officeDocument/2006/relationships" xmlns:p="http://schemas.openxmlformats.org/presentationml/2006/main">
-  <p:cSld>
-    <p:spTree>
-      <p:nvGrpSpPr>
-        <p:cNvPr id="1" name="">
-          <a:extLst>
-            <a:ext uri="{FF2B5EF4-FFF2-40B4-BE49-F238E27FC236}">
-              <a16:creationId xmlns:a16="http://schemas.microsoft.com/office/drawing/2014/main" id="{17A2FE76-D580-9068-C451-7535C32C3271}"/>
-            </a:ext>
-          </a:extLst>
-        </p:cNvPr>
-        <p:cNvGrpSpPr/>
-        <p:nvPr/>
-      </p:nvGrpSpPr>
-      <p:grpSpPr>
-        <a:xfrm>
-          <a:off x="0" y="0"/>
-          <a:ext cx="0" cy="0"/>
-          <a:chOff x="0" y="0"/>
-          <a:chExt cx="0" cy="0"/>
-        </a:xfrm>
-      </p:grpSpPr>
-      <p:sp>
-        <p:nvSpPr>
-          <p:cNvPr id="8" name="TextBox 7">
-            <a:extLst>
-              <a:ext uri="{FF2B5EF4-FFF2-40B4-BE49-F238E27FC236}">
-                <a16:creationId xmlns:a16="http://schemas.microsoft.com/office/drawing/2014/main" id="{552EEE62-CF19-9EE0-E4D2-7F9C16B8046B}"/>
-              </a:ext>
-            </a:extLst>
-          </p:cNvPr>
-          <p:cNvSpPr txBox="1"/>
-          <p:nvPr/>
-        </p:nvSpPr>
-        <p:spPr>
-          <a:xfrm>
-            <a:off x="3028950" y="85725"/>
-            <a:ext cx="6400800" cy="707886"/>
-          </a:xfrm>
-          <a:prstGeom prst="rect">
-            <a:avLst/>
-          </a:prstGeom>
-          <a:noFill/>
-        </p:spPr>
-        <p:txBody>
-          <a:bodyPr wrap="square" rtlCol="0">
-            <a:spAutoFit/>
-          </a:bodyPr>
-          <a:lstStyle/>
-          <a:p>
-            <a:pPr algn="ctr"/>
-            <a:r>
-              <a:rPr lang="en-US" sz="4000" dirty="0">
-                <a:solidFill>
-                  <a:schemeClr val="accent6">
-                    <a:lumMod val="60000"/>
-                    <a:lumOff val="40000"/>
-                  </a:schemeClr>
-                </a:solidFill>
-              </a:rPr>
-              <a:t>Heading Goes Here</a:t>
-            </a:r>
-          </a:p>
-        </p:txBody>
-      </p:sp>
-      <p:sp>
-        <p:nvSpPr>
-          <p:cNvPr id="9" name="TextBox 8">
-            <a:extLst>
-              <a:ext uri="{FF2B5EF4-FFF2-40B4-BE49-F238E27FC236}">
-                <a16:creationId xmlns:a16="http://schemas.microsoft.com/office/drawing/2014/main" id="{7F60ACD6-1EC9-227E-5DA1-EBD6C3DF7290}"/>
-              </a:ext>
-            </a:extLst>
-          </p:cNvPr>
-          <p:cNvSpPr txBox="1"/>
-          <p:nvPr/>
-        </p:nvSpPr>
-        <p:spPr>
-          <a:xfrm>
-            <a:off x="238125" y="1244739"/>
-            <a:ext cx="5029200" cy="1200329"/>
-          </a:xfrm>
-          <a:prstGeom prst="rect">
-            <a:avLst/>
-          </a:prstGeom>
-          <a:noFill/>
-        </p:spPr>
-        <p:txBody>
-          <a:bodyPr wrap="square" rtlCol="0">
-            <a:spAutoFit/>
-          </a:bodyPr>
-          <a:lstStyle/>
-          <a:p>
-            <a:r>
-              <a:rPr lang="en-US" dirty="0" err="1">
-                <a:solidFill>
-                  <a:schemeClr val="accent6">
-                    <a:lumMod val="60000"/>
-                    <a:lumOff val="40000"/>
-                  </a:schemeClr>
-                </a:solidFill>
-              </a:rPr>
-              <a:t>Fhdsklf</a:t>
-            </a:r>
-            <a:endParaRPr lang="en-US" dirty="0">
-              <a:solidFill>
-                <a:schemeClr val="accent6">
-                  <a:lumMod val="60000"/>
-                  <a:lumOff val="40000"/>
-                </a:schemeClr>
-              </a:solidFill>
-            </a:endParaRPr>
-          </a:p>
-          <a:p>
-            <a:r>
-              <a:rPr lang="en-US" dirty="0" err="1">
-                <a:solidFill>
-                  <a:schemeClr val="accent6">
-                    <a:lumMod val="60000"/>
-                    <a:lumOff val="40000"/>
-                  </a:schemeClr>
-                </a:solidFill>
-              </a:rPr>
-              <a:t>Fjdsklf</a:t>
-            </a:r>
-            <a:endParaRPr lang="en-US" dirty="0">
-              <a:solidFill>
-                <a:schemeClr val="accent6">
-                  <a:lumMod val="60000"/>
-                  <a:lumOff val="40000"/>
-                </a:schemeClr>
-              </a:solidFill>
-            </a:endParaRPr>
-          </a:p>
-          <a:p>
-            <a:r>
-              <a:rPr lang="en-US" dirty="0" err="1">
-                <a:solidFill>
-                  <a:schemeClr val="accent6">
-                    <a:lumMod val="60000"/>
-                    <a:lumOff val="40000"/>
-                  </a:schemeClr>
-                </a:solidFill>
-              </a:rPr>
-              <a:t>Fjskldf</a:t>
-            </a:r>
-            <a:endParaRPr lang="en-US" dirty="0">
-              <a:solidFill>
-                <a:schemeClr val="accent6">
-                  <a:lumMod val="60000"/>
-                  <a:lumOff val="40000"/>
-                </a:schemeClr>
-              </a:solidFill>
-            </a:endParaRPr>
-          </a:p>
-          <a:p>
-            <a:endParaRPr lang="en-US" dirty="0">
-              <a:solidFill>
-                <a:schemeClr val="accent6">
-                  <a:lumMod val="60000"/>
-                  <a:lumOff val="40000"/>
-                </a:schemeClr>
-              </a:solidFill>
-            </a:endParaRPr>
-          </a:p>
-        </p:txBody>
-      </p:sp>
-    </p:spTree>
-    <p:extLst>
-      <p:ext uri="{BB962C8B-B14F-4D97-AF65-F5344CB8AC3E}">
-        <p14:creationId xmlns:p14="http://schemas.microsoft.com/office/powerpoint/2010/main" val="1380376585"/>
       </p:ext>
     </p:extLst>
   </p:cSld>
@@ -8937,7 +9177,7 @@
         <p:cNvPr id="1" name="">
           <a:extLst>
             <a:ext uri="{FF2B5EF4-FFF2-40B4-BE49-F238E27FC236}">
-              <a16:creationId xmlns:a16="http://schemas.microsoft.com/office/drawing/2014/main" id="{094F1E3C-19BD-C364-990B-2DE157CBA6C0}"/>
+              <a16:creationId xmlns:a16="http://schemas.microsoft.com/office/drawing/2014/main" id="{58F44C00-16FE-09E4-2325-3BD0CB83EC35}"/>
             </a:ext>
           </a:extLst>
         </p:cNvPr>
@@ -8954,10 +9194,1558 @@
       </p:grpSpPr>
       <p:sp>
         <p:nvSpPr>
+          <p:cNvPr id="5" name="TextBox 4">
+            <a:extLst>
+              <a:ext uri="{FF2B5EF4-FFF2-40B4-BE49-F238E27FC236}">
+                <a16:creationId xmlns:a16="http://schemas.microsoft.com/office/drawing/2014/main" id="{82C04C30-DFF5-88B8-B592-FC95A6F8244B}"/>
+              </a:ext>
+            </a:extLst>
+          </p:cNvPr>
+          <p:cNvSpPr txBox="1"/>
+          <p:nvPr/>
+        </p:nvSpPr>
+        <p:spPr>
+          <a:xfrm>
+            <a:off x="1619250" y="139184"/>
+            <a:ext cx="5772150" cy="461665"/>
+          </a:xfrm>
+          <a:prstGeom prst="rect">
+            <a:avLst/>
+          </a:prstGeom>
+          <a:noFill/>
+        </p:spPr>
+        <p:txBody>
+          <a:bodyPr wrap="square">
+            <a:spAutoFit/>
+          </a:bodyPr>
+          <a:lstStyle/>
+          <a:p>
+            <a:r>
+              <a:rPr lang="en-US" sz="2400" dirty="0">
+                <a:solidFill>
+                  <a:schemeClr val="accent6">
+                    <a:lumMod val="60000"/>
+                    <a:lumOff val="40000"/>
+                  </a:schemeClr>
+                </a:solidFill>
+              </a:rPr>
+              <a:t>(EXTRA) Comparison: Adding 2 numbers</a:t>
+            </a:r>
+            <a:endParaRPr lang="en-US" sz="2400" dirty="0"/>
+          </a:p>
+        </p:txBody>
+      </p:sp>
+      <p:sp>
+        <p:nvSpPr>
+          <p:cNvPr id="6" name="TextBox 5">
+            <a:extLst>
+              <a:ext uri="{FF2B5EF4-FFF2-40B4-BE49-F238E27FC236}">
+                <a16:creationId xmlns:a16="http://schemas.microsoft.com/office/drawing/2014/main" id="{481DD1E6-4F7B-90A0-8486-FE336607B618}"/>
+              </a:ext>
+            </a:extLst>
+          </p:cNvPr>
+          <p:cNvSpPr txBox="1"/>
+          <p:nvPr/>
+        </p:nvSpPr>
+        <p:spPr>
+          <a:xfrm>
+            <a:off x="133351" y="964764"/>
+            <a:ext cx="2686050" cy="5016758"/>
+          </a:xfrm>
+          <a:prstGeom prst="rect">
+            <a:avLst/>
+          </a:prstGeom>
+          <a:noFill/>
+        </p:spPr>
+        <p:txBody>
+          <a:bodyPr wrap="square">
+            <a:spAutoFit/>
+          </a:bodyPr>
+          <a:lstStyle/>
+          <a:p>
+            <a:pPr>
+              <a:buNone/>
+            </a:pPr>
+            <a:r>
+              <a:rPr lang="en-US" sz="2000" b="1" dirty="0">
+                <a:solidFill>
+                  <a:schemeClr val="accent6">
+                    <a:lumMod val="60000"/>
+                    <a:lumOff val="40000"/>
+                  </a:schemeClr>
+                </a:solidFill>
+              </a:rPr>
+              <a:t>In C:</a:t>
+            </a:r>
+          </a:p>
+          <a:p>
+            <a:pPr>
+              <a:buNone/>
+            </a:pPr>
+            <a:endParaRPr lang="en-US" sz="2000" b="1" dirty="0">
+              <a:solidFill>
+                <a:schemeClr val="accent6">
+                  <a:lumMod val="60000"/>
+                  <a:lumOff val="40000"/>
+                </a:schemeClr>
+              </a:solidFill>
+            </a:endParaRPr>
+          </a:p>
+          <a:p>
+            <a:pPr>
+              <a:buNone/>
+            </a:pPr>
+            <a:r>
+              <a:rPr lang="en-US" sz="2000" dirty="0">
+                <a:solidFill>
+                  <a:schemeClr val="accent4">
+                    <a:lumMod val="60000"/>
+                    <a:lumOff val="40000"/>
+                  </a:schemeClr>
+                </a:solidFill>
+                <a:cs typeface="Times New Roman" panose="02020603050405020304" pitchFamily="18" charset="0"/>
+              </a:rPr>
+              <a:t>#include &lt;</a:t>
+            </a:r>
+            <a:r>
+              <a:rPr lang="en-US" sz="2000" dirty="0" err="1">
+                <a:solidFill>
+                  <a:schemeClr val="accent4">
+                    <a:lumMod val="60000"/>
+                    <a:lumOff val="40000"/>
+                  </a:schemeClr>
+                </a:solidFill>
+                <a:cs typeface="Times New Roman" panose="02020603050405020304" pitchFamily="18" charset="0"/>
+              </a:rPr>
+              <a:t>stdio.h</a:t>
+            </a:r>
+            <a:r>
+              <a:rPr lang="en-US" sz="2000" dirty="0">
+                <a:solidFill>
+                  <a:schemeClr val="accent4">
+                    <a:lumMod val="60000"/>
+                    <a:lumOff val="40000"/>
+                  </a:schemeClr>
+                </a:solidFill>
+                <a:cs typeface="Times New Roman" panose="02020603050405020304" pitchFamily="18" charset="0"/>
+              </a:rPr>
+              <a:t>&gt;</a:t>
+            </a:r>
+          </a:p>
+          <a:p>
+            <a:pPr>
+              <a:buNone/>
+            </a:pPr>
+            <a:endParaRPr lang="en-US" sz="2000" dirty="0">
+              <a:solidFill>
+                <a:schemeClr val="accent4">
+                  <a:lumMod val="60000"/>
+                  <a:lumOff val="40000"/>
+                </a:schemeClr>
+              </a:solidFill>
+              <a:cs typeface="Times New Roman" panose="02020603050405020304" pitchFamily="18" charset="0"/>
+            </a:endParaRPr>
+          </a:p>
+          <a:p>
+            <a:pPr>
+              <a:buNone/>
+            </a:pPr>
+            <a:r>
+              <a:rPr lang="en-US" sz="2000" dirty="0">
+                <a:solidFill>
+                  <a:schemeClr val="accent4">
+                    <a:lumMod val="60000"/>
+                    <a:lumOff val="40000"/>
+                  </a:schemeClr>
+                </a:solidFill>
+                <a:cs typeface="Times New Roman" panose="02020603050405020304" pitchFamily="18" charset="0"/>
+              </a:rPr>
+              <a:t>int main() {</a:t>
+            </a:r>
+          </a:p>
+          <a:p>
+            <a:pPr>
+              <a:buNone/>
+            </a:pPr>
+            <a:r>
+              <a:rPr lang="en-US" sz="2000" dirty="0">
+                <a:solidFill>
+                  <a:schemeClr val="accent4">
+                    <a:lumMod val="60000"/>
+                    <a:lumOff val="40000"/>
+                  </a:schemeClr>
+                </a:solidFill>
+                <a:cs typeface="Times New Roman" panose="02020603050405020304" pitchFamily="18" charset="0"/>
+              </a:rPr>
+              <a:t>    int a = 3;</a:t>
+            </a:r>
+          </a:p>
+          <a:p>
+            <a:pPr>
+              <a:buNone/>
+            </a:pPr>
+            <a:r>
+              <a:rPr lang="en-US" sz="2000" dirty="0">
+                <a:solidFill>
+                  <a:schemeClr val="accent4">
+                    <a:lumMod val="60000"/>
+                    <a:lumOff val="40000"/>
+                  </a:schemeClr>
+                </a:solidFill>
+                <a:cs typeface="Times New Roman" panose="02020603050405020304" pitchFamily="18" charset="0"/>
+              </a:rPr>
+              <a:t>    int b = 2;</a:t>
+            </a:r>
+          </a:p>
+          <a:p>
+            <a:pPr>
+              <a:buNone/>
+            </a:pPr>
+            <a:endParaRPr lang="en-US" sz="2000" dirty="0">
+              <a:solidFill>
+                <a:schemeClr val="accent4">
+                  <a:lumMod val="60000"/>
+                  <a:lumOff val="40000"/>
+                </a:schemeClr>
+              </a:solidFill>
+              <a:cs typeface="Times New Roman" panose="02020603050405020304" pitchFamily="18" charset="0"/>
+            </a:endParaRPr>
+          </a:p>
+          <a:p>
+            <a:pPr>
+              <a:buNone/>
+            </a:pPr>
+            <a:r>
+              <a:rPr lang="en-US" sz="2000" dirty="0">
+                <a:solidFill>
+                  <a:schemeClr val="accent4">
+                    <a:lumMod val="60000"/>
+                    <a:lumOff val="40000"/>
+                  </a:schemeClr>
+                </a:solidFill>
+                <a:cs typeface="Times New Roman" panose="02020603050405020304" pitchFamily="18" charset="0"/>
+              </a:rPr>
+              <a:t>    int result;</a:t>
+            </a:r>
+          </a:p>
+          <a:p>
+            <a:pPr>
+              <a:buNone/>
+            </a:pPr>
+            <a:endParaRPr lang="en-US" sz="2000" dirty="0">
+              <a:solidFill>
+                <a:schemeClr val="accent4">
+                  <a:lumMod val="60000"/>
+                  <a:lumOff val="40000"/>
+                </a:schemeClr>
+              </a:solidFill>
+              <a:cs typeface="Times New Roman" panose="02020603050405020304" pitchFamily="18" charset="0"/>
+            </a:endParaRPr>
+          </a:p>
+          <a:p>
+            <a:pPr>
+              <a:buNone/>
+            </a:pPr>
+            <a:r>
+              <a:rPr lang="en-US" sz="2000" dirty="0">
+                <a:solidFill>
+                  <a:schemeClr val="accent4">
+                    <a:lumMod val="60000"/>
+                    <a:lumOff val="40000"/>
+                  </a:schemeClr>
+                </a:solidFill>
+                <a:cs typeface="Times New Roman" panose="02020603050405020304" pitchFamily="18" charset="0"/>
+              </a:rPr>
+              <a:t>    result = a + b;</a:t>
+            </a:r>
+          </a:p>
+          <a:p>
+            <a:pPr>
+              <a:buNone/>
+            </a:pPr>
+            <a:endParaRPr lang="en-US" sz="2000" dirty="0">
+              <a:solidFill>
+                <a:schemeClr val="accent4">
+                  <a:lumMod val="60000"/>
+                  <a:lumOff val="40000"/>
+                </a:schemeClr>
+              </a:solidFill>
+              <a:cs typeface="Times New Roman" panose="02020603050405020304" pitchFamily="18" charset="0"/>
+            </a:endParaRPr>
+          </a:p>
+          <a:p>
+            <a:pPr>
+              <a:buNone/>
+            </a:pPr>
+            <a:r>
+              <a:rPr lang="en-US" sz="2000" dirty="0">
+                <a:solidFill>
+                  <a:schemeClr val="accent4">
+                    <a:lumMod val="60000"/>
+                    <a:lumOff val="40000"/>
+                  </a:schemeClr>
+                </a:solidFill>
+                <a:cs typeface="Times New Roman" panose="02020603050405020304" pitchFamily="18" charset="0"/>
+              </a:rPr>
+              <a:t>    </a:t>
+            </a:r>
+            <a:r>
+              <a:rPr lang="en-US" sz="2000" dirty="0" err="1">
+                <a:solidFill>
+                  <a:schemeClr val="accent4">
+                    <a:lumMod val="60000"/>
+                    <a:lumOff val="40000"/>
+                  </a:schemeClr>
+                </a:solidFill>
+                <a:cs typeface="Times New Roman" panose="02020603050405020304" pitchFamily="18" charset="0"/>
+              </a:rPr>
+              <a:t>printf</a:t>
+            </a:r>
+            <a:r>
+              <a:rPr lang="en-US" sz="2000" dirty="0">
+                <a:solidFill>
+                  <a:schemeClr val="accent4">
+                    <a:lumMod val="60000"/>
+                    <a:lumOff val="40000"/>
+                  </a:schemeClr>
+                </a:solidFill>
+                <a:cs typeface="Times New Roman" panose="02020603050405020304" pitchFamily="18" charset="0"/>
+              </a:rPr>
+              <a:t>("%d\n", result);</a:t>
+            </a:r>
+          </a:p>
+          <a:p>
+            <a:pPr>
+              <a:buNone/>
+            </a:pPr>
+            <a:endParaRPr lang="en-US" sz="2000" dirty="0">
+              <a:solidFill>
+                <a:schemeClr val="accent4">
+                  <a:lumMod val="60000"/>
+                  <a:lumOff val="40000"/>
+                </a:schemeClr>
+              </a:solidFill>
+              <a:cs typeface="Times New Roman" panose="02020603050405020304" pitchFamily="18" charset="0"/>
+            </a:endParaRPr>
+          </a:p>
+          <a:p>
+            <a:pPr>
+              <a:buNone/>
+            </a:pPr>
+            <a:r>
+              <a:rPr lang="en-US" sz="2000" dirty="0">
+                <a:solidFill>
+                  <a:schemeClr val="accent4">
+                    <a:lumMod val="60000"/>
+                    <a:lumOff val="40000"/>
+                  </a:schemeClr>
+                </a:solidFill>
+                <a:cs typeface="Times New Roman" panose="02020603050405020304" pitchFamily="18" charset="0"/>
+              </a:rPr>
+              <a:t>    return 0;</a:t>
+            </a:r>
+          </a:p>
+          <a:p>
+            <a:pPr>
+              <a:buNone/>
+            </a:pPr>
+            <a:r>
+              <a:rPr lang="en-US" sz="2000" dirty="0">
+                <a:solidFill>
+                  <a:schemeClr val="accent4">
+                    <a:lumMod val="60000"/>
+                    <a:lumOff val="40000"/>
+                  </a:schemeClr>
+                </a:solidFill>
+                <a:cs typeface="Times New Roman" panose="02020603050405020304" pitchFamily="18" charset="0"/>
+              </a:rPr>
+              <a:t>}</a:t>
+            </a:r>
+          </a:p>
+        </p:txBody>
+      </p:sp>
+      <p:sp>
+        <p:nvSpPr>
+          <p:cNvPr id="7" name="TextBox 6">
+            <a:extLst>
+              <a:ext uri="{FF2B5EF4-FFF2-40B4-BE49-F238E27FC236}">
+                <a16:creationId xmlns:a16="http://schemas.microsoft.com/office/drawing/2014/main" id="{D0F4E038-5693-0BD8-D326-E66AEDEEE17A}"/>
+              </a:ext>
+            </a:extLst>
+          </p:cNvPr>
+          <p:cNvSpPr txBox="1"/>
+          <p:nvPr/>
+        </p:nvSpPr>
+        <p:spPr>
+          <a:xfrm>
+            <a:off x="3371850" y="993339"/>
+            <a:ext cx="3609976" cy="4678204"/>
+          </a:xfrm>
+          <a:prstGeom prst="rect">
+            <a:avLst/>
+          </a:prstGeom>
+          <a:noFill/>
+        </p:spPr>
+        <p:txBody>
+          <a:bodyPr wrap="square">
+            <a:spAutoFit/>
+          </a:bodyPr>
+          <a:lstStyle/>
+          <a:p>
+            <a:pPr>
+              <a:buNone/>
+            </a:pPr>
+            <a:r>
+              <a:rPr lang="en-US" sz="2000" b="1" dirty="0">
+                <a:solidFill>
+                  <a:schemeClr val="accent6">
+                    <a:lumMod val="60000"/>
+                    <a:lumOff val="40000"/>
+                  </a:schemeClr>
+                </a:solidFill>
+              </a:rPr>
+              <a:t>In C++:</a:t>
+            </a:r>
+          </a:p>
+          <a:p>
+            <a:pPr>
+              <a:buNone/>
+            </a:pPr>
+            <a:endParaRPr lang="en-US" sz="2000" b="1" dirty="0">
+              <a:solidFill>
+                <a:schemeClr val="accent6">
+                  <a:lumMod val="60000"/>
+                  <a:lumOff val="40000"/>
+                </a:schemeClr>
+              </a:solidFill>
+            </a:endParaRPr>
+          </a:p>
+          <a:p>
+            <a:pPr>
+              <a:buNone/>
+            </a:pPr>
+            <a:r>
+              <a:rPr lang="en-US" sz="2000" dirty="0">
+                <a:solidFill>
+                  <a:schemeClr val="accent4">
+                    <a:lumMod val="60000"/>
+                    <a:lumOff val="40000"/>
+                  </a:schemeClr>
+                </a:solidFill>
+                <a:cs typeface="Times New Roman" panose="02020603050405020304" pitchFamily="18" charset="0"/>
+              </a:rPr>
+              <a:t>#include &lt;iostream&gt;</a:t>
+            </a:r>
+          </a:p>
+          <a:p>
+            <a:pPr>
+              <a:buNone/>
+            </a:pPr>
+            <a:endParaRPr lang="en-US" sz="2000" dirty="0">
+              <a:solidFill>
+                <a:schemeClr val="accent4">
+                  <a:lumMod val="60000"/>
+                  <a:lumOff val="40000"/>
+                </a:schemeClr>
+              </a:solidFill>
+              <a:cs typeface="Times New Roman" panose="02020603050405020304" pitchFamily="18" charset="0"/>
+            </a:endParaRPr>
+          </a:p>
+          <a:p>
+            <a:pPr>
+              <a:buNone/>
+            </a:pPr>
+            <a:r>
+              <a:rPr lang="en-US" sz="2000" dirty="0">
+                <a:solidFill>
+                  <a:schemeClr val="accent4">
+                    <a:lumMod val="60000"/>
+                    <a:lumOff val="40000"/>
+                  </a:schemeClr>
+                </a:solidFill>
+                <a:cs typeface="Times New Roman" panose="02020603050405020304" pitchFamily="18" charset="0"/>
+              </a:rPr>
+              <a:t>int main() {</a:t>
+            </a:r>
+          </a:p>
+          <a:p>
+            <a:pPr>
+              <a:buNone/>
+            </a:pPr>
+            <a:r>
+              <a:rPr lang="en-US" sz="2000" dirty="0">
+                <a:solidFill>
+                  <a:schemeClr val="accent4">
+                    <a:lumMod val="60000"/>
+                    <a:lumOff val="40000"/>
+                  </a:schemeClr>
+                </a:solidFill>
+                <a:cs typeface="Times New Roman" panose="02020603050405020304" pitchFamily="18" charset="0"/>
+              </a:rPr>
+              <a:t>    int a = 3;</a:t>
+            </a:r>
+          </a:p>
+          <a:p>
+            <a:pPr>
+              <a:buNone/>
+            </a:pPr>
+            <a:r>
+              <a:rPr lang="en-US" sz="2000" dirty="0">
+                <a:solidFill>
+                  <a:schemeClr val="accent4">
+                    <a:lumMod val="60000"/>
+                    <a:lumOff val="40000"/>
+                  </a:schemeClr>
+                </a:solidFill>
+                <a:cs typeface="Times New Roman" panose="02020603050405020304" pitchFamily="18" charset="0"/>
+              </a:rPr>
+              <a:t>    int b = 2;</a:t>
+            </a:r>
+          </a:p>
+          <a:p>
+            <a:pPr>
+              <a:buNone/>
+            </a:pPr>
+            <a:endParaRPr lang="en-US" sz="2000" dirty="0">
+              <a:solidFill>
+                <a:schemeClr val="accent4">
+                  <a:lumMod val="60000"/>
+                  <a:lumOff val="40000"/>
+                </a:schemeClr>
+              </a:solidFill>
+              <a:cs typeface="Times New Roman" panose="02020603050405020304" pitchFamily="18" charset="0"/>
+            </a:endParaRPr>
+          </a:p>
+          <a:p>
+            <a:pPr>
+              <a:buNone/>
+            </a:pPr>
+            <a:r>
+              <a:rPr lang="en-US" sz="2000" dirty="0">
+                <a:solidFill>
+                  <a:schemeClr val="accent4">
+                    <a:lumMod val="60000"/>
+                    <a:lumOff val="40000"/>
+                  </a:schemeClr>
+                </a:solidFill>
+                <a:cs typeface="Times New Roman" panose="02020603050405020304" pitchFamily="18" charset="0"/>
+              </a:rPr>
+              <a:t>    int result = a + b;</a:t>
+            </a:r>
+          </a:p>
+          <a:p>
+            <a:pPr>
+              <a:buNone/>
+            </a:pPr>
+            <a:endParaRPr lang="en-US" sz="2000" dirty="0">
+              <a:solidFill>
+                <a:schemeClr val="accent4">
+                  <a:lumMod val="60000"/>
+                  <a:lumOff val="40000"/>
+                </a:schemeClr>
+              </a:solidFill>
+              <a:cs typeface="Times New Roman" panose="02020603050405020304" pitchFamily="18" charset="0"/>
+            </a:endParaRPr>
+          </a:p>
+          <a:p>
+            <a:pPr>
+              <a:buNone/>
+            </a:pPr>
+            <a:r>
+              <a:rPr lang="en-US" sz="2000" dirty="0">
+                <a:solidFill>
+                  <a:schemeClr val="accent4">
+                    <a:lumMod val="60000"/>
+                    <a:lumOff val="40000"/>
+                  </a:schemeClr>
+                </a:solidFill>
+                <a:cs typeface="Times New Roman" panose="02020603050405020304" pitchFamily="18" charset="0"/>
+              </a:rPr>
+              <a:t>    std::</a:t>
+            </a:r>
+            <a:r>
+              <a:rPr lang="en-US" sz="2000" dirty="0" err="1">
+                <a:solidFill>
+                  <a:schemeClr val="accent4">
+                    <a:lumMod val="60000"/>
+                    <a:lumOff val="40000"/>
+                  </a:schemeClr>
+                </a:solidFill>
+                <a:cs typeface="Times New Roman" panose="02020603050405020304" pitchFamily="18" charset="0"/>
+              </a:rPr>
+              <a:t>cout</a:t>
+            </a:r>
+            <a:r>
+              <a:rPr lang="en-US" sz="2000" dirty="0">
+                <a:solidFill>
+                  <a:schemeClr val="accent4">
+                    <a:lumMod val="60000"/>
+                    <a:lumOff val="40000"/>
+                  </a:schemeClr>
+                </a:solidFill>
+                <a:cs typeface="Times New Roman" panose="02020603050405020304" pitchFamily="18" charset="0"/>
+              </a:rPr>
+              <a:t> &lt;&lt; result &lt;&lt; std::</a:t>
+            </a:r>
+            <a:r>
+              <a:rPr lang="en-US" sz="2000" dirty="0" err="1">
+                <a:solidFill>
+                  <a:schemeClr val="accent4">
+                    <a:lumMod val="60000"/>
+                    <a:lumOff val="40000"/>
+                  </a:schemeClr>
+                </a:solidFill>
+                <a:cs typeface="Times New Roman" panose="02020603050405020304" pitchFamily="18" charset="0"/>
+              </a:rPr>
+              <a:t>endl</a:t>
+            </a:r>
+            <a:r>
+              <a:rPr lang="en-US" sz="2000" dirty="0">
+                <a:solidFill>
+                  <a:schemeClr val="accent4">
+                    <a:lumMod val="60000"/>
+                    <a:lumOff val="40000"/>
+                  </a:schemeClr>
+                </a:solidFill>
+                <a:cs typeface="Times New Roman" panose="02020603050405020304" pitchFamily="18" charset="0"/>
+              </a:rPr>
+              <a:t>;</a:t>
+            </a:r>
+          </a:p>
+          <a:p>
+            <a:pPr>
+              <a:buNone/>
+            </a:pPr>
+            <a:endParaRPr lang="en-US" sz="2000" dirty="0">
+              <a:solidFill>
+                <a:schemeClr val="accent4">
+                  <a:lumMod val="60000"/>
+                  <a:lumOff val="40000"/>
+                </a:schemeClr>
+              </a:solidFill>
+              <a:cs typeface="Times New Roman" panose="02020603050405020304" pitchFamily="18" charset="0"/>
+            </a:endParaRPr>
+          </a:p>
+          <a:p>
+            <a:pPr>
+              <a:buNone/>
+            </a:pPr>
+            <a:r>
+              <a:rPr lang="en-US" sz="2000" dirty="0">
+                <a:solidFill>
+                  <a:schemeClr val="accent4">
+                    <a:lumMod val="60000"/>
+                    <a:lumOff val="40000"/>
+                  </a:schemeClr>
+                </a:solidFill>
+                <a:cs typeface="Times New Roman" panose="02020603050405020304" pitchFamily="18" charset="0"/>
+              </a:rPr>
+              <a:t>    return 0;</a:t>
+            </a:r>
+          </a:p>
+          <a:p>
+            <a:pPr>
+              <a:buNone/>
+            </a:pPr>
+            <a:r>
+              <a:rPr lang="en-US" sz="2000" dirty="0">
+                <a:solidFill>
+                  <a:schemeClr val="accent4">
+                    <a:lumMod val="60000"/>
+                    <a:lumOff val="40000"/>
+                  </a:schemeClr>
+                </a:solidFill>
+                <a:cs typeface="Times New Roman" panose="02020603050405020304" pitchFamily="18" charset="0"/>
+              </a:rPr>
+              <a:t>}</a:t>
+            </a:r>
+          </a:p>
+        </p:txBody>
+      </p:sp>
+      <p:sp>
+        <p:nvSpPr>
+          <p:cNvPr id="8" name="TextBox 7">
+            <a:extLst>
+              <a:ext uri="{FF2B5EF4-FFF2-40B4-BE49-F238E27FC236}">
+                <a16:creationId xmlns:a16="http://schemas.microsoft.com/office/drawing/2014/main" id="{57B8FDE9-C61A-F1C0-0DD8-02A67BF58966}"/>
+              </a:ext>
+            </a:extLst>
+          </p:cNvPr>
+          <p:cNvSpPr txBox="1"/>
+          <p:nvPr/>
+        </p:nvSpPr>
+        <p:spPr>
+          <a:xfrm>
+            <a:off x="7353299" y="1031439"/>
+            <a:ext cx="6048375" cy="3785652"/>
+          </a:xfrm>
+          <a:prstGeom prst="rect">
+            <a:avLst/>
+          </a:prstGeom>
+          <a:noFill/>
+        </p:spPr>
+        <p:txBody>
+          <a:bodyPr wrap="square">
+            <a:spAutoFit/>
+          </a:bodyPr>
+          <a:lstStyle/>
+          <a:p>
+            <a:pPr>
+              <a:buNone/>
+            </a:pPr>
+            <a:r>
+              <a:rPr lang="en-US" sz="2000" b="1" dirty="0">
+                <a:solidFill>
+                  <a:schemeClr val="accent6">
+                    <a:lumMod val="60000"/>
+                    <a:lumOff val="40000"/>
+                  </a:schemeClr>
+                </a:solidFill>
+              </a:rPr>
+              <a:t>In Java:</a:t>
+            </a:r>
+          </a:p>
+          <a:p>
+            <a:pPr>
+              <a:buNone/>
+            </a:pPr>
+            <a:endParaRPr lang="en-US" sz="2000" b="1" dirty="0">
+              <a:solidFill>
+                <a:schemeClr val="accent6">
+                  <a:lumMod val="60000"/>
+                  <a:lumOff val="40000"/>
+                </a:schemeClr>
+              </a:solidFill>
+            </a:endParaRPr>
+          </a:p>
+          <a:p>
+            <a:pPr>
+              <a:buNone/>
+            </a:pPr>
+            <a:r>
+              <a:rPr lang="en-US" sz="2000" dirty="0">
+                <a:solidFill>
+                  <a:schemeClr val="accent4">
+                    <a:lumMod val="60000"/>
+                    <a:lumOff val="40000"/>
+                  </a:schemeClr>
+                </a:solidFill>
+                <a:cs typeface="Times New Roman" panose="02020603050405020304" pitchFamily="18" charset="0"/>
+              </a:rPr>
+              <a:t>public class Main {</a:t>
+            </a:r>
+          </a:p>
+          <a:p>
+            <a:pPr>
+              <a:buNone/>
+            </a:pPr>
+            <a:r>
+              <a:rPr lang="en-US" sz="2000" dirty="0">
+                <a:solidFill>
+                  <a:schemeClr val="accent4">
+                    <a:lumMod val="60000"/>
+                    <a:lumOff val="40000"/>
+                  </a:schemeClr>
+                </a:solidFill>
+                <a:cs typeface="Times New Roman" panose="02020603050405020304" pitchFamily="18" charset="0"/>
+              </a:rPr>
+              <a:t>    public static void main(String[] </a:t>
+            </a:r>
+            <a:r>
+              <a:rPr lang="en-US" sz="2000" dirty="0" err="1">
+                <a:solidFill>
+                  <a:schemeClr val="accent4">
+                    <a:lumMod val="60000"/>
+                    <a:lumOff val="40000"/>
+                  </a:schemeClr>
+                </a:solidFill>
+                <a:cs typeface="Times New Roman" panose="02020603050405020304" pitchFamily="18" charset="0"/>
+              </a:rPr>
+              <a:t>args</a:t>
+            </a:r>
+            <a:r>
+              <a:rPr lang="en-US" sz="2000" dirty="0">
+                <a:solidFill>
+                  <a:schemeClr val="accent4">
+                    <a:lumMod val="60000"/>
+                    <a:lumOff val="40000"/>
+                  </a:schemeClr>
+                </a:solidFill>
+                <a:cs typeface="Times New Roman" panose="02020603050405020304" pitchFamily="18" charset="0"/>
+              </a:rPr>
+              <a:t>) {</a:t>
+            </a:r>
+          </a:p>
+          <a:p>
+            <a:pPr>
+              <a:buNone/>
+            </a:pPr>
+            <a:r>
+              <a:rPr lang="en-US" sz="2000" dirty="0">
+                <a:solidFill>
+                  <a:schemeClr val="accent4">
+                    <a:lumMod val="60000"/>
+                    <a:lumOff val="40000"/>
+                  </a:schemeClr>
+                </a:solidFill>
+                <a:cs typeface="Times New Roman" panose="02020603050405020304" pitchFamily="18" charset="0"/>
+              </a:rPr>
+              <a:t>        int a = 3;</a:t>
+            </a:r>
+          </a:p>
+          <a:p>
+            <a:pPr>
+              <a:buNone/>
+            </a:pPr>
+            <a:r>
+              <a:rPr lang="en-US" sz="2000" dirty="0">
+                <a:solidFill>
+                  <a:schemeClr val="accent4">
+                    <a:lumMod val="60000"/>
+                    <a:lumOff val="40000"/>
+                  </a:schemeClr>
+                </a:solidFill>
+                <a:cs typeface="Times New Roman" panose="02020603050405020304" pitchFamily="18" charset="0"/>
+              </a:rPr>
+              <a:t>        int b = 2;</a:t>
+            </a:r>
+          </a:p>
+          <a:p>
+            <a:pPr>
+              <a:buNone/>
+            </a:pPr>
+            <a:r>
+              <a:rPr lang="en-US" sz="2000" dirty="0">
+                <a:solidFill>
+                  <a:schemeClr val="accent4">
+                    <a:lumMod val="60000"/>
+                    <a:lumOff val="40000"/>
+                  </a:schemeClr>
+                </a:solidFill>
+                <a:cs typeface="Times New Roman" panose="02020603050405020304" pitchFamily="18" charset="0"/>
+              </a:rPr>
+              <a:t>        </a:t>
+            </a:r>
+          </a:p>
+          <a:p>
+            <a:pPr>
+              <a:buNone/>
+            </a:pPr>
+            <a:r>
+              <a:rPr lang="en-US" sz="2000" dirty="0">
+                <a:solidFill>
+                  <a:schemeClr val="accent4">
+                    <a:lumMod val="60000"/>
+                    <a:lumOff val="40000"/>
+                  </a:schemeClr>
+                </a:solidFill>
+                <a:cs typeface="Times New Roman" panose="02020603050405020304" pitchFamily="18" charset="0"/>
+              </a:rPr>
+              <a:t>        int result = a + b;</a:t>
+            </a:r>
+          </a:p>
+          <a:p>
+            <a:pPr>
+              <a:buNone/>
+            </a:pPr>
+            <a:endParaRPr lang="en-US" sz="2000" dirty="0">
+              <a:solidFill>
+                <a:schemeClr val="accent4">
+                  <a:lumMod val="60000"/>
+                  <a:lumOff val="40000"/>
+                </a:schemeClr>
+              </a:solidFill>
+              <a:cs typeface="Times New Roman" panose="02020603050405020304" pitchFamily="18" charset="0"/>
+            </a:endParaRPr>
+          </a:p>
+          <a:p>
+            <a:pPr>
+              <a:buNone/>
+            </a:pPr>
+            <a:r>
+              <a:rPr lang="en-US" sz="2000" dirty="0">
+                <a:solidFill>
+                  <a:schemeClr val="accent4">
+                    <a:lumMod val="60000"/>
+                    <a:lumOff val="40000"/>
+                  </a:schemeClr>
+                </a:solidFill>
+                <a:cs typeface="Times New Roman" panose="02020603050405020304" pitchFamily="18" charset="0"/>
+              </a:rPr>
+              <a:t>        </a:t>
+            </a:r>
+            <a:r>
+              <a:rPr lang="en-US" sz="2000" dirty="0" err="1">
+                <a:solidFill>
+                  <a:schemeClr val="accent4">
+                    <a:lumMod val="60000"/>
+                    <a:lumOff val="40000"/>
+                  </a:schemeClr>
+                </a:solidFill>
+                <a:cs typeface="Times New Roman" panose="02020603050405020304" pitchFamily="18" charset="0"/>
+              </a:rPr>
+              <a:t>System.out.println</a:t>
+            </a:r>
+            <a:r>
+              <a:rPr lang="en-US" sz="2000" dirty="0">
+                <a:solidFill>
+                  <a:schemeClr val="accent4">
+                    <a:lumMod val="60000"/>
+                    <a:lumOff val="40000"/>
+                  </a:schemeClr>
+                </a:solidFill>
+                <a:cs typeface="Times New Roman" panose="02020603050405020304" pitchFamily="18" charset="0"/>
+              </a:rPr>
+              <a:t>(result);</a:t>
+            </a:r>
+          </a:p>
+          <a:p>
+            <a:pPr>
+              <a:buNone/>
+            </a:pPr>
+            <a:r>
+              <a:rPr lang="en-US" sz="2000" dirty="0">
+                <a:solidFill>
+                  <a:schemeClr val="accent4">
+                    <a:lumMod val="60000"/>
+                    <a:lumOff val="40000"/>
+                  </a:schemeClr>
+                </a:solidFill>
+                <a:cs typeface="Times New Roman" panose="02020603050405020304" pitchFamily="18" charset="0"/>
+              </a:rPr>
+              <a:t>    }</a:t>
+            </a:r>
+          </a:p>
+          <a:p>
+            <a:pPr>
+              <a:buNone/>
+            </a:pPr>
+            <a:r>
+              <a:rPr lang="en-US" sz="2000" dirty="0">
+                <a:solidFill>
+                  <a:schemeClr val="accent4">
+                    <a:lumMod val="60000"/>
+                    <a:lumOff val="40000"/>
+                  </a:schemeClr>
+                </a:solidFill>
+                <a:cs typeface="Times New Roman" panose="02020603050405020304" pitchFamily="18" charset="0"/>
+              </a:rPr>
+              <a:t>}</a:t>
+            </a:r>
+          </a:p>
+        </p:txBody>
+      </p:sp>
+      <p:sp>
+        <p:nvSpPr>
+          <p:cNvPr id="9" name="TextBox 8">
+            <a:extLst>
+              <a:ext uri="{FF2B5EF4-FFF2-40B4-BE49-F238E27FC236}">
+                <a16:creationId xmlns:a16="http://schemas.microsoft.com/office/drawing/2014/main" id="{440EDA3D-CA3B-9F37-8DDC-2349E94AA658}"/>
+              </a:ext>
+            </a:extLst>
+          </p:cNvPr>
+          <p:cNvSpPr txBox="1"/>
+          <p:nvPr/>
+        </p:nvSpPr>
+        <p:spPr>
+          <a:xfrm>
+            <a:off x="3667125" y="6124575"/>
+            <a:ext cx="3252172" cy="461665"/>
+          </a:xfrm>
+          <a:prstGeom prst="rect">
+            <a:avLst/>
+          </a:prstGeom>
+          <a:noFill/>
+        </p:spPr>
+        <p:txBody>
+          <a:bodyPr wrap="none" rtlCol="0">
+            <a:spAutoFit/>
+          </a:bodyPr>
+          <a:lstStyle/>
+          <a:p>
+            <a:r>
+              <a:rPr lang="en-US" sz="2400" b="1" dirty="0">
+                <a:solidFill>
+                  <a:schemeClr val="accent6">
+                    <a:lumMod val="60000"/>
+                    <a:lumOff val="40000"/>
+                  </a:schemeClr>
+                </a:solidFill>
+              </a:rPr>
+              <a:t>Use any online compiler</a:t>
+            </a:r>
+          </a:p>
+        </p:txBody>
+      </p:sp>
+    </p:spTree>
+    <p:extLst>
+      <p:ext uri="{BB962C8B-B14F-4D97-AF65-F5344CB8AC3E}">
+        <p14:creationId xmlns:p14="http://schemas.microsoft.com/office/powerpoint/2010/main" val="404612749"/>
+      </p:ext>
+    </p:extLst>
+  </p:cSld>
+  <p:clrMapOvr>
+    <a:masterClrMapping/>
+  </p:clrMapOvr>
+</p:sld>
+</file>
+
+<file path=ppt/slides/slide6.xml><?xml version="1.0" encoding="utf-8"?>
+<p:sld xmlns:a="http://schemas.openxmlformats.org/drawingml/2006/main" xmlns:r="http://schemas.openxmlformats.org/officeDocument/2006/relationships" xmlns:p="http://schemas.openxmlformats.org/presentationml/2006/main">
+  <p:cSld>
+    <p:spTree>
+      <p:nvGrpSpPr>
+        <p:cNvPr id="1" name="">
+          <a:extLst>
+            <a:ext uri="{FF2B5EF4-FFF2-40B4-BE49-F238E27FC236}">
+              <a16:creationId xmlns:a16="http://schemas.microsoft.com/office/drawing/2014/main" id="{BCA12991-93E7-907A-C897-B218DB91BA53}"/>
+            </a:ext>
+          </a:extLst>
+        </p:cNvPr>
+        <p:cNvGrpSpPr/>
+        <p:nvPr/>
+      </p:nvGrpSpPr>
+      <p:grpSpPr>
+        <a:xfrm>
+          <a:off x="0" y="0"/>
+          <a:ext cx="0" cy="0"/>
+          <a:chOff x="0" y="0"/>
+          <a:chExt cx="0" cy="0"/>
+        </a:xfrm>
+      </p:grpSpPr>
+      <p:sp>
+        <p:nvSpPr>
           <p:cNvPr id="4" name="TextBox 3">
             <a:extLst>
               <a:ext uri="{FF2B5EF4-FFF2-40B4-BE49-F238E27FC236}">
-                <a16:creationId xmlns:a16="http://schemas.microsoft.com/office/drawing/2014/main" id="{E0F8C66F-5350-1DFF-A59E-1B48E8641DD1}"/>
+                <a16:creationId xmlns:a16="http://schemas.microsoft.com/office/drawing/2014/main" id="{8F6EA68B-C11F-621C-B93E-F3B47CC9D61D}"/>
+              </a:ext>
+            </a:extLst>
+          </p:cNvPr>
+          <p:cNvSpPr txBox="1"/>
+          <p:nvPr/>
+        </p:nvSpPr>
+        <p:spPr>
+          <a:xfrm>
+            <a:off x="657225" y="802839"/>
+            <a:ext cx="3705226" cy="3170099"/>
+          </a:xfrm>
+          <a:prstGeom prst="rect">
+            <a:avLst/>
+          </a:prstGeom>
+          <a:noFill/>
+        </p:spPr>
+        <p:txBody>
+          <a:bodyPr wrap="square">
+            <a:spAutoFit/>
+          </a:bodyPr>
+          <a:lstStyle/>
+          <a:p>
+            <a:pPr>
+              <a:buNone/>
+            </a:pPr>
+            <a:r>
+              <a:rPr lang="en-US" sz="2000" b="1" dirty="0">
+                <a:solidFill>
+                  <a:schemeClr val="accent6">
+                    <a:lumMod val="60000"/>
+                    <a:lumOff val="40000"/>
+                  </a:schemeClr>
+                </a:solidFill>
+              </a:rPr>
+              <a:t>In Rust:</a:t>
+            </a:r>
+          </a:p>
+          <a:p>
+            <a:pPr>
+              <a:buNone/>
+            </a:pPr>
+            <a:endParaRPr lang="en-US" sz="2000" b="1" dirty="0">
+              <a:solidFill>
+                <a:schemeClr val="accent6">
+                  <a:lumMod val="60000"/>
+                  <a:lumOff val="40000"/>
+                </a:schemeClr>
+              </a:solidFill>
+            </a:endParaRPr>
+          </a:p>
+          <a:p>
+            <a:pPr>
+              <a:buNone/>
+            </a:pPr>
+            <a:r>
+              <a:rPr lang="en-US" sz="2000" dirty="0" err="1">
+                <a:solidFill>
+                  <a:schemeClr val="accent4">
+                    <a:lumMod val="60000"/>
+                    <a:lumOff val="40000"/>
+                  </a:schemeClr>
+                </a:solidFill>
+                <a:cs typeface="Times New Roman" panose="02020603050405020304" pitchFamily="18" charset="0"/>
+              </a:rPr>
+              <a:t>fn</a:t>
+            </a:r>
+            <a:r>
+              <a:rPr lang="en-US" sz="2000" dirty="0">
+                <a:solidFill>
+                  <a:schemeClr val="accent4">
+                    <a:lumMod val="60000"/>
+                    <a:lumOff val="40000"/>
+                  </a:schemeClr>
+                </a:solidFill>
+                <a:cs typeface="Times New Roman" panose="02020603050405020304" pitchFamily="18" charset="0"/>
+              </a:rPr>
+              <a:t> main() {</a:t>
+            </a:r>
+          </a:p>
+          <a:p>
+            <a:pPr>
+              <a:buNone/>
+            </a:pPr>
+            <a:r>
+              <a:rPr lang="en-US" sz="2000" dirty="0">
+                <a:solidFill>
+                  <a:schemeClr val="accent4">
+                    <a:lumMod val="60000"/>
+                    <a:lumOff val="40000"/>
+                  </a:schemeClr>
+                </a:solidFill>
+                <a:cs typeface="Times New Roman" panose="02020603050405020304" pitchFamily="18" charset="0"/>
+              </a:rPr>
+              <a:t>    let a = 3;</a:t>
+            </a:r>
+          </a:p>
+          <a:p>
+            <a:pPr>
+              <a:buNone/>
+            </a:pPr>
+            <a:r>
+              <a:rPr lang="en-US" sz="2000" dirty="0">
+                <a:solidFill>
+                  <a:schemeClr val="accent4">
+                    <a:lumMod val="60000"/>
+                    <a:lumOff val="40000"/>
+                  </a:schemeClr>
+                </a:solidFill>
+                <a:cs typeface="Times New Roman" panose="02020603050405020304" pitchFamily="18" charset="0"/>
+              </a:rPr>
+              <a:t>    let b = 2;</a:t>
+            </a:r>
+          </a:p>
+          <a:p>
+            <a:pPr>
+              <a:buNone/>
+            </a:pPr>
+            <a:endParaRPr lang="en-US" sz="2000" dirty="0">
+              <a:solidFill>
+                <a:schemeClr val="accent4">
+                  <a:lumMod val="60000"/>
+                  <a:lumOff val="40000"/>
+                </a:schemeClr>
+              </a:solidFill>
+              <a:cs typeface="Times New Roman" panose="02020603050405020304" pitchFamily="18" charset="0"/>
+            </a:endParaRPr>
+          </a:p>
+          <a:p>
+            <a:pPr>
+              <a:buNone/>
+            </a:pPr>
+            <a:r>
+              <a:rPr lang="en-US" sz="2000" dirty="0">
+                <a:solidFill>
+                  <a:schemeClr val="accent4">
+                    <a:lumMod val="60000"/>
+                    <a:lumOff val="40000"/>
+                  </a:schemeClr>
+                </a:solidFill>
+                <a:cs typeface="Times New Roman" panose="02020603050405020304" pitchFamily="18" charset="0"/>
+              </a:rPr>
+              <a:t>    let result = a + b;</a:t>
+            </a:r>
+          </a:p>
+          <a:p>
+            <a:pPr>
+              <a:buNone/>
+            </a:pPr>
+            <a:endParaRPr lang="en-US" sz="2000" dirty="0">
+              <a:solidFill>
+                <a:schemeClr val="accent4">
+                  <a:lumMod val="60000"/>
+                  <a:lumOff val="40000"/>
+                </a:schemeClr>
+              </a:solidFill>
+              <a:cs typeface="Times New Roman" panose="02020603050405020304" pitchFamily="18" charset="0"/>
+            </a:endParaRPr>
+          </a:p>
+          <a:p>
+            <a:pPr>
+              <a:buNone/>
+            </a:pPr>
+            <a:r>
+              <a:rPr lang="en-US" sz="2000" dirty="0">
+                <a:solidFill>
+                  <a:schemeClr val="accent4">
+                    <a:lumMod val="60000"/>
+                    <a:lumOff val="40000"/>
+                  </a:schemeClr>
+                </a:solidFill>
+                <a:cs typeface="Times New Roman" panose="02020603050405020304" pitchFamily="18" charset="0"/>
+              </a:rPr>
+              <a:t>    </a:t>
+            </a:r>
+            <a:r>
+              <a:rPr lang="en-US" sz="2000" dirty="0" err="1">
+                <a:solidFill>
+                  <a:schemeClr val="accent4">
+                    <a:lumMod val="60000"/>
+                    <a:lumOff val="40000"/>
+                  </a:schemeClr>
+                </a:solidFill>
+                <a:cs typeface="Times New Roman" panose="02020603050405020304" pitchFamily="18" charset="0"/>
+              </a:rPr>
+              <a:t>println</a:t>
+            </a:r>
+            <a:r>
+              <a:rPr lang="en-US" sz="2000" dirty="0">
+                <a:solidFill>
+                  <a:schemeClr val="accent4">
+                    <a:lumMod val="60000"/>
+                    <a:lumOff val="40000"/>
+                  </a:schemeClr>
+                </a:solidFill>
+                <a:cs typeface="Times New Roman" panose="02020603050405020304" pitchFamily="18" charset="0"/>
+              </a:rPr>
+              <a:t>!("{}", result);</a:t>
+            </a:r>
+          </a:p>
+          <a:p>
+            <a:pPr>
+              <a:buNone/>
+            </a:pPr>
+            <a:r>
+              <a:rPr lang="en-US" sz="2000" dirty="0">
+                <a:solidFill>
+                  <a:schemeClr val="accent4">
+                    <a:lumMod val="60000"/>
+                    <a:lumOff val="40000"/>
+                  </a:schemeClr>
+                </a:solidFill>
+                <a:cs typeface="Times New Roman" panose="02020603050405020304" pitchFamily="18" charset="0"/>
+              </a:rPr>
+              <a:t>}</a:t>
+            </a:r>
+          </a:p>
+        </p:txBody>
+      </p:sp>
+      <p:sp>
+        <p:nvSpPr>
+          <p:cNvPr id="2" name="TextBox 1">
+            <a:extLst>
+              <a:ext uri="{FF2B5EF4-FFF2-40B4-BE49-F238E27FC236}">
+                <a16:creationId xmlns:a16="http://schemas.microsoft.com/office/drawing/2014/main" id="{4CEDBF52-23D8-2ECB-601C-B3A94502F60A}"/>
+              </a:ext>
+            </a:extLst>
+          </p:cNvPr>
+          <p:cNvSpPr txBox="1"/>
+          <p:nvPr/>
+        </p:nvSpPr>
+        <p:spPr>
+          <a:xfrm>
+            <a:off x="2714625" y="5972175"/>
+            <a:ext cx="3185231" cy="461665"/>
+          </a:xfrm>
+          <a:prstGeom prst="rect">
+            <a:avLst/>
+          </a:prstGeom>
+          <a:noFill/>
+        </p:spPr>
+        <p:txBody>
+          <a:bodyPr wrap="none" rtlCol="0">
+            <a:spAutoFit/>
+          </a:bodyPr>
+          <a:lstStyle/>
+          <a:p>
+            <a:r>
+              <a:rPr lang="en-US" sz="2400" dirty="0">
+                <a:solidFill>
+                  <a:schemeClr val="accent6">
+                    <a:lumMod val="60000"/>
+                    <a:lumOff val="40000"/>
+                  </a:schemeClr>
+                </a:solidFill>
+              </a:rPr>
+              <a:t>Use any online compiler</a:t>
+            </a:r>
+          </a:p>
+        </p:txBody>
+      </p:sp>
+      <p:sp>
+        <p:nvSpPr>
+          <p:cNvPr id="3" name="TextBox 2">
+            <a:extLst>
+              <a:ext uri="{FF2B5EF4-FFF2-40B4-BE49-F238E27FC236}">
+                <a16:creationId xmlns:a16="http://schemas.microsoft.com/office/drawing/2014/main" id="{616F647E-7328-23EC-7532-55F70C1DFA8D}"/>
+              </a:ext>
+            </a:extLst>
+          </p:cNvPr>
+          <p:cNvSpPr txBox="1"/>
+          <p:nvPr/>
+        </p:nvSpPr>
+        <p:spPr>
+          <a:xfrm>
+            <a:off x="1619250" y="139184"/>
+            <a:ext cx="5772150" cy="461665"/>
+          </a:xfrm>
+          <a:prstGeom prst="rect">
+            <a:avLst/>
+          </a:prstGeom>
+          <a:noFill/>
+        </p:spPr>
+        <p:txBody>
+          <a:bodyPr wrap="square">
+            <a:spAutoFit/>
+          </a:bodyPr>
+          <a:lstStyle/>
+          <a:p>
+            <a:r>
+              <a:rPr lang="en-US" sz="2400" dirty="0">
+                <a:solidFill>
+                  <a:schemeClr val="accent6">
+                    <a:lumMod val="60000"/>
+                    <a:lumOff val="40000"/>
+                  </a:schemeClr>
+                </a:solidFill>
+              </a:rPr>
+              <a:t>(EXTRA) Comparison: Adding 2 numbers</a:t>
+            </a:r>
+            <a:endParaRPr lang="en-US" sz="2400" dirty="0"/>
+          </a:p>
+        </p:txBody>
+      </p:sp>
+      <p:sp>
+        <p:nvSpPr>
+          <p:cNvPr id="5" name="TextBox 4">
+            <a:extLst>
+              <a:ext uri="{FF2B5EF4-FFF2-40B4-BE49-F238E27FC236}">
+                <a16:creationId xmlns:a16="http://schemas.microsoft.com/office/drawing/2014/main" id="{30EFBB24-FECA-96FF-0FED-8D83662A44A8}"/>
+              </a:ext>
+            </a:extLst>
+          </p:cNvPr>
+          <p:cNvSpPr txBox="1"/>
+          <p:nvPr/>
+        </p:nvSpPr>
+        <p:spPr>
+          <a:xfrm>
+            <a:off x="6200775" y="736164"/>
+            <a:ext cx="3705226" cy="2246769"/>
+          </a:xfrm>
+          <a:prstGeom prst="rect">
+            <a:avLst/>
+          </a:prstGeom>
+          <a:noFill/>
+        </p:spPr>
+        <p:txBody>
+          <a:bodyPr wrap="square">
+            <a:spAutoFit/>
+          </a:bodyPr>
+          <a:lstStyle/>
+          <a:p>
+            <a:pPr>
+              <a:buNone/>
+            </a:pPr>
+            <a:r>
+              <a:rPr lang="en-US" sz="2000" b="1" dirty="0">
+                <a:solidFill>
+                  <a:schemeClr val="accent6">
+                    <a:lumMod val="60000"/>
+                    <a:lumOff val="40000"/>
+                  </a:schemeClr>
+                </a:solidFill>
+              </a:rPr>
+              <a:t>In Python:</a:t>
+            </a:r>
+          </a:p>
+          <a:p>
+            <a:pPr>
+              <a:buNone/>
+            </a:pPr>
+            <a:endParaRPr lang="en-US" sz="2000" b="1" dirty="0">
+              <a:solidFill>
+                <a:schemeClr val="accent6">
+                  <a:lumMod val="60000"/>
+                  <a:lumOff val="40000"/>
+                </a:schemeClr>
+              </a:solidFill>
+            </a:endParaRPr>
+          </a:p>
+          <a:p>
+            <a:pPr>
+              <a:buNone/>
+            </a:pPr>
+            <a:r>
+              <a:rPr lang="en-US" sz="2000" dirty="0">
+                <a:solidFill>
+                  <a:schemeClr val="accent4">
+                    <a:lumMod val="60000"/>
+                    <a:lumOff val="40000"/>
+                  </a:schemeClr>
+                </a:solidFill>
+                <a:cs typeface="Times New Roman" panose="02020603050405020304" pitchFamily="18" charset="0"/>
+              </a:rPr>
+              <a:t>a = 3</a:t>
+            </a:r>
+          </a:p>
+          <a:p>
+            <a:pPr>
+              <a:buNone/>
+            </a:pPr>
+            <a:r>
+              <a:rPr lang="en-US" sz="2000" dirty="0">
+                <a:solidFill>
+                  <a:schemeClr val="accent4">
+                    <a:lumMod val="60000"/>
+                    <a:lumOff val="40000"/>
+                  </a:schemeClr>
+                </a:solidFill>
+                <a:cs typeface="Times New Roman" panose="02020603050405020304" pitchFamily="18" charset="0"/>
+              </a:rPr>
+              <a:t>b = 2</a:t>
+            </a:r>
+          </a:p>
+          <a:p>
+            <a:pPr>
+              <a:buNone/>
+            </a:pPr>
+            <a:r>
+              <a:rPr lang="en-US" sz="2000" dirty="0">
+                <a:solidFill>
+                  <a:schemeClr val="accent4">
+                    <a:lumMod val="60000"/>
+                    <a:lumOff val="40000"/>
+                  </a:schemeClr>
+                </a:solidFill>
+                <a:cs typeface="Times New Roman" panose="02020603050405020304" pitchFamily="18" charset="0"/>
+              </a:rPr>
+              <a:t>result = a + b</a:t>
+            </a:r>
+          </a:p>
+          <a:p>
+            <a:pPr>
+              <a:buNone/>
+            </a:pPr>
+            <a:endParaRPr lang="en-US" sz="2000" dirty="0">
+              <a:solidFill>
+                <a:schemeClr val="accent4">
+                  <a:lumMod val="60000"/>
+                  <a:lumOff val="40000"/>
+                </a:schemeClr>
+              </a:solidFill>
+              <a:cs typeface="Times New Roman" panose="02020603050405020304" pitchFamily="18" charset="0"/>
+            </a:endParaRPr>
+          </a:p>
+          <a:p>
+            <a:pPr>
+              <a:buNone/>
+            </a:pPr>
+            <a:r>
+              <a:rPr lang="en-US" sz="2000" dirty="0">
+                <a:solidFill>
+                  <a:schemeClr val="accent4">
+                    <a:lumMod val="60000"/>
+                    <a:lumOff val="40000"/>
+                  </a:schemeClr>
+                </a:solidFill>
+                <a:cs typeface="Times New Roman" panose="02020603050405020304" pitchFamily="18" charset="0"/>
+              </a:rPr>
+              <a:t>print(result)  </a:t>
+            </a:r>
+          </a:p>
+        </p:txBody>
+      </p:sp>
+      <p:sp>
+        <p:nvSpPr>
+          <p:cNvPr id="6" name="TextBox 5">
+            <a:extLst>
+              <a:ext uri="{FF2B5EF4-FFF2-40B4-BE49-F238E27FC236}">
+                <a16:creationId xmlns:a16="http://schemas.microsoft.com/office/drawing/2014/main" id="{F32AA501-A2AF-2332-CCBF-6666B414C81F}"/>
+              </a:ext>
+            </a:extLst>
+          </p:cNvPr>
+          <p:cNvSpPr txBox="1"/>
+          <p:nvPr/>
+        </p:nvSpPr>
+        <p:spPr>
+          <a:xfrm>
+            <a:off x="5876925" y="3971925"/>
+            <a:ext cx="2958695" cy="461665"/>
+          </a:xfrm>
+          <a:prstGeom prst="rect">
+            <a:avLst/>
+          </a:prstGeom>
+          <a:noFill/>
+        </p:spPr>
+        <p:txBody>
+          <a:bodyPr wrap="none" rtlCol="0">
+            <a:spAutoFit/>
+          </a:bodyPr>
+          <a:lstStyle/>
+          <a:p>
+            <a:r>
+              <a:rPr lang="en-US" sz="2400" dirty="0">
+                <a:solidFill>
+                  <a:schemeClr val="accent6">
+                    <a:lumMod val="60000"/>
+                    <a:lumOff val="40000"/>
+                  </a:schemeClr>
+                </a:solidFill>
+              </a:rPr>
+              <a:t>Python is more simple</a:t>
+            </a:r>
+          </a:p>
+        </p:txBody>
+      </p:sp>
+    </p:spTree>
+    <p:extLst>
+      <p:ext uri="{BB962C8B-B14F-4D97-AF65-F5344CB8AC3E}">
+        <p14:creationId xmlns:p14="http://schemas.microsoft.com/office/powerpoint/2010/main" val="968701342"/>
+      </p:ext>
+    </p:extLst>
+  </p:cSld>
+  <p:clrMapOvr>
+    <a:masterClrMapping/>
+  </p:clrMapOvr>
+</p:sld>
+</file>
+
+<file path=ppt/slides/slide7.xml><?xml version="1.0" encoding="utf-8"?>
+<p:sld xmlns:a="http://schemas.openxmlformats.org/drawingml/2006/main" xmlns:r="http://schemas.openxmlformats.org/officeDocument/2006/relationships" xmlns:p="http://schemas.openxmlformats.org/presentationml/2006/main">
+  <p:cSld>
+    <p:spTree>
+      <p:nvGrpSpPr>
+        <p:cNvPr id="1" name="">
+          <a:extLst>
+            <a:ext uri="{FF2B5EF4-FFF2-40B4-BE49-F238E27FC236}">
+              <a16:creationId xmlns:a16="http://schemas.microsoft.com/office/drawing/2014/main" id="{E1886A1E-3870-14C9-B4C1-53F9778B259C}"/>
+            </a:ext>
+          </a:extLst>
+        </p:cNvPr>
+        <p:cNvGrpSpPr/>
+        <p:nvPr/>
+      </p:nvGrpSpPr>
+      <p:grpSpPr>
+        <a:xfrm>
+          <a:off x="0" y="0"/>
+          <a:ext cx="0" cy="0"/>
+          <a:chOff x="0" y="0"/>
+          <a:chExt cx="0" cy="0"/>
+        </a:xfrm>
+      </p:grpSpPr>
+      <p:sp>
+        <p:nvSpPr>
+          <p:cNvPr id="4" name="TextBox 3">
+            <a:extLst>
+              <a:ext uri="{FF2B5EF4-FFF2-40B4-BE49-F238E27FC236}">
+                <a16:creationId xmlns:a16="http://schemas.microsoft.com/office/drawing/2014/main" id="{38112A30-19AD-229F-5748-F1E39A2C8111}"/>
               </a:ext>
             </a:extLst>
           </p:cNvPr>
@@ -9144,7 +10932,7 @@
     </p:spTree>
     <p:extLst>
       <p:ext uri="{BB962C8B-B14F-4D97-AF65-F5344CB8AC3E}">
-        <p14:creationId xmlns:p14="http://schemas.microsoft.com/office/powerpoint/2010/main" val="3146878607"/>
+        <p14:creationId xmlns:p14="http://schemas.microsoft.com/office/powerpoint/2010/main" val="3635416341"/>
       </p:ext>
     </p:extLst>
   </p:cSld>
@@ -9154,7 +10942,7 @@
 </p:sld>
 </file>
 
-<file path=ppt/slides/slide6.xml><?xml version="1.0" encoding="utf-8"?>
+<file path=ppt/slides/slide8.xml><?xml version="1.0" encoding="utf-8"?>
 <p:sld xmlns:a="http://schemas.openxmlformats.org/drawingml/2006/main" xmlns:r="http://schemas.openxmlformats.org/officeDocument/2006/relationships" xmlns:p="http://schemas.openxmlformats.org/presentationml/2006/main">
   <p:cSld>
     <p:spTree>
@@ -9457,7 +11245,7 @@
 </p:sld>
 </file>
 
-<file path=ppt/slides/slide7.xml><?xml version="1.0" encoding="utf-8"?>
+<file path=ppt/slides/slide9.xml><?xml version="1.0" encoding="utf-8"?>
 <p:sld xmlns:a="http://schemas.openxmlformats.org/drawingml/2006/main" xmlns:r="http://schemas.openxmlformats.org/officeDocument/2006/relationships" xmlns:p="http://schemas.openxmlformats.org/presentationml/2006/main">
   <p:cSld>
     <p:spTree>
@@ -9636,726 +11424,6 @@
     <p:extLst>
       <p:ext uri="{BB962C8B-B14F-4D97-AF65-F5344CB8AC3E}">
         <p14:creationId xmlns:p14="http://schemas.microsoft.com/office/powerpoint/2010/main" val="2694681373"/>
-      </p:ext>
-    </p:extLst>
-  </p:cSld>
-  <p:clrMapOvr>
-    <a:masterClrMapping/>
-  </p:clrMapOvr>
-</p:sld>
-</file>
-
-<file path=ppt/slides/slide8.xml><?xml version="1.0" encoding="utf-8"?>
-<p:sld xmlns:a="http://schemas.openxmlformats.org/drawingml/2006/main" xmlns:r="http://schemas.openxmlformats.org/officeDocument/2006/relationships" xmlns:p="http://schemas.openxmlformats.org/presentationml/2006/main">
-  <p:cSld>
-    <p:spTree>
-      <p:nvGrpSpPr>
-        <p:cNvPr id="1" name="">
-          <a:extLst>
-            <a:ext uri="{FF2B5EF4-FFF2-40B4-BE49-F238E27FC236}">
-              <a16:creationId xmlns:a16="http://schemas.microsoft.com/office/drawing/2014/main" id="{D566F5DA-6498-4B35-9A91-9F9298524CDB}"/>
-            </a:ext>
-          </a:extLst>
-        </p:cNvPr>
-        <p:cNvGrpSpPr/>
-        <p:nvPr/>
-      </p:nvGrpSpPr>
-      <p:grpSpPr>
-        <a:xfrm>
-          <a:off x="0" y="0"/>
-          <a:ext cx="0" cy="0"/>
-          <a:chOff x="0" y="0"/>
-          <a:chExt cx="0" cy="0"/>
-        </a:xfrm>
-      </p:grpSpPr>
-      <p:sp>
-        <p:nvSpPr>
-          <p:cNvPr id="8" name="TextBox 7">
-            <a:extLst>
-              <a:ext uri="{FF2B5EF4-FFF2-40B4-BE49-F238E27FC236}">
-                <a16:creationId xmlns:a16="http://schemas.microsoft.com/office/drawing/2014/main" id="{C93622CB-F83C-0410-8221-935BA5B974CF}"/>
-              </a:ext>
-            </a:extLst>
-          </p:cNvPr>
-          <p:cNvSpPr txBox="1"/>
-          <p:nvPr/>
-        </p:nvSpPr>
-        <p:spPr>
-          <a:xfrm>
-            <a:off x="228600" y="800785"/>
-            <a:ext cx="10115550" cy="6124754"/>
-          </a:xfrm>
-          <a:prstGeom prst="rect">
-            <a:avLst/>
-          </a:prstGeom>
-          <a:noFill/>
-        </p:spPr>
-        <p:txBody>
-          <a:bodyPr wrap="square">
-            <a:spAutoFit/>
-          </a:bodyPr>
-          <a:lstStyle/>
-          <a:p>
-            <a:r>
-              <a:rPr lang="en-US" sz="2800" b="1" dirty="0">
-                <a:solidFill>
-                  <a:schemeClr val="accent6">
-                    <a:lumMod val="60000"/>
-                    <a:lumOff val="40000"/>
-                  </a:schemeClr>
-                </a:solidFill>
-              </a:rPr>
-              <a:t>Python Has Huge Community &amp; Libraries</a:t>
-            </a:r>
-          </a:p>
-          <a:p>
-            <a:endParaRPr lang="en-US" sz="2800" b="1" dirty="0">
-              <a:solidFill>
-                <a:schemeClr val="accent6">
-                  <a:lumMod val="60000"/>
-                  <a:lumOff val="40000"/>
-                </a:schemeClr>
-              </a:solidFill>
-            </a:endParaRPr>
-          </a:p>
-          <a:p>
-            <a:r>
-              <a:rPr lang="en-US" sz="2800" dirty="0">
-                <a:solidFill>
-                  <a:schemeClr val="accent6">
-                    <a:lumMod val="60000"/>
-                    <a:lumOff val="40000"/>
-                  </a:schemeClr>
-                </a:solidFill>
-              </a:rPr>
-              <a:t>Python has </a:t>
-            </a:r>
-            <a:r>
-              <a:rPr lang="en-US" sz="2800" b="1" dirty="0">
-                <a:solidFill>
-                  <a:schemeClr val="accent6">
-                    <a:lumMod val="60000"/>
-                    <a:lumOff val="40000"/>
-                  </a:schemeClr>
-                </a:solidFill>
-              </a:rPr>
-              <a:t>ready-made tools</a:t>
-            </a:r>
-            <a:r>
-              <a:rPr lang="en-US" sz="2800" dirty="0">
-                <a:solidFill>
-                  <a:schemeClr val="accent6">
-                    <a:lumMod val="60000"/>
-                    <a:lumOff val="40000"/>
-                  </a:schemeClr>
-                </a:solidFill>
-              </a:rPr>
-              <a:t> (called libraries):</a:t>
-            </a:r>
-          </a:p>
-          <a:p>
-            <a:pPr marL="457200" indent="-457200">
-              <a:buFont typeface="Arial" panose="020B0604020202020204" pitchFamily="34" charset="0"/>
-              <a:buChar char="•"/>
-            </a:pPr>
-            <a:r>
-              <a:rPr lang="en-US" sz="2800" b="1" dirty="0" err="1">
-                <a:solidFill>
-                  <a:schemeClr val="accent6">
-                    <a:lumMod val="60000"/>
-                    <a:lumOff val="40000"/>
-                  </a:schemeClr>
-                </a:solidFill>
-              </a:rPr>
-              <a:t>numpy</a:t>
-            </a:r>
-            <a:r>
-              <a:rPr lang="en-US" sz="2800" dirty="0">
-                <a:solidFill>
-                  <a:schemeClr val="accent6">
-                    <a:lumMod val="60000"/>
-                    <a:lumOff val="40000"/>
-                  </a:schemeClr>
-                </a:solidFill>
-              </a:rPr>
-              <a:t> → math &amp; arrays</a:t>
-            </a:r>
-          </a:p>
-          <a:p>
-            <a:pPr marL="457200" indent="-457200">
-              <a:buFont typeface="Arial" panose="020B0604020202020204" pitchFamily="34" charset="0"/>
-              <a:buChar char="•"/>
-            </a:pPr>
-            <a:endParaRPr lang="en-US" sz="2800" dirty="0">
-              <a:solidFill>
-                <a:schemeClr val="accent6">
-                  <a:lumMod val="60000"/>
-                  <a:lumOff val="40000"/>
-                </a:schemeClr>
-              </a:solidFill>
-            </a:endParaRPr>
-          </a:p>
-          <a:p>
-            <a:pPr marL="457200" indent="-457200">
-              <a:buFont typeface="Arial" panose="020B0604020202020204" pitchFamily="34" charset="0"/>
-              <a:buChar char="•"/>
-            </a:pPr>
-            <a:r>
-              <a:rPr lang="en-US" sz="2800" b="1" dirty="0">
-                <a:solidFill>
-                  <a:schemeClr val="accent6">
-                    <a:lumMod val="60000"/>
-                    <a:lumOff val="40000"/>
-                  </a:schemeClr>
-                </a:solidFill>
-              </a:rPr>
-              <a:t>pandas</a:t>
-            </a:r>
-            <a:r>
-              <a:rPr lang="en-US" sz="2800" dirty="0">
-                <a:solidFill>
-                  <a:schemeClr val="accent6">
-                    <a:lumMod val="60000"/>
-                    <a:lumOff val="40000"/>
-                  </a:schemeClr>
-                </a:solidFill>
-              </a:rPr>
-              <a:t> → data analysis</a:t>
-            </a:r>
-          </a:p>
-          <a:p>
-            <a:pPr marL="457200" indent="-457200">
-              <a:buFont typeface="Arial" panose="020B0604020202020204" pitchFamily="34" charset="0"/>
-              <a:buChar char="•"/>
-            </a:pPr>
-            <a:endParaRPr lang="en-US" sz="2800" dirty="0">
-              <a:solidFill>
-                <a:schemeClr val="accent6">
-                  <a:lumMod val="60000"/>
-                  <a:lumOff val="40000"/>
-                </a:schemeClr>
-              </a:solidFill>
-            </a:endParaRPr>
-          </a:p>
-          <a:p>
-            <a:pPr marL="457200" indent="-457200">
-              <a:buFont typeface="Arial" panose="020B0604020202020204" pitchFamily="34" charset="0"/>
-              <a:buChar char="•"/>
-            </a:pPr>
-            <a:r>
-              <a:rPr lang="en-US" sz="2800" b="1" dirty="0">
-                <a:solidFill>
-                  <a:schemeClr val="accent6">
-                    <a:lumMod val="60000"/>
-                    <a:lumOff val="40000"/>
-                  </a:schemeClr>
-                </a:solidFill>
-              </a:rPr>
-              <a:t>matplotlib</a:t>
-            </a:r>
-            <a:r>
-              <a:rPr lang="en-US" sz="2800" dirty="0">
-                <a:solidFill>
-                  <a:schemeClr val="accent6">
-                    <a:lumMod val="60000"/>
-                    <a:lumOff val="40000"/>
-                  </a:schemeClr>
-                </a:solidFill>
-              </a:rPr>
-              <a:t> → plotting graphs</a:t>
-            </a:r>
-          </a:p>
-          <a:p>
-            <a:pPr marL="457200" indent="-457200">
-              <a:buFont typeface="Arial" panose="020B0604020202020204" pitchFamily="34" charset="0"/>
-              <a:buChar char="•"/>
-            </a:pPr>
-            <a:endParaRPr lang="en-US" sz="2800" dirty="0">
-              <a:solidFill>
-                <a:schemeClr val="accent6">
-                  <a:lumMod val="60000"/>
-                  <a:lumOff val="40000"/>
-                </a:schemeClr>
-              </a:solidFill>
-            </a:endParaRPr>
-          </a:p>
-          <a:p>
-            <a:pPr marL="457200" indent="-457200">
-              <a:buFont typeface="Arial" panose="020B0604020202020204" pitchFamily="34" charset="0"/>
-              <a:buChar char="•"/>
-            </a:pPr>
-            <a:r>
-              <a:rPr lang="en-US" sz="2800" b="1" dirty="0">
-                <a:solidFill>
-                  <a:schemeClr val="accent6">
-                    <a:lumMod val="60000"/>
-                    <a:lumOff val="40000"/>
-                  </a:schemeClr>
-                </a:solidFill>
-              </a:rPr>
-              <a:t>scikit-learn</a:t>
-            </a:r>
-            <a:r>
-              <a:rPr lang="en-US" sz="2800" dirty="0">
-                <a:solidFill>
-                  <a:schemeClr val="accent6">
-                    <a:lumMod val="60000"/>
-                    <a:lumOff val="40000"/>
-                  </a:schemeClr>
-                </a:solidFill>
-              </a:rPr>
-              <a:t> → machine learning</a:t>
-            </a:r>
-          </a:p>
-          <a:p>
-            <a:pPr marL="457200" indent="-457200">
-              <a:buFont typeface="Arial" panose="020B0604020202020204" pitchFamily="34" charset="0"/>
-              <a:buChar char="•"/>
-            </a:pPr>
-            <a:endParaRPr lang="en-US" sz="2800" dirty="0">
-              <a:solidFill>
-                <a:schemeClr val="accent6">
-                  <a:lumMod val="60000"/>
-                  <a:lumOff val="40000"/>
-                </a:schemeClr>
-              </a:solidFill>
-            </a:endParaRPr>
-          </a:p>
-          <a:p>
-            <a:pPr marL="457200" indent="-457200">
-              <a:buFont typeface="Arial" panose="020B0604020202020204" pitchFamily="34" charset="0"/>
-              <a:buChar char="•"/>
-            </a:pPr>
-            <a:r>
-              <a:rPr lang="en-US" sz="2800" b="1" dirty="0" err="1">
-                <a:solidFill>
-                  <a:schemeClr val="accent6">
-                    <a:lumMod val="60000"/>
-                    <a:lumOff val="40000"/>
-                  </a:schemeClr>
-                </a:solidFill>
-              </a:rPr>
-              <a:t>tensorflow</a:t>
-            </a:r>
-            <a:r>
-              <a:rPr lang="en-US" sz="2800" dirty="0">
-                <a:solidFill>
-                  <a:schemeClr val="accent6">
-                    <a:lumMod val="60000"/>
-                    <a:lumOff val="40000"/>
-                  </a:schemeClr>
-                </a:solidFill>
-              </a:rPr>
-              <a:t>, </a:t>
-            </a:r>
-            <a:r>
-              <a:rPr lang="en-US" sz="2800" b="1" dirty="0" err="1">
-                <a:solidFill>
-                  <a:schemeClr val="accent6">
-                    <a:lumMod val="60000"/>
-                    <a:lumOff val="40000"/>
-                  </a:schemeClr>
-                </a:solidFill>
-              </a:rPr>
-              <a:t>pytorch</a:t>
-            </a:r>
-            <a:r>
-              <a:rPr lang="en-US" sz="2800" dirty="0">
-                <a:solidFill>
-                  <a:schemeClr val="accent6">
-                    <a:lumMod val="60000"/>
-                    <a:lumOff val="40000"/>
-                  </a:schemeClr>
-                </a:solidFill>
-              </a:rPr>
-              <a:t> → deep learning</a:t>
-            </a:r>
-          </a:p>
-          <a:p>
-            <a:endParaRPr lang="en-US" sz="2800" dirty="0">
-              <a:solidFill>
-                <a:schemeClr val="accent6">
-                  <a:lumMod val="60000"/>
-                  <a:lumOff val="40000"/>
-                </a:schemeClr>
-              </a:solidFill>
-            </a:endParaRPr>
-          </a:p>
-          <a:p>
-            <a:r>
-              <a:rPr lang="en-US" sz="2800" dirty="0">
-                <a:solidFill>
-                  <a:schemeClr val="accent6">
-                    <a:lumMod val="60000"/>
-                    <a:lumOff val="40000"/>
-                  </a:schemeClr>
-                </a:solidFill>
-              </a:rPr>
-              <a:t>You write </a:t>
-            </a:r>
-            <a:r>
-              <a:rPr lang="en-US" sz="2800" b="1" dirty="0">
-                <a:solidFill>
-                  <a:schemeClr val="accent6">
-                    <a:lumMod val="60000"/>
-                    <a:lumOff val="40000"/>
-                  </a:schemeClr>
-                </a:solidFill>
-              </a:rPr>
-              <a:t>less code and </a:t>
-            </a:r>
-            <a:r>
-              <a:rPr lang="en-US" sz="2800" dirty="0">
-                <a:solidFill>
-                  <a:schemeClr val="accent6">
-                    <a:lumMod val="60000"/>
-                    <a:lumOff val="40000"/>
-                  </a:schemeClr>
-                </a:solidFill>
-              </a:rPr>
-              <a:t>You build </a:t>
-            </a:r>
-            <a:r>
-              <a:rPr lang="en-US" sz="2800" b="1" dirty="0">
-                <a:solidFill>
-                  <a:schemeClr val="accent6">
-                    <a:lumMod val="60000"/>
-                    <a:lumOff val="40000"/>
-                  </a:schemeClr>
-                </a:solidFill>
-              </a:rPr>
-              <a:t>more powerful applications</a:t>
-            </a:r>
-            <a:endParaRPr lang="en-US" sz="2800" dirty="0">
-              <a:solidFill>
-                <a:schemeClr val="accent6">
-                  <a:lumMod val="60000"/>
-                  <a:lumOff val="40000"/>
-                </a:schemeClr>
-              </a:solidFill>
-            </a:endParaRPr>
-          </a:p>
-        </p:txBody>
-      </p:sp>
-      <p:sp>
-        <p:nvSpPr>
-          <p:cNvPr id="10" name="TextBox 9">
-            <a:extLst>
-              <a:ext uri="{FF2B5EF4-FFF2-40B4-BE49-F238E27FC236}">
-                <a16:creationId xmlns:a16="http://schemas.microsoft.com/office/drawing/2014/main" id="{7ED86175-E387-EAB6-C969-79A3C2004EC7}"/>
-              </a:ext>
-            </a:extLst>
-          </p:cNvPr>
-          <p:cNvSpPr txBox="1"/>
-          <p:nvPr/>
-        </p:nvSpPr>
-        <p:spPr>
-          <a:xfrm>
-            <a:off x="1466851" y="148709"/>
-            <a:ext cx="10734674" cy="584775"/>
-          </a:xfrm>
-          <a:prstGeom prst="rect">
-            <a:avLst/>
-          </a:prstGeom>
-          <a:noFill/>
-        </p:spPr>
-        <p:txBody>
-          <a:bodyPr wrap="square">
-            <a:spAutoFit/>
-          </a:bodyPr>
-          <a:lstStyle/>
-          <a:p>
-            <a:pPr eaLnBrk="0" fontAlgn="base" hangingPunct="0">
-              <a:lnSpc>
-                <a:spcPct val="100000"/>
-              </a:lnSpc>
-              <a:spcBef>
-                <a:spcPct val="0"/>
-              </a:spcBef>
-              <a:spcAft>
-                <a:spcPct val="0"/>
-              </a:spcAft>
-            </a:pPr>
-            <a:r>
-              <a:rPr lang="en-US" sz="3200" b="1" dirty="0">
-                <a:solidFill>
-                  <a:schemeClr val="accent6">
-                    <a:lumMod val="60000"/>
-                    <a:lumOff val="40000"/>
-                  </a:schemeClr>
-                </a:solidFill>
-              </a:rPr>
-              <a:t>Why should I learn Python instead of other languages?</a:t>
-            </a:r>
-          </a:p>
-        </p:txBody>
-      </p:sp>
-      <p:pic>
-        <p:nvPicPr>
-          <p:cNvPr id="3" name="Picture 2" descr="A black letter with a white background&#10;&#10;AI-generated content may be incorrect.">
-            <a:extLst>
-              <a:ext uri="{FF2B5EF4-FFF2-40B4-BE49-F238E27FC236}">
-                <a16:creationId xmlns:a16="http://schemas.microsoft.com/office/drawing/2014/main" id="{25EA1151-CCA6-42D7-F521-4CC5E8EC9DFB}"/>
-              </a:ext>
-            </a:extLst>
-          </p:cNvPr>
-          <p:cNvPicPr>
-            <a:picLocks noChangeAspect="1"/>
-          </p:cNvPicPr>
-          <p:nvPr/>
-        </p:nvPicPr>
-        <p:blipFill>
-          <a:blip r:embed="rId3"/>
-          <a:stretch>
-            <a:fillRect/>
-          </a:stretch>
-        </p:blipFill>
-        <p:spPr>
-          <a:xfrm>
-            <a:off x="8040537" y="1916823"/>
-            <a:ext cx="2933897" cy="832311"/>
-          </a:xfrm>
-          <a:prstGeom prst="rect">
-            <a:avLst/>
-          </a:prstGeom>
-        </p:spPr>
-      </p:pic>
-      <p:pic>
-        <p:nvPicPr>
-          <p:cNvPr id="5" name="Picture 4" descr="A blue and white sign with white letters&#10;&#10;AI-generated content may be incorrect.">
-            <a:extLst>
-              <a:ext uri="{FF2B5EF4-FFF2-40B4-BE49-F238E27FC236}">
-                <a16:creationId xmlns:a16="http://schemas.microsoft.com/office/drawing/2014/main" id="{98BE1F94-0941-458F-7FE7-AB41D0EF4715}"/>
-              </a:ext>
-            </a:extLst>
-          </p:cNvPr>
-          <p:cNvPicPr>
-            <a:picLocks noChangeAspect="1"/>
-          </p:cNvPicPr>
-          <p:nvPr/>
-        </p:nvPicPr>
-        <p:blipFill>
-          <a:blip r:embed="rId4"/>
-          <a:stretch>
-            <a:fillRect/>
-          </a:stretch>
-        </p:blipFill>
-        <p:spPr>
-          <a:xfrm>
-            <a:off x="4989038" y="2749134"/>
-            <a:ext cx="2399016" cy="832311"/>
-          </a:xfrm>
-          <a:prstGeom prst="rect">
-            <a:avLst/>
-          </a:prstGeom>
-        </p:spPr>
-      </p:pic>
-      <p:pic>
-        <p:nvPicPr>
-          <p:cNvPr id="7" name="Picture 6" descr="A blue text with a white background&#10;&#10;AI-generated content may be incorrect.">
-            <a:extLst>
-              <a:ext uri="{FF2B5EF4-FFF2-40B4-BE49-F238E27FC236}">
-                <a16:creationId xmlns:a16="http://schemas.microsoft.com/office/drawing/2014/main" id="{D2040B8D-EA15-4DF3-0B46-F816040B8305}"/>
-              </a:ext>
-            </a:extLst>
-          </p:cNvPr>
-          <p:cNvPicPr>
-            <a:picLocks noChangeAspect="1"/>
-          </p:cNvPicPr>
-          <p:nvPr/>
-        </p:nvPicPr>
-        <p:blipFill>
-          <a:blip r:embed="rId5"/>
-          <a:stretch>
-            <a:fillRect/>
-          </a:stretch>
-        </p:blipFill>
-        <p:spPr>
-          <a:xfrm>
-            <a:off x="8653855" y="3753521"/>
-            <a:ext cx="2029108" cy="495369"/>
-          </a:xfrm>
-          <a:prstGeom prst="rect">
-            <a:avLst/>
-          </a:prstGeom>
-        </p:spPr>
-      </p:pic>
-      <p:pic>
-        <p:nvPicPr>
-          <p:cNvPr id="11" name="Picture 10" descr="A logo of a group of people&#10;&#10;AI-generated content may be incorrect.">
-            <a:extLst>
-              <a:ext uri="{FF2B5EF4-FFF2-40B4-BE49-F238E27FC236}">
-                <a16:creationId xmlns:a16="http://schemas.microsoft.com/office/drawing/2014/main" id="{C16EAD4B-E3FE-B7F4-1116-2EF89AADDDE0}"/>
-              </a:ext>
-            </a:extLst>
-          </p:cNvPr>
-          <p:cNvPicPr>
-            <a:picLocks noChangeAspect="1"/>
-          </p:cNvPicPr>
-          <p:nvPr/>
-        </p:nvPicPr>
-        <p:blipFill>
-          <a:blip r:embed="rId6"/>
-          <a:stretch>
-            <a:fillRect/>
-          </a:stretch>
-        </p:blipFill>
-        <p:spPr>
-          <a:xfrm>
-            <a:off x="5857732" y="4248890"/>
-            <a:ext cx="2038635" cy="1124107"/>
-          </a:xfrm>
-          <a:prstGeom prst="rect">
-            <a:avLst/>
-          </a:prstGeom>
-        </p:spPr>
-      </p:pic>
-    </p:spTree>
-    <p:extLst>
-      <p:ext uri="{BB962C8B-B14F-4D97-AF65-F5344CB8AC3E}">
-        <p14:creationId xmlns:p14="http://schemas.microsoft.com/office/powerpoint/2010/main" val="4249045249"/>
-      </p:ext>
-    </p:extLst>
-  </p:cSld>
-  <p:clrMapOvr>
-    <a:masterClrMapping/>
-  </p:clrMapOvr>
-</p:sld>
-</file>
-
-<file path=ppt/slides/slide9.xml><?xml version="1.0" encoding="utf-8"?>
-<p:sld xmlns:a="http://schemas.openxmlformats.org/drawingml/2006/main" xmlns:r="http://schemas.openxmlformats.org/officeDocument/2006/relationships" xmlns:p="http://schemas.openxmlformats.org/presentationml/2006/main">
-  <p:cSld>
-    <p:spTree>
-      <p:nvGrpSpPr>
-        <p:cNvPr id="1" name="">
-          <a:extLst>
-            <a:ext uri="{FF2B5EF4-FFF2-40B4-BE49-F238E27FC236}">
-              <a16:creationId xmlns:a16="http://schemas.microsoft.com/office/drawing/2014/main" id="{8FEAD46C-096F-4CA9-56A8-82618AB3D81A}"/>
-            </a:ext>
-          </a:extLst>
-        </p:cNvPr>
-        <p:cNvGrpSpPr/>
-        <p:nvPr/>
-      </p:nvGrpSpPr>
-      <p:grpSpPr>
-        <a:xfrm>
-          <a:off x="0" y="0"/>
-          <a:ext cx="0" cy="0"/>
-          <a:chOff x="0" y="0"/>
-          <a:chExt cx="0" cy="0"/>
-        </a:xfrm>
-      </p:grpSpPr>
-      <p:sp>
-        <p:nvSpPr>
-          <p:cNvPr id="8" name="TextBox 7">
-            <a:extLst>
-              <a:ext uri="{FF2B5EF4-FFF2-40B4-BE49-F238E27FC236}">
-                <a16:creationId xmlns:a16="http://schemas.microsoft.com/office/drawing/2014/main" id="{07521E19-FD7C-F5B4-9FED-9B5B4A9663B9}"/>
-              </a:ext>
-            </a:extLst>
-          </p:cNvPr>
-          <p:cNvSpPr txBox="1"/>
-          <p:nvPr/>
-        </p:nvSpPr>
-        <p:spPr>
-          <a:xfrm>
-            <a:off x="1495425" y="2734360"/>
-            <a:ext cx="8477250" cy="707886"/>
-          </a:xfrm>
-          <a:prstGeom prst="rect">
-            <a:avLst/>
-          </a:prstGeom>
-          <a:noFill/>
-        </p:spPr>
-        <p:txBody>
-          <a:bodyPr wrap="square">
-            <a:spAutoFit/>
-          </a:bodyPr>
-          <a:lstStyle/>
-          <a:p>
-            <a:pPr lvl="0" algn="ctr">
-              <a:defRPr/>
-            </a:pPr>
-            <a:r>
-              <a:rPr lang="en-US" sz="4000" b="1" dirty="0">
-                <a:solidFill>
-                  <a:schemeClr val="accent6">
-                    <a:lumMod val="60000"/>
-                    <a:lumOff val="40000"/>
-                  </a:schemeClr>
-                </a:solidFill>
-              </a:rPr>
-              <a:t>Ideas into Reality</a:t>
-            </a:r>
-            <a:endParaRPr lang="en-US" sz="4000" dirty="0">
-              <a:solidFill>
-                <a:schemeClr val="accent6">
-                  <a:lumMod val="60000"/>
-                  <a:lumOff val="40000"/>
-                </a:schemeClr>
-              </a:solidFill>
-            </a:endParaRPr>
-          </a:p>
-        </p:txBody>
-      </p:sp>
-      <p:sp>
-        <p:nvSpPr>
-          <p:cNvPr id="10" name="TextBox 9">
-            <a:extLst>
-              <a:ext uri="{FF2B5EF4-FFF2-40B4-BE49-F238E27FC236}">
-                <a16:creationId xmlns:a16="http://schemas.microsoft.com/office/drawing/2014/main" id="{3958B7F3-6C91-1242-DFDE-C2078D410523}"/>
-              </a:ext>
-            </a:extLst>
-          </p:cNvPr>
-          <p:cNvSpPr txBox="1"/>
-          <p:nvPr/>
-        </p:nvSpPr>
-        <p:spPr>
-          <a:xfrm>
-            <a:off x="1466851" y="148709"/>
-            <a:ext cx="10734674" cy="584775"/>
-          </a:xfrm>
-          <a:prstGeom prst="rect">
-            <a:avLst/>
-          </a:prstGeom>
-          <a:noFill/>
-        </p:spPr>
-        <p:txBody>
-          <a:bodyPr wrap="square">
-            <a:spAutoFit/>
-          </a:bodyPr>
-          <a:lstStyle/>
-          <a:p>
-            <a:pPr eaLnBrk="0" fontAlgn="base" hangingPunct="0">
-              <a:lnSpc>
-                <a:spcPct val="100000"/>
-              </a:lnSpc>
-              <a:spcBef>
-                <a:spcPct val="0"/>
-              </a:spcBef>
-              <a:spcAft>
-                <a:spcPct val="0"/>
-              </a:spcAft>
-            </a:pPr>
-            <a:r>
-              <a:rPr lang="en-US" sz="3200" b="1" dirty="0">
-                <a:solidFill>
-                  <a:schemeClr val="accent6">
-                    <a:lumMod val="60000"/>
-                    <a:lumOff val="40000"/>
-                  </a:schemeClr>
-                </a:solidFill>
-              </a:rPr>
-              <a:t>Why should I learn Python instead of other languages?</a:t>
-            </a:r>
-          </a:p>
-        </p:txBody>
-      </p:sp>
-    </p:spTree>
-    <p:extLst>
-      <p:ext uri="{BB962C8B-B14F-4D97-AF65-F5344CB8AC3E}">
-        <p14:creationId xmlns:p14="http://schemas.microsoft.com/office/powerpoint/2010/main" val="1772711796"/>
       </p:ext>
     </p:extLst>
   </p:cSld>
